--- a/submission/slides/Plant_Reliability_Agent_submission.pptx
+++ b/submission/slides/Plant_Reliability_Agent_submission.pptx
@@ -653,7 +653,7 @@
           <a:lstStyle/>
           <a:p>
             <a:r>
-              <a:t>공개 PreDist 사건 보고서 32건을 케이스당 한 번씩 같은 자료, 같은 출력 형식으로 돌렸습니다. 참조와 형식 검사 통과는 Nemotron 3 Ultra 32건 중 15건, 참고 기준인 Claude Code와 Sonnet 5는 32건 모두입니다. Ultra가 통과하지 못한 17건 중 13건은 모델 제공 서비스의 호출 오류, 즉 HTTP 오류였고, 4건은 출력 형식이나 참조 검사 실패였습니다. 호출 오류를 한 번 다시 실행해도 결과는 15건으로 같았습니다. 이것은 진단 정확도 평가가 아닙니다. 부족한 부분은 오프라인 환경에서 보완할 예정입니다.</a:t>
+              <a:t>공개 PreDist 사건 32건을 같은 자료와 같은 출력 형식으로 돌렸습니다. Claude Sonnet 5는 클라우드 최고 수준의 기준점이지만, 보안 때문에 발전소 안에서는 쓸 수 없습니다. 질문은 누가 이기느냐가 아니라, 현장에 설치할 수 있는 모델이 이 상한선에 얼마나 가까운가입니다. Ultra가 끝까지 작성한 점검안 15개는 모두 근거 검사를 통과했습니다. 조회하지 않은 기록을 지어낸 경우는 한 번도 없었습니다. 둘 다 결과를 낸 사례의 내용 점수도 41 대 42로 비슷했습니다. Ultra가 놓친 17건 중 13건은 호스팅 API 오류로 답을 받지 못한 경우이고, 4건은 시간 구간을 한도보다 길게 요청한 한 가지 도구 실수였습니다. 즉 격차는 판단력이 아니라 실행 안정성에서 나옵니다. 현장 배포로 외부 API 요인을 없애고 도구 쪽에서 요청 범위를 자동으로 맞춰 주는 것이 오프라인 보완 계획입니다. 이 검사는 진단 정확도 평가는 아닙니다.</a:t>
             </a:r>
           </a:p>
         </p:txBody>
@@ -5970,7 +5970,7 @@
                 <a:ea typeface="Apple SD Gothic Neo"/>
                 <a:cs typeface="Apple SD Gothic Neo"/>
               </a:rPr>
-              <a:t>PreDist 사건 보고서 32건 · 같은 자료 · 같은 출력 형식</a:t>
+              <a:t>PreDist 사건 32건 · 같은 자료 · 같은 출력 형식 · 사건당 1회</a:t>
             </a:r>
           </a:p>
         </p:txBody>
@@ -6011,7 +6011,7 @@
                 <a:ea typeface="Apple SD Gothic Neo"/>
                 <a:cs typeface="Apple SD Gothic Neo"/>
               </a:rPr>
-              <a:t>평가 결과</a:t>
+              <a:t>평가 결과: 판단의 질은 상한선에 가깝다</a:t>
             </a:r>
           </a:p>
         </p:txBody>
@@ -6032,8 +6032,8 @@
         </p:blipFill>
         <p:spPr>
           <a:xfrm>
-            <a:off x="2449292" y="1737360"/>
-            <a:ext cx="7262934" cy="3611880"/>
+            <a:off x="548640" y="1783080"/>
+            <a:ext cx="6675120" cy="3319558"/>
           </a:xfrm>
           <a:prstGeom prst="rect">
             <a:avLst/>
@@ -6042,7 +6042,210 @@
       </p:pic>
       <p:sp>
         <p:nvSpPr>
-          <p:cNvPr id="5" name="Rounded Rectangle 4"/>
+          <p:cNvPr id="5" name="TextBox 4"/>
+          <p:cNvSpPr txBox="1"/>
+          <p:nvPr/>
+        </p:nvSpPr>
+        <p:spPr>
+          <a:xfrm>
+            <a:off x="7498079" y="1783080"/>
+            <a:ext cx="4206240" cy="3566160"/>
+          </a:xfrm>
+          <a:prstGeom prst="rect">
+            <a:avLst/>
+          </a:prstGeom>
+          <a:noFill/>
+        </p:spPr>
+        <p:txBody>
+          <a:bodyPr wrap="square" lIns="18288" rIns="18288" tIns="18288" bIns="18288" anchor="t">
+            <a:spAutoFit/>
+          </a:bodyPr>
+          <a:lstStyle/>
+          <a:p>
+            <a:pPr algn="l">
+              <a:lnSpc>
+                <a:spcPct val="115000"/>
+              </a:lnSpc>
+            </a:pPr>
+            <a:r>
+              <a:rPr sz="1900" b="1">
+                <a:solidFill>
+                  <a:srgbClr val="62736A"/>
+                </a:solidFill>
+                <a:latin typeface="Apple SD Gothic Neo"/>
+                <a:ea typeface="Apple SD Gothic Neo"/>
+                <a:cs typeface="Apple SD Gothic Neo"/>
+              </a:rPr>
+              <a:t>Sonnet 5 = 클라우드 상한선</a:t>
+            </a:r>
+          </a:p>
+          <a:p>
+            <a:pPr algn="l">
+              <a:lnSpc>
+                <a:spcPct val="115000"/>
+              </a:lnSpc>
+            </a:pPr>
+            <a:r>
+              <a:rPr sz="1500" b="0">
+                <a:solidFill>
+                  <a:srgbClr val="62736A"/>
+                </a:solidFill>
+                <a:latin typeface="Apple SD Gothic Neo"/>
+                <a:ea typeface="Apple SD Gothic Neo"/>
+                <a:cs typeface="Apple SD Gothic Neo"/>
+              </a:rPr>
+              <a:t>보안상 현장 사용 불가 · 32/32</a:t>
+            </a:r>
+          </a:p>
+          <a:p>
+            <a:pPr algn="l">
+              <a:lnSpc>
+                <a:spcPct val="115000"/>
+              </a:lnSpc>
+            </a:pPr>
+            <a:r>
+              <a:rPr sz="800" b="0">
+                <a:solidFill>
+                  <a:srgbClr val="172B27"/>
+                </a:solidFill>
+                <a:latin typeface="Apple SD Gothic Neo"/>
+                <a:ea typeface="Apple SD Gothic Neo"/>
+                <a:cs typeface="Apple SD Gothic Neo"/>
+              </a:rPr>
+              <a:t/>
+            </a:r>
+          </a:p>
+          <a:p>
+            <a:pPr algn="l">
+              <a:lnSpc>
+                <a:spcPct val="115000"/>
+              </a:lnSpc>
+            </a:pPr>
+            <a:r>
+              <a:rPr sz="1900" b="1">
+                <a:solidFill>
+                  <a:srgbClr val="76B900"/>
+                </a:solidFill>
+                <a:latin typeface="Apple SD Gothic Neo"/>
+                <a:ea typeface="Apple SD Gothic Neo"/>
+                <a:cs typeface="Apple SD Gothic Neo"/>
+              </a:rPr>
+              <a:t>Ultra가 쓴 점검안 15개</a:t>
+            </a:r>
+          </a:p>
+          <a:p>
+            <a:pPr algn="l">
+              <a:lnSpc>
+                <a:spcPct val="115000"/>
+              </a:lnSpc>
+            </a:pPr>
+            <a:r>
+              <a:rPr sz="1500" b="0">
+                <a:solidFill>
+                  <a:srgbClr val="172B27"/>
+                </a:solidFill>
+                <a:latin typeface="Apple SD Gothic Neo"/>
+                <a:ea typeface="Apple SD Gothic Neo"/>
+                <a:cs typeface="Apple SD Gothic Neo"/>
+              </a:rPr>
+              <a:t>근거 조작 0건 · 모두 검사 통과</a:t>
+            </a:r>
+          </a:p>
+          <a:p>
+            <a:pPr algn="l">
+              <a:lnSpc>
+                <a:spcPct val="115000"/>
+              </a:lnSpc>
+            </a:pPr>
+            <a:r>
+              <a:rPr sz="800" b="0">
+                <a:solidFill>
+                  <a:srgbClr val="172B27"/>
+                </a:solidFill>
+                <a:latin typeface="Apple SD Gothic Neo"/>
+                <a:ea typeface="Apple SD Gothic Neo"/>
+                <a:cs typeface="Apple SD Gothic Neo"/>
+              </a:rPr>
+              <a:t/>
+            </a:r>
+          </a:p>
+          <a:p>
+            <a:pPr algn="l">
+              <a:lnSpc>
+                <a:spcPct val="115000"/>
+              </a:lnSpc>
+            </a:pPr>
+            <a:r>
+              <a:rPr sz="1900" b="1">
+                <a:solidFill>
+                  <a:srgbClr val="D06B3D"/>
+                </a:solidFill>
+                <a:latin typeface="Apple SD Gothic Neo"/>
+                <a:ea typeface="Apple SD Gothic Neo"/>
+                <a:cs typeface="Apple SD Gothic Neo"/>
+              </a:rPr>
+              <a:t>놓친 17건의 이유</a:t>
+            </a:r>
+          </a:p>
+          <a:p>
+            <a:pPr algn="l">
+              <a:lnSpc>
+                <a:spcPct val="115000"/>
+              </a:lnSpc>
+            </a:pPr>
+            <a:r>
+              <a:rPr sz="1500" b="0">
+                <a:solidFill>
+                  <a:srgbClr val="172B27"/>
+                </a:solidFill>
+                <a:latin typeface="Apple SD Gothic Neo"/>
+                <a:ea typeface="Apple SD Gothic Neo"/>
+                <a:cs typeface="Apple SD Gothic Neo"/>
+              </a:rPr>
+              <a:t>API 오류 13 · 도구 실수 4 (한 가지)</a:t>
+            </a:r>
+          </a:p>
+          <a:p>
+            <a:pPr algn="l">
+              <a:lnSpc>
+                <a:spcPct val="115000"/>
+              </a:lnSpc>
+            </a:pPr>
+            <a:r>
+              <a:rPr sz="800" b="0">
+                <a:solidFill>
+                  <a:srgbClr val="172B27"/>
+                </a:solidFill>
+                <a:latin typeface="Apple SD Gothic Neo"/>
+                <a:ea typeface="Apple SD Gothic Neo"/>
+                <a:cs typeface="Apple SD Gothic Neo"/>
+              </a:rPr>
+              <a:t/>
+            </a:r>
+          </a:p>
+          <a:p>
+            <a:pPr algn="l">
+              <a:lnSpc>
+                <a:spcPct val="115000"/>
+              </a:lnSpc>
+            </a:pPr>
+            <a:r>
+              <a:rPr sz="1900" b="1">
+                <a:solidFill>
+                  <a:srgbClr val="172B27"/>
+                </a:solidFill>
+                <a:latin typeface="Apple SD Gothic Neo"/>
+                <a:ea typeface="Apple SD Gothic Neo"/>
+                <a:cs typeface="Apple SD Gothic Neo"/>
+              </a:rPr>
+              <a:t>내용 점수 41 : 42 / 48 (2건)</a:t>
+            </a:r>
+          </a:p>
+        </p:txBody>
+      </p:sp>
+      <p:sp>
+        <p:nvSpPr>
+          <p:cNvPr id="6" name="Rounded Rectangle 5"/>
           <p:cNvSpPr/>
           <p:nvPr/>
         </p:nvSpPr>
@@ -6088,7 +6291,7 @@
       </p:sp>
       <p:sp>
         <p:nvSpPr>
-          <p:cNvPr id="6" name="TextBox 5"/>
+          <p:cNvPr id="7" name="TextBox 6"/>
           <p:cNvSpPr txBox="1"/>
           <p:nvPr/>
         </p:nvSpPr>
@@ -6122,7 +6325,7 @@
                 <a:ea typeface="Apple SD Gothic Neo"/>
                 <a:cs typeface="Apple SD Gothic Neo"/>
               </a:rPr>
-              <a:t>부족한 부분은 </a:t>
+              <a:t>격차는 판단력이 아니라 </a:t>
             </a:r>
             <a:r>
               <a:rPr sz="2000" b="1">
@@ -6133,10 +6336,10 @@
                 <a:ea typeface="Apple SD Gothic Neo"/>
                 <a:cs typeface="Apple SD Gothic Neo"/>
               </a:rPr>
-              <a:t>오프라인 환경에서 보완 예정</a:t>
-            </a:r>
-            <a:r>
-              <a:rPr sz="1500" b="0">
+              <a:t>실행 안정성</a:t>
+            </a:r>
+            <a:r>
+              <a:rPr sz="1600" b="0">
                 <a:solidFill>
                   <a:srgbClr val="62736A"/>
                 </a:solidFill>
@@ -6144,14 +6347,14 @@
                 <a:ea typeface="Apple SD Gothic Neo"/>
                 <a:cs typeface="Apple SD Gothic Neo"/>
               </a:rPr>
-              <a:t>  ·  Ultra 미통과 17건 중 13건은 호출 오류(HTTP) · 진단 정확도 평가 아님</a:t>
-            </a:r>
-          </a:p>
-        </p:txBody>
-      </p:sp>
-      <p:sp>
-        <p:nvSpPr>
-          <p:cNvPr id="7" name="TextBox 6"/>
+              <a:t>  →  현장 배포 + 도구 보완으로 오프라인에서 해결 예정</a:t>
+            </a:r>
+          </a:p>
+        </p:txBody>
+      </p:sp>
+      <p:sp>
+        <p:nvSpPr>
+          <p:cNvPr id="8" name="TextBox 7"/>
           <p:cNvSpPr txBox="1"/>
           <p:nvPr/>
         </p:nvSpPr>

--- a/submission/slides/Plant_Reliability_Agent_submission.pptx
+++ b/submission/slides/Plant_Reliability_Agent_submission.pptx
@@ -17,6 +17,7 @@
     <p:sldId id="265" r:id="rId17"/>
     <p:sldId id="266" r:id="rId18"/>
     <p:sldId id="267" r:id="rId19"/>
+    <p:sldId id="268" r:id="rId20"/>
   </p:sldIdLst>
   <p:sldSz cx="12191695" cy="6858000" type="screen4x3"/>
   <p:notesSz cx="6858000" cy="9144000"/>
@@ -583,7 +584,7 @@
           <a:lstStyle/>
           <a:p>
             <a:r>
-              <a:t>System 2의 구조입니다. 신고와 접수 시각이 들어오면 NVIDIA NIM으로 제공되는 Nemotron 3 Ultra가 읽을 자료를 고릅니다. 읽기 전용 도구는 NeMo Agent Toolkit으로 등록했고, 사례 52 개발 실행에서 모델이 고른 조회 6회를 NeMo Agent Toolkit이 실행했습니다. 조사 순서 루프 자체는 저희 Python 코드입니다. OpenShell은 안전장치로, 공개 시험 데이터에서 허용 파일 읽기만 통과하고 나머지는 차단되는 것을 확인했습니다. 전체 경로 적용은 아직입니다. 강조하고 싶은 점은 NIM, NeMo Agent Toolkit, OpenShell처럼 에이전트 실행 환경 생태계가 잘 갖춰져 있어서, 로컬 보안 환경용 에이전트를 빠르게 구성할 수 있었다는 것입니다. 초록색이 NVIDIA 기술입니다.</a:t>
+              <a:t>여기서 Nemotron 3 Ultra가 스스로 어떤 자료를 볼지 골랐습니다. 최근 계측, 센서 설명, 과거 신고, 정비 기록, 목표에서 벗어난 시간대, 그리고 1시부터 2시 18분 구간을 다시 조회했습니다. 모델과 도구 실행 시간은 약 20초입니다. 결과는 원본 기록에 연결된 점검 3가지와, 데이터로는 알 수 없는 것의 목록입니다. 최종 판단은 엔지니어가 합니다.</a:t>
             </a:r>
           </a:p>
         </p:txBody>
@@ -653,7 +654,7 @@
           <a:lstStyle/>
           <a:p>
             <a:r>
-              <a:t>공개 PreDist 사건 32건을 같은 자료와 같은 출력 형식으로 돌렸습니다. Claude Sonnet 5는 클라우드 최고 수준의 기준점이지만, 보안 때문에 발전소 안에서는 쓸 수 없습니다. 질문은 누가 이기느냐가 아니라, 현장에 설치할 수 있는 모델이 이 상한선에 얼마나 가까운가입니다. Ultra가 끝까지 작성한 점검안 15개는 모두 근거 검사를 통과했습니다. 조회하지 않은 기록을 지어낸 경우는 한 번도 없었습니다. 둘 다 결과를 낸 사례의 내용 점수도 41 대 42로 비슷했습니다. Ultra가 놓친 17건 중 13건은 호스팅 API 오류로 답을 받지 못한 경우이고, 4건은 시간 구간을 한도보다 길게 요청한 한 가지 도구 실수였습니다. 즉 격차는 판단력이 아니라 실행 안정성에서 나옵니다. 현장 배포로 외부 API 요인을 없애고 도구 쪽에서 요청 범위를 자동으로 맞춰 주는 것이 오프라인 보완 계획입니다. 이 검사는 진단 정확도 평가는 아닙니다.</a:t>
+              <a:t>System 2의 구조입니다. 신고와 접수 시각이 들어오면 NVIDIA NIM으로 제공되는 Nemotron 3 Ultra가 읽을 자료를 고릅니다. 읽기 전용 도구는 NeMo Agent Toolkit으로 등록했고, 사례 52 개발 실행에서 모델이 고른 조회 6회를 NeMo Agent Toolkit이 실행했습니다. 조사 순서 루프 자체는 저희 Python 코드입니다. OpenShell은 안전장치로, 공개 시험 데이터에서 허용 파일 읽기만 통과하고 나머지는 차단되는 것을 확인했습니다. 전체 경로 적용은 아직입니다. 강조하고 싶은 점은 NIM, NeMo Agent Toolkit, OpenShell처럼 에이전트 실행 환경 생태계가 잘 갖춰져 있어서, 로컬 보안 환경용 에이전트를 빠르게 구성할 수 있었다는 것입니다. 초록색이 NVIDIA 기술입니다.</a:t>
             </a:r>
           </a:p>
         </p:txBody>
@@ -723,6 +724,76 @@
           <a:lstStyle/>
           <a:p>
             <a:r>
+              <a:t>공개 PreDist 사건 32건을 같은 자료와 같은 출력 형식으로 돌렸습니다. Claude Sonnet 5는 클라우드 최고 수준의 기준점이지만, 보안 때문에 발전소 안에서는 쓸 수 없습니다. 질문은 누가 이기느냐가 아니라, 현장에 설치할 수 있는 모델이 이 상한선에 얼마나 가까운가입니다. Ultra가 끝까지 작성한 점검안 15개는 모두 근거 검사를 통과했습니다. 조회하지 않은 기록을 지어낸 경우는 한 번도 없었습니다. 둘 다 결과를 낸 사례의 내용 점수도 41 대 42로 비슷했습니다. Ultra가 놓친 17건 중 13건은 호스팅 API 오류로 답을 받지 못한 경우이고, 4건은 시간 구간을 한도보다 길게 요청한 한 가지 도구 실수였습니다. 즉 격차는 판단력이 아니라 실행 안정성에서 나옵니다. 현장 배포로 외부 API 요인을 없애고 도구 쪽에서 요청 범위를 자동으로 맞춰 주는 것이 오프라인 보완 계획입니다. 이 검사는 진단 정확도 평가는 아닙니다.</a:t>
+            </a:r>
+          </a:p>
+        </p:txBody>
+      </p:sp>
+      <p:sp>
+        <p:nvSpPr>
+          <p:cNvPr id="4" name="Slide Number Placeholder 3"/>
+          <p:cNvSpPr>
+            <a:spLocks noGrp="1"/>
+          </p:cNvSpPr>
+          <p:nvPr>
+            <p:ph type="sldNum" idx="5" sz="quarter"/>
+          </p:nvPr>
+        </p:nvSpPr>
+        <p:spPr/>
+      </p:sp>
+    </p:spTree>
+  </p:cSld>
+  <p:clrMapOvr>
+    <a:masterClrMapping/>
+  </p:clrMapOvr>
+</p:notes>
+</file>
+
+<file path=ppt/notesSlides/notesSlide13.xml><?xml version="1.0" encoding="utf-8"?>
+<p:notes xmlns:a="http://schemas.openxmlformats.org/drawingml/2006/main" xmlns:p="http://schemas.openxmlformats.org/presentationml/2006/main" xmlns:r="http://schemas.openxmlformats.org/officeDocument/2006/relationships">
+  <p:cSld>
+    <p:spTree>
+      <p:nvGrpSpPr>
+        <p:cNvPr id="1" name=""/>
+        <p:cNvGrpSpPr/>
+        <p:nvPr/>
+      </p:nvGrpSpPr>
+      <p:grpSpPr>
+        <a:xfrm>
+          <a:off x="0" y="0"/>
+          <a:ext cx="0" cy="0"/>
+          <a:chOff x="0" y="0"/>
+          <a:chExt cx="0" cy="0"/>
+        </a:xfrm>
+      </p:grpSpPr>
+      <p:sp>
+        <p:nvSpPr>
+          <p:cNvPr id="2" name="Slide Image Placeholder 1"/>
+          <p:cNvSpPr>
+            <a:spLocks noGrp="1"/>
+          </p:cNvSpPr>
+          <p:nvPr>
+            <p:ph type="sldImg" idx="2"/>
+          </p:nvPr>
+        </p:nvSpPr>
+        <p:spPr/>
+      </p:sp>
+      <p:sp>
+        <p:nvSpPr>
+          <p:cNvPr id="3" name="Notes Placeholder 2"/>
+          <p:cNvSpPr>
+            <a:spLocks noGrp="1"/>
+          </p:cNvSpPr>
+          <p:nvPr>
+            <p:ph type="body" idx="3" sz="quarter"/>
+          </p:nvPr>
+        </p:nvSpPr>
+        <p:spPr/>
+        <p:txBody>
+          <a:bodyPr/>
+          <a:lstStyle/>
+          <a:p>
+            <a:r>
               <a:t>다음 단계는 세 가지입니다. 먼저 오프라인 현장 환경에서 Ultra의 부족한 부분을 보완하고 현장 엔지니어에게 평가받습니다. 다음으로 System 1을 Nemotron Nano로 구현하고 5만 개 신호 부하 시험을 합니다. 마지막으로 System 1과 System 2를 연결해 DGX Spark 위에서 현장 내부에서 돌리는 것이 목표입니다. 오늘 데모는 저장된 실제 실행 기록을 재생한 것입니다. 판단은 엔지니어가, 자료 수집은 Plant가 합니다. 감사합니다.</a:t>
             </a:r>
           </a:p>
@@ -1073,7 +1144,7 @@
           <a:lstStyle/>
           <a:p>
             <a:r>
-              <a:t>System 1의 설계 부하를 계산해 봤습니다. 신호 5만 개가 0.1초마다 갱신된다고 가정하면 초당 50만 개 관측값입니다. 값과 시각을 16바이트로 저장하면 초당 8메가바이트, 하루 691기가바이트입니다. 이건 측정값이 아니라 설계 계산입니다. 이 양을 전부 큰 모델에 보낼 수는 없습니다. 그래서 먼저 시계열 코드로 변화율이나 기준선 이탈을 요약하고, Nano가 사건을 묶어 우선순위를 정하고, 선별된 사건만 Ultra가 조사합니다. 지금 로컬 Nano는 요청 한 건에 6에서 11초가 걸려서, 이 부분도 병목이 될 수 있습니다. 부하 시험이 다음 과제입니다.</a:t>
+              <a:t>전체 구조를 한 장으로 보겠습니다. 왼쪽은 발전소 안의 자료, 도면, TM, WO, 트렌드입니다. 위쪽 System 1은 트렌드를 상시 감시하는 부분으로, Nemotron Nano를 쓰는 설계 단계라 점선으로 표시했습니다. 아래쪽 System 2가 오늘 데모입니다. 신고나 알람이 들어오면 Nemotron 3 Ultra가 NeMo Agent Toolkit의 읽기 전용 도구 6종으로 자료를 조회하고 대조해 점검안을 씁니다. 모든 인용은 실제 조회 기록과 연결되는지 검사한 뒤 엔지니어에게 전달되고, 결정은 엔지니어가 합니다. 모델과 도구는 OpenShell 격리 환경에서 시험했고, 전체는 현장 내부 DGX Spark에 배포하는 것을 전제로 합니다. 도면 검색용 NeMo Retriever도 계획 단계입니다.</a:t>
             </a:r>
           </a:p>
         </p:txBody>
@@ -1143,7 +1214,7 @@
           <a:lstStyle/>
           <a:p>
             <a:r>
-              <a:t>실제 고객 발전소 데이터는 공개할 수 없어서, 공개 데이터인 PreDist v2로 벤치마크를 만들었습니다. PreDist는 지역난방 데이터입니다. 30초만 배경을 설명드리겠습니다. 지역난방은 한 곳에서 만든 뜨거운 물을 도시 배관으로 보내고, 건물마다 있는 서브스테이션에서 열을 건물 배관으로 옮기는 방식입니다. 이 공개 데이터에는 공급온도 센서 기록은 있지만, 건물 안 배관의 유량이나 실내 온도는 없습니다. 샤워기 물이 뜨거워도 수압이 약하면 씻기 어렵죠. 온도가 정상이어도 방이 추울 수 있는 이유입니다.</a:t>
+              <a:t>System 1의 설계 부하를 계산해 봤습니다. 신호 5만 개가 0.1초마다 갱신된다고 가정하면 초당 50만 개 관측값입니다. 값과 시각을 16바이트로 저장하면 초당 8메가바이트, 하루 691기가바이트입니다. 이건 측정값이 아니라 설계 계산입니다. 이 양을 전부 큰 모델에 보낼 수는 없습니다. 그래서 먼저 시계열 코드로 변화율이나 기준선 이탈을 요약하고, Nano가 사건을 묶어 우선순위를 정하고, 선별된 사건만 Ultra가 조사합니다. 지금 로컬 Nano는 요청 한 건에 6에서 11초가 걸려서, 이 부분도 병목이 될 수 있습니다. 부하 시험이 다음 과제입니다.</a:t>
             </a:r>
           </a:p>
         </p:txBody>
@@ -1213,7 +1284,7 @@
           <a:lstStyle/>
           <a:p>
             <a:r>
-              <a:t>실제 공개 데이터 PreDist v2의 사례입니다. 2019년 1월 9일 오후 2시 18분, 17번 서브스테이션 고객이 난방이 안 된다고 신고했습니다. 신고 직전 마지막 계측은 2시 10분, 공급온도 63.9도, 목표 63.8도로 정상처럼 보입니다. 하지만 24시간, 10분 간격 144개 기록을 보면 그전에 두 선이 여러 번 벌어졌고, 차이가 최대 13.4도까지 났습니다.</a:t>
+              <a:t>실제 고객 발전소 데이터는 공개할 수 없어서, 공개 데이터인 PreDist v2로 벤치마크를 만들었습니다. PreDist는 지역난방 데이터입니다. 30초만 배경을 설명드리겠습니다. 지역난방은 한 곳에서 만든 뜨거운 물을 도시 배관으로 보내고, 건물마다 있는 서브스테이션에서 열을 건물 배관으로 옮기는 방식입니다. 이 공개 데이터에는 공급온도 센서 기록은 있지만, 건물 안 배관의 유량이나 실내 온도는 없습니다. 샤워기 물이 뜨거워도 수압이 약하면 씻기 어렵죠. 온도가 정상이어도 방이 추울 수 있는 이유입니다.</a:t>
             </a:r>
           </a:p>
         </p:txBody>
@@ -1283,7 +1354,7 @@
           <a:lstStyle/>
           <a:p>
             <a:r>
-              <a:t>여기서 Nemotron 3 Ultra가 스스로 어떤 자료를 볼지 골랐습니다. 최근 계측, 센서 설명, 과거 신고, 정비 기록, 목표에서 벗어난 시간대, 그리고 1시부터 2시 18분 구간을 다시 조회했습니다. 모델과 도구 실행 시간은 약 20초입니다. 결과는 원본 기록에 연결된 점검 3가지와, 데이터로는 알 수 없는 것의 목록입니다. 최종 판단은 엔지니어가 합니다.</a:t>
+              <a:t>실제 공개 데이터 PreDist v2의 사례입니다. 2019년 1월 9일 오후 2시 18분, 17번 서브스테이션 고객이 난방이 안 된다고 신고했습니다. 신고 직전 마지막 계측은 2시 10분, 공급온도 63.9도, 목표 63.8도로 정상처럼 보입니다. 하지만 24시간, 10분 간격 144개 기록을 보면 그전에 두 선이 여러 번 벌어졌고, 차이가 최대 13.4도까지 났습니다.</a:t>
             </a:r>
           </a:p>
         </p:txBody>
@@ -4663,7 +4734,7 @@
                 <a:ea typeface="Apple SD Gothic Neo"/>
                 <a:cs typeface="Apple SD Gothic Neo"/>
               </a:rPr>
-              <a:t>로컬·보안 환경용 에이전트를 빠르게</a:t>
+              <a:t>사례 29</a:t>
             </a:r>
           </a:p>
         </p:txBody>
@@ -4704,479 +4775,21 @@
                 <a:ea typeface="Apple SD Gothic Neo"/>
                 <a:cs typeface="Apple SD Gothic Neo"/>
               </a:rPr>
-              <a:t>구조와 NVIDIA 기술</a:t>
-            </a:r>
-          </a:p>
-        </p:txBody>
-      </p:sp>
-      <p:sp>
-        <p:nvSpPr>
-          <p:cNvPr id="4" name="Rounded Rectangle 3"/>
-          <p:cNvSpPr/>
-          <p:nvPr/>
-        </p:nvSpPr>
-        <p:spPr>
-          <a:xfrm>
-            <a:off x="731520" y="1874519"/>
-            <a:ext cx="1828800" cy="1097280"/>
-          </a:xfrm>
-          <a:prstGeom prst="roundRect">
-            <a:avLst>
-              <a:gd name="adj" fmla="val 12000"/>
-            </a:avLst>
-          </a:prstGeom>
-          <a:solidFill>
-            <a:srgbClr val="FFFFFF"/>
-          </a:solidFill>
-          <a:ln w="15875">
-            <a:solidFill>
-              <a:srgbClr val="BFC8BF"/>
-            </a:solidFill>
-          </a:ln>
-          <a:effectLst/>
-        </p:spPr>
-        <p:style>
-          <a:lnRef idx="1">
-            <a:schemeClr val="accent1"/>
-          </a:lnRef>
-          <a:fillRef idx="3">
-            <a:schemeClr val="accent1"/>
-          </a:fillRef>
-          <a:effectRef idx="2">
-            <a:schemeClr val="accent1"/>
-          </a:effectRef>
-          <a:fontRef idx="minor">
-            <a:schemeClr val="lt1"/>
-          </a:fontRef>
-        </p:style>
-        <p:txBody>
-          <a:bodyPr rtlCol="0" anchor="ctr" wrap="square"/>
-          <a:lstStyle/>
-          <a:p>
-            <a:pPr algn="ctr">
-              <a:lnSpc>
-                <a:spcPct val="115000"/>
-              </a:lnSpc>
-            </a:pPr>
-            <a:r>
-              <a:rPr sz="1800" b="0">
-                <a:solidFill>
-                  <a:srgbClr val="172B27"/>
-                </a:solidFill>
-                <a:latin typeface="Apple SD Gothic Neo"/>
-                <a:ea typeface="Apple SD Gothic Neo"/>
-                <a:cs typeface="Apple SD Gothic Neo"/>
-              </a:rPr>
-              <a:t>신고</a:t>
-            </a:r>
-          </a:p>
-          <a:p>
-            <a:pPr algn="ctr">
-              <a:lnSpc>
-                <a:spcPct val="115000"/>
-              </a:lnSpc>
-            </a:pPr>
-            <a:r>
-              <a:rPr sz="1800" b="0">
-                <a:solidFill>
-                  <a:srgbClr val="172B27"/>
-                </a:solidFill>
-                <a:latin typeface="Apple SD Gothic Neo"/>
-                <a:ea typeface="Apple SD Gothic Neo"/>
-                <a:cs typeface="Apple SD Gothic Neo"/>
-              </a:rPr>
-              <a:t>+ 접수 시각</a:t>
-            </a:r>
-          </a:p>
-        </p:txBody>
-      </p:sp>
-      <p:sp>
-        <p:nvSpPr>
-          <p:cNvPr id="5" name="Rounded Rectangle 4"/>
-          <p:cNvSpPr/>
-          <p:nvPr/>
-        </p:nvSpPr>
-        <p:spPr>
-          <a:xfrm>
-            <a:off x="3108960" y="1783079"/>
-            <a:ext cx="2743200" cy="1280160"/>
-          </a:xfrm>
-          <a:prstGeom prst="roundRect">
-            <a:avLst>
-              <a:gd name="adj" fmla="val 12000"/>
-            </a:avLst>
-          </a:prstGeom>
-          <a:solidFill>
-            <a:srgbClr val="76B900"/>
-          </a:solidFill>
-          <a:ln>
-            <a:noFill/>
-          </a:ln>
-          <a:effectLst/>
-        </p:spPr>
-        <p:style>
-          <a:lnRef idx="1">
-            <a:schemeClr val="accent1"/>
-          </a:lnRef>
-          <a:fillRef idx="3">
-            <a:schemeClr val="accent1"/>
-          </a:fillRef>
-          <a:effectRef idx="2">
-            <a:schemeClr val="accent1"/>
-          </a:effectRef>
-          <a:fontRef idx="minor">
-            <a:schemeClr val="lt1"/>
-          </a:fontRef>
-        </p:style>
-        <p:txBody>
-          <a:bodyPr rtlCol="0" anchor="ctr" wrap="square"/>
-          <a:lstStyle/>
-          <a:p>
-            <a:pPr algn="ctr">
-              <a:lnSpc>
-                <a:spcPct val="115000"/>
-              </a:lnSpc>
-            </a:pPr>
-            <a:r>
-              <a:rPr sz="2000" b="1">
-                <a:solidFill>
-                  <a:srgbClr val="FFFFFF"/>
-                </a:solidFill>
-                <a:latin typeface="Apple SD Gothic Neo"/>
-                <a:ea typeface="Apple SD Gothic Neo"/>
-                <a:cs typeface="Apple SD Gothic Neo"/>
-              </a:rPr>
-              <a:t>Nemotron 3 Ultra</a:t>
-            </a:r>
-          </a:p>
-          <a:p>
-            <a:pPr algn="ctr">
-              <a:lnSpc>
-                <a:spcPct val="115000"/>
-              </a:lnSpc>
-            </a:pPr>
-            <a:r>
-              <a:rPr sz="1500" b="0">
-                <a:solidFill>
-                  <a:srgbClr val="FFFFFF"/>
-                </a:solidFill>
-                <a:latin typeface="Apple SD Gothic Neo"/>
-                <a:ea typeface="Apple SD Gothic Neo"/>
-                <a:cs typeface="Apple SD Gothic Neo"/>
-              </a:rPr>
-              <a:t>NVIDIA NIM</a:t>
-            </a:r>
-          </a:p>
-        </p:txBody>
-      </p:sp>
-      <p:sp>
-        <p:nvSpPr>
-          <p:cNvPr id="6" name="Rounded Rectangle 5"/>
-          <p:cNvSpPr/>
-          <p:nvPr/>
-        </p:nvSpPr>
-        <p:spPr>
-          <a:xfrm>
-            <a:off x="6400800" y="1874519"/>
-            <a:ext cx="2194560" cy="1097280"/>
-          </a:xfrm>
-          <a:prstGeom prst="roundRect">
-            <a:avLst>
-              <a:gd name="adj" fmla="val 12000"/>
-            </a:avLst>
-          </a:prstGeom>
-          <a:solidFill>
-            <a:srgbClr val="FFFFFF"/>
-          </a:solidFill>
-          <a:ln w="15875">
-            <a:solidFill>
-              <a:srgbClr val="BFC8BF"/>
-            </a:solidFill>
-          </a:ln>
-          <a:effectLst/>
-        </p:spPr>
-        <p:style>
-          <a:lnRef idx="1">
-            <a:schemeClr val="accent1"/>
-          </a:lnRef>
-          <a:fillRef idx="3">
-            <a:schemeClr val="accent1"/>
-          </a:fillRef>
-          <a:effectRef idx="2">
-            <a:schemeClr val="accent1"/>
-          </a:effectRef>
-          <a:fontRef idx="minor">
-            <a:schemeClr val="lt1"/>
-          </a:fontRef>
-        </p:style>
-        <p:txBody>
-          <a:bodyPr rtlCol="0" anchor="ctr" wrap="square"/>
-          <a:lstStyle/>
-          <a:p>
-            <a:pPr algn="ctr">
-              <a:lnSpc>
-                <a:spcPct val="115000"/>
-              </a:lnSpc>
-            </a:pPr>
-            <a:r>
-              <a:rPr sz="1800" b="0">
-                <a:solidFill>
-                  <a:srgbClr val="172B27"/>
-                </a:solidFill>
-                <a:latin typeface="Apple SD Gothic Neo"/>
-                <a:ea typeface="Apple SD Gothic Neo"/>
-                <a:cs typeface="Apple SD Gothic Neo"/>
-              </a:rPr>
-              <a:t>근거 연결</a:t>
-            </a:r>
-          </a:p>
-          <a:p>
-            <a:pPr algn="ctr">
-              <a:lnSpc>
-                <a:spcPct val="115000"/>
-              </a:lnSpc>
-            </a:pPr>
-            <a:r>
-              <a:rPr sz="1800" b="0">
-                <a:solidFill>
-                  <a:srgbClr val="172B27"/>
-                </a:solidFill>
-                <a:latin typeface="Apple SD Gothic Neo"/>
-                <a:ea typeface="Apple SD Gothic Neo"/>
-                <a:cs typeface="Apple SD Gothic Neo"/>
-              </a:rPr>
-              <a:t>검사</a:t>
-            </a:r>
-          </a:p>
-        </p:txBody>
-      </p:sp>
-      <p:sp>
-        <p:nvSpPr>
-          <p:cNvPr id="7" name="Rounded Rectangle 6"/>
-          <p:cNvSpPr/>
-          <p:nvPr/>
-        </p:nvSpPr>
-        <p:spPr>
-          <a:xfrm>
-            <a:off x="9144000" y="1874519"/>
-            <a:ext cx="2286000" cy="1097280"/>
-          </a:xfrm>
-          <a:prstGeom prst="roundRect">
-            <a:avLst>
-              <a:gd name="adj" fmla="val 12000"/>
-            </a:avLst>
-          </a:prstGeom>
-          <a:solidFill>
-            <a:srgbClr val="244E41"/>
-          </a:solidFill>
-          <a:ln>
-            <a:noFill/>
-          </a:ln>
-          <a:effectLst/>
-        </p:spPr>
-        <p:style>
-          <a:lnRef idx="1">
-            <a:schemeClr val="accent1"/>
-          </a:lnRef>
-          <a:fillRef idx="3">
-            <a:schemeClr val="accent1"/>
-          </a:fillRef>
-          <a:effectRef idx="2">
-            <a:schemeClr val="accent1"/>
-          </a:effectRef>
-          <a:fontRef idx="minor">
-            <a:schemeClr val="lt1"/>
-          </a:fontRef>
-        </p:style>
-        <p:txBody>
-          <a:bodyPr rtlCol="0" anchor="ctr" wrap="square"/>
-          <a:lstStyle/>
-          <a:p>
-            <a:pPr algn="ctr">
-              <a:lnSpc>
-                <a:spcPct val="115000"/>
-              </a:lnSpc>
-            </a:pPr>
-            <a:r>
-              <a:rPr sz="2000" b="1">
-                <a:solidFill>
-                  <a:srgbClr val="FFFFFF"/>
-                </a:solidFill>
-                <a:latin typeface="Apple SD Gothic Neo"/>
-                <a:ea typeface="Apple SD Gothic Neo"/>
-                <a:cs typeface="Apple SD Gothic Neo"/>
-              </a:rPr>
-              <a:t>엔지니어</a:t>
-            </a:r>
-          </a:p>
-        </p:txBody>
-      </p:sp>
-      <p:cxnSp>
-        <p:nvCxnSpPr>
-          <p:cNvPr id="8" name="Connector 7"/>
-          <p:cNvCxnSpPr/>
-          <p:nvPr/>
-        </p:nvCxnSpPr>
-        <p:spPr>
-          <a:xfrm>
-            <a:off x="2606040" y="2423160"/>
-            <a:ext cx="457200" cy="0"/>
-          </a:xfrm>
-          <a:prstGeom prst="line">
-            <a:avLst/>
-          </a:prstGeom>
-          <a:ln w="25400">
-            <a:solidFill>
-              <a:srgbClr val="62736A"/>
-            </a:solidFill>
-            <a:tailEnd type="triangle" w="med" len="med"/>
-          </a:ln>
-        </p:spPr>
-        <p:style>
-          <a:lnRef idx="2">
-            <a:schemeClr val="accent1"/>
-          </a:lnRef>
-          <a:fillRef idx="0">
-            <a:schemeClr val="accent1"/>
-          </a:fillRef>
-          <a:effectRef idx="1">
-            <a:schemeClr val="accent1"/>
-          </a:effectRef>
-          <a:fontRef idx="minor">
-            <a:schemeClr val="tx1"/>
-          </a:fontRef>
-        </p:style>
-      </p:cxnSp>
-      <p:cxnSp>
-        <p:nvCxnSpPr>
-          <p:cNvPr id="9" name="Connector 8"/>
-          <p:cNvCxnSpPr/>
-          <p:nvPr/>
-        </p:nvCxnSpPr>
-        <p:spPr>
-          <a:xfrm>
-            <a:off x="5897880" y="2423160"/>
-            <a:ext cx="457200" cy="0"/>
-          </a:xfrm>
-          <a:prstGeom prst="line">
-            <a:avLst/>
-          </a:prstGeom>
-          <a:ln w="25400">
-            <a:solidFill>
-              <a:srgbClr val="62736A"/>
-            </a:solidFill>
-            <a:tailEnd type="triangle" w="med" len="med"/>
-          </a:ln>
-        </p:spPr>
-        <p:style>
-          <a:lnRef idx="2">
-            <a:schemeClr val="accent1"/>
-          </a:lnRef>
-          <a:fillRef idx="0">
-            <a:schemeClr val="accent1"/>
-          </a:fillRef>
-          <a:effectRef idx="1">
-            <a:schemeClr val="accent1"/>
-          </a:effectRef>
-          <a:fontRef idx="minor">
-            <a:schemeClr val="tx1"/>
-          </a:fontRef>
-        </p:style>
-      </p:cxnSp>
-      <p:cxnSp>
-        <p:nvCxnSpPr>
-          <p:cNvPr id="10" name="Connector 9"/>
-          <p:cNvCxnSpPr/>
-          <p:nvPr/>
-        </p:nvCxnSpPr>
-        <p:spPr>
-          <a:xfrm>
-            <a:off x="8641080" y="2423160"/>
-            <a:ext cx="457200" cy="0"/>
-          </a:xfrm>
-          <a:prstGeom prst="line">
-            <a:avLst/>
-          </a:prstGeom>
-          <a:ln w="25400">
-            <a:solidFill>
-              <a:srgbClr val="62736A"/>
-            </a:solidFill>
-            <a:tailEnd type="triangle" w="med" len="med"/>
-          </a:ln>
-        </p:spPr>
-        <p:style>
-          <a:lnRef idx="2">
-            <a:schemeClr val="accent1"/>
-          </a:lnRef>
-          <a:fillRef idx="0">
-            <a:schemeClr val="accent1"/>
-          </a:fillRef>
-          <a:effectRef idx="1">
-            <a:schemeClr val="accent1"/>
-          </a:effectRef>
-          <a:fontRef idx="minor">
-            <a:schemeClr val="tx1"/>
-          </a:fontRef>
-        </p:style>
-      </p:cxnSp>
-      <p:sp>
-        <p:nvSpPr>
-          <p:cNvPr id="11" name="Rounded Rectangle 10"/>
-          <p:cNvSpPr/>
-          <p:nvPr/>
-        </p:nvSpPr>
-        <p:spPr>
-          <a:xfrm>
-            <a:off x="731520" y="3429000"/>
-            <a:ext cx="3429000" cy="2011680"/>
-          </a:xfrm>
-          <a:prstGeom prst="roundRect">
-            <a:avLst>
-              <a:gd name="adj" fmla="val 12000"/>
-            </a:avLst>
-          </a:prstGeom>
-          <a:solidFill>
-            <a:srgbClr val="FFFFFF"/>
-          </a:solidFill>
-          <a:ln w="31750">
-            <a:solidFill>
-              <a:srgbClr val="76B900"/>
-            </a:solidFill>
-          </a:ln>
-          <a:effectLst/>
-        </p:spPr>
-        <p:style>
-          <a:lnRef idx="1">
-            <a:schemeClr val="accent1"/>
-          </a:lnRef>
-          <a:fillRef idx="3">
-            <a:schemeClr val="accent1"/>
-          </a:fillRef>
-          <a:effectRef idx="2">
-            <a:schemeClr val="accent1"/>
-          </a:effectRef>
-          <a:fontRef idx="minor">
-            <a:schemeClr val="lt1"/>
-          </a:fontRef>
-        </p:style>
-        <p:txBody>
-          <a:bodyPr rtlCol="0" anchor="ctr" wrap="square"/>
-          <a:lstStyle/>
-          <a:p>
-            <a:pPr algn="ctr"/>
-          </a:p>
-        </p:txBody>
-      </p:sp>
-      <p:sp>
-        <p:nvSpPr>
-          <p:cNvPr id="12" name="TextBox 11"/>
+              <a:t>에이전트가 한 일</a:t>
+            </a:r>
+          </a:p>
+        </p:txBody>
+      </p:sp>
+      <p:sp>
+        <p:nvSpPr>
+          <p:cNvPr id="4" name="TextBox 3"/>
           <p:cNvSpPr txBox="1"/>
           <p:nvPr/>
         </p:nvSpPr>
         <p:spPr>
           <a:xfrm>
-            <a:off x="960120" y="3566160"/>
-            <a:ext cx="2971800" cy="365760"/>
+            <a:off x="731520" y="1783080"/>
+            <a:ext cx="5120640" cy="365760"/>
           </a:xfrm>
           <a:prstGeom prst="rect">
             <a:avLst/>
@@ -5195,48 +4808,7 @@
               </a:lnSpc>
             </a:pPr>
             <a:r>
-              <a:rPr sz="1500" b="1">
-                <a:solidFill>
-                  <a:srgbClr val="62736A"/>
-                </a:solidFill>
-                <a:latin typeface="Apple SD Gothic Neo"/>
-                <a:ea typeface="Apple SD Gothic Neo"/>
-                <a:cs typeface="Apple SD Gothic Neo"/>
-              </a:rPr>
-              <a:t>모델 제공</a:t>
-            </a:r>
-          </a:p>
-        </p:txBody>
-      </p:sp>
-      <p:sp>
-        <p:nvSpPr>
-          <p:cNvPr id="13" name="TextBox 12"/>
-          <p:cNvSpPr txBox="1"/>
-          <p:nvPr/>
-        </p:nvSpPr>
-        <p:spPr>
-          <a:xfrm>
-            <a:off x="960120" y="3886200"/>
-            <a:ext cx="2971800" cy="457200"/>
-          </a:xfrm>
-          <a:prstGeom prst="rect">
-            <a:avLst/>
-          </a:prstGeom>
-          <a:noFill/>
-        </p:spPr>
-        <p:txBody>
-          <a:bodyPr wrap="square" lIns="18288" rIns="18288" tIns="18288" bIns="18288" anchor="t">
-            <a:spAutoFit/>
-          </a:bodyPr>
-          <a:lstStyle/>
-          <a:p>
-            <a:pPr algn="l">
-              <a:lnSpc>
-                <a:spcPct val="115000"/>
-              </a:lnSpc>
-            </a:pPr>
-            <a:r>
-              <a:rPr sz="2100" b="1">
+              <a:rPr sz="2000" b="1">
                 <a:solidFill>
                   <a:srgbClr val="76B900"/>
                 </a:solidFill>
@@ -5244,40 +4816,10 @@
                 <a:ea typeface="Apple SD Gothic Neo"/>
                 <a:cs typeface="Apple SD Gothic Neo"/>
               </a:rPr>
-              <a:t>NIM</a:t>
-            </a:r>
-          </a:p>
-        </p:txBody>
-      </p:sp>
-      <p:sp>
-        <p:nvSpPr>
-          <p:cNvPr id="14" name="TextBox 13"/>
-          <p:cNvSpPr txBox="1"/>
-          <p:nvPr/>
-        </p:nvSpPr>
-        <p:spPr>
-          <a:xfrm>
-            <a:off x="960120" y="4343400"/>
-            <a:ext cx="2971800" cy="548640"/>
-          </a:xfrm>
-          <a:prstGeom prst="rect">
-            <a:avLst/>
-          </a:prstGeom>
-          <a:noFill/>
-        </p:spPr>
-        <p:txBody>
-          <a:bodyPr wrap="square" lIns="18288" rIns="18288" tIns="18288" bIns="18288" anchor="t">
-            <a:spAutoFit/>
-          </a:bodyPr>
-          <a:lstStyle/>
-          <a:p>
-            <a:pPr algn="l">
-              <a:lnSpc>
-                <a:spcPct val="115000"/>
-              </a:lnSpc>
-            </a:pPr>
-            <a:r>
-              <a:rPr sz="1500" b="0">
+              <a:t>Nemotron 3 Ultra</a:t>
+            </a:r>
+            <a:r>
+              <a:rPr sz="2000" b="0">
                 <a:solidFill>
                   <a:srgbClr val="172B27"/>
                 </a:solidFill>
@@ -5285,82 +4827,21 @@
                 <a:ea typeface="Apple SD Gothic Neo"/>
                 <a:cs typeface="Apple SD Gothic Neo"/>
               </a:rPr>
-              <a:t>Ultra를 표준 API로 호출</a:t>
-            </a:r>
-          </a:p>
-        </p:txBody>
-      </p:sp>
-      <p:sp>
-        <p:nvSpPr>
-          <p:cNvPr id="15" name="Rounded Rectangle 14"/>
+              <a:t>가 고른 자료 6종</a:t>
+            </a:r>
+          </a:p>
+        </p:txBody>
+      </p:sp>
+      <p:sp>
+        <p:nvSpPr>
+          <p:cNvPr id="5" name="Rounded Rectangle 4"/>
           <p:cNvSpPr/>
           <p:nvPr/>
         </p:nvSpPr>
         <p:spPr>
           <a:xfrm>
-            <a:off x="960120" y="4910328"/>
-            <a:ext cx="2971800" cy="384048"/>
-          </a:xfrm>
-          <a:prstGeom prst="roundRect">
-            <a:avLst>
-              <a:gd name="adj" fmla="val 12000"/>
-            </a:avLst>
-          </a:prstGeom>
-          <a:solidFill>
-            <a:srgbClr val="76B900"/>
-          </a:solidFill>
-          <a:ln>
-            <a:noFill/>
-          </a:ln>
-          <a:effectLst/>
-        </p:spPr>
-        <p:style>
-          <a:lnRef idx="1">
-            <a:schemeClr val="accent1"/>
-          </a:lnRef>
-          <a:fillRef idx="3">
-            <a:schemeClr val="accent1"/>
-          </a:fillRef>
-          <a:effectRef idx="2">
-            <a:schemeClr val="accent1"/>
-          </a:effectRef>
-          <a:fontRef idx="minor">
-            <a:schemeClr val="lt1"/>
-          </a:fontRef>
-        </p:style>
-        <p:txBody>
-          <a:bodyPr rtlCol="0" anchor="ctr" wrap="square"/>
-          <a:lstStyle/>
-          <a:p>
-            <a:pPr algn="ctr">
-              <a:lnSpc>
-                <a:spcPct val="115000"/>
-              </a:lnSpc>
-            </a:pPr>
-            <a:r>
-              <a:rPr sz="1300" b="1">
-                <a:solidFill>
-                  <a:srgbClr val="FFFFFF"/>
-                </a:solidFill>
-                <a:latin typeface="Apple SD Gothic Neo"/>
-                <a:ea typeface="Apple SD Gothic Neo"/>
-                <a:cs typeface="Apple SD Gothic Neo"/>
-              </a:rPr>
-              <a:t>데모 핵심 경로</a:t>
-            </a:r>
-          </a:p>
-        </p:txBody>
-      </p:sp>
-      <p:sp>
-        <p:nvSpPr>
-          <p:cNvPr id="16" name="Rounded Rectangle 15"/>
-          <p:cNvSpPr/>
-          <p:nvPr/>
-        </p:nvSpPr>
-        <p:spPr>
-          <a:xfrm>
-            <a:off x="4370832" y="3429000"/>
-            <a:ext cx="3429000" cy="2011680"/>
+            <a:off x="731520" y="2286000"/>
+            <a:ext cx="2377440" cy="566928"/>
           </a:xfrm>
           <a:prstGeom prst="roundRect">
             <a:avLst>
@@ -5395,121 +4876,13 @@
           <a:bodyPr rtlCol="0" anchor="ctr" wrap="square"/>
           <a:lstStyle/>
           <a:p>
-            <a:pPr algn="ctr"/>
-          </a:p>
-        </p:txBody>
-      </p:sp>
-      <p:sp>
-        <p:nvSpPr>
-          <p:cNvPr id="17" name="TextBox 16"/>
-          <p:cNvSpPr txBox="1"/>
-          <p:nvPr/>
-        </p:nvSpPr>
-        <p:spPr>
-          <a:xfrm>
-            <a:off x="4599432" y="3566160"/>
-            <a:ext cx="2971800" cy="365760"/>
-          </a:xfrm>
-          <a:prstGeom prst="rect">
-            <a:avLst/>
-          </a:prstGeom>
-          <a:noFill/>
-        </p:spPr>
-        <p:txBody>
-          <a:bodyPr wrap="square" lIns="18288" rIns="18288" tIns="18288" bIns="18288" anchor="t">
-            <a:spAutoFit/>
-          </a:bodyPr>
-          <a:lstStyle/>
-          <a:p>
-            <a:pPr algn="l">
-              <a:lnSpc>
-                <a:spcPct val="115000"/>
-              </a:lnSpc>
-            </a:pPr>
-            <a:r>
-              <a:rPr sz="1500" b="1">
-                <a:solidFill>
-                  <a:srgbClr val="62736A"/>
-                </a:solidFill>
-                <a:latin typeface="Apple SD Gothic Neo"/>
-                <a:ea typeface="Apple SD Gothic Neo"/>
-                <a:cs typeface="Apple SD Gothic Neo"/>
-              </a:rPr>
-              <a:t>도구 실행</a:t>
-            </a:r>
-          </a:p>
-        </p:txBody>
-      </p:sp>
-      <p:sp>
-        <p:nvSpPr>
-          <p:cNvPr id="18" name="TextBox 17"/>
-          <p:cNvSpPr txBox="1"/>
-          <p:nvPr/>
-        </p:nvSpPr>
-        <p:spPr>
-          <a:xfrm>
-            <a:off x="4599432" y="3886200"/>
-            <a:ext cx="2971800" cy="457200"/>
-          </a:xfrm>
-          <a:prstGeom prst="rect">
-            <a:avLst/>
-          </a:prstGeom>
-          <a:noFill/>
-        </p:spPr>
-        <p:txBody>
-          <a:bodyPr wrap="square" lIns="18288" rIns="18288" tIns="18288" bIns="18288" anchor="t">
-            <a:spAutoFit/>
-          </a:bodyPr>
-          <a:lstStyle/>
-          <a:p>
-            <a:pPr algn="l">
-              <a:lnSpc>
-                <a:spcPct val="115000"/>
-              </a:lnSpc>
-            </a:pPr>
-            <a:r>
-              <a:rPr sz="2100" b="1">
-                <a:solidFill>
-                  <a:srgbClr val="76B900"/>
-                </a:solidFill>
-                <a:latin typeface="Apple SD Gothic Neo"/>
-                <a:ea typeface="Apple SD Gothic Neo"/>
-                <a:cs typeface="Apple SD Gothic Neo"/>
-              </a:rPr>
-              <a:t>NeMo Agent Toolkit</a:t>
-            </a:r>
-          </a:p>
-        </p:txBody>
-      </p:sp>
-      <p:sp>
-        <p:nvSpPr>
-          <p:cNvPr id="19" name="TextBox 18"/>
-          <p:cNvSpPr txBox="1"/>
-          <p:nvPr/>
-        </p:nvSpPr>
-        <p:spPr>
-          <a:xfrm>
-            <a:off x="4599432" y="4343400"/>
-            <a:ext cx="2971800" cy="548640"/>
-          </a:xfrm>
-          <a:prstGeom prst="rect">
-            <a:avLst/>
-          </a:prstGeom>
-          <a:noFill/>
-        </p:spPr>
-        <p:txBody>
-          <a:bodyPr wrap="square" lIns="18288" rIns="18288" tIns="18288" bIns="18288" anchor="t">
-            <a:spAutoFit/>
-          </a:bodyPr>
-          <a:lstStyle/>
-          <a:p>
-            <a:pPr algn="l">
-              <a:lnSpc>
-                <a:spcPct val="115000"/>
-              </a:lnSpc>
-            </a:pPr>
-            <a:r>
-              <a:rPr sz="1500" b="0">
+            <a:pPr algn="ctr">
+              <a:lnSpc>
+                <a:spcPct val="115000"/>
+              </a:lnSpc>
+            </a:pPr>
+            <a:r>
+              <a:rPr sz="1700" b="0">
                 <a:solidFill>
                   <a:srgbClr val="172B27"/>
                 </a:solidFill>
@@ -5517,82 +4890,21 @@
                 <a:ea typeface="Apple SD Gothic Neo"/>
                 <a:cs typeface="Apple SD Gothic Neo"/>
               </a:rPr>
-              <a:t>읽기 도구 등록 · 사례 52 조회 6회</a:t>
-            </a:r>
-          </a:p>
-        </p:txBody>
-      </p:sp>
-      <p:sp>
-        <p:nvSpPr>
-          <p:cNvPr id="20" name="Rounded Rectangle 19"/>
+              <a:t>최근 계측</a:t>
+            </a:r>
+          </a:p>
+        </p:txBody>
+      </p:sp>
+      <p:sp>
+        <p:nvSpPr>
+          <p:cNvPr id="6" name="Rounded Rectangle 5"/>
           <p:cNvSpPr/>
           <p:nvPr/>
         </p:nvSpPr>
         <p:spPr>
           <a:xfrm>
-            <a:off x="4599432" y="4910328"/>
-            <a:ext cx="2971800" cy="384048"/>
-          </a:xfrm>
-          <a:prstGeom prst="roundRect">
-            <a:avLst>
-              <a:gd name="adj" fmla="val 12000"/>
-            </a:avLst>
-          </a:prstGeom>
-          <a:solidFill>
-            <a:srgbClr val="F1EEE6"/>
-          </a:solidFill>
-          <a:ln>
-            <a:noFill/>
-          </a:ln>
-          <a:effectLst/>
-        </p:spPr>
-        <p:style>
-          <a:lnRef idx="1">
-            <a:schemeClr val="accent1"/>
-          </a:lnRef>
-          <a:fillRef idx="3">
-            <a:schemeClr val="accent1"/>
-          </a:fillRef>
-          <a:effectRef idx="2">
-            <a:schemeClr val="accent1"/>
-          </a:effectRef>
-          <a:fontRef idx="minor">
-            <a:schemeClr val="lt1"/>
-          </a:fontRef>
-        </p:style>
-        <p:txBody>
-          <a:bodyPr rtlCol="0" anchor="ctr" wrap="square"/>
-          <a:lstStyle/>
-          <a:p>
-            <a:pPr algn="ctr">
-              <a:lnSpc>
-                <a:spcPct val="115000"/>
-              </a:lnSpc>
-            </a:pPr>
-            <a:r>
-              <a:rPr sz="1300" b="0">
-                <a:solidFill>
-                  <a:srgbClr val="172B27"/>
-                </a:solidFill>
-                <a:latin typeface="Apple SD Gothic Neo"/>
-                <a:ea typeface="Apple SD Gothic Neo"/>
-                <a:cs typeface="Apple SD Gothic Neo"/>
-              </a:rPr>
-              <a:t>일부 적용 · 루프는 자체 코드</a:t>
-            </a:r>
-          </a:p>
-        </p:txBody>
-      </p:sp>
-      <p:sp>
-        <p:nvSpPr>
-          <p:cNvPr id="21" name="Rounded Rectangle 20"/>
-          <p:cNvSpPr/>
-          <p:nvPr/>
-        </p:nvSpPr>
-        <p:spPr>
-          <a:xfrm>
-            <a:off x="8010144" y="3429000"/>
-            <a:ext cx="3429000" cy="2011680"/>
+            <a:off x="3246120" y="2286000"/>
+            <a:ext cx="2377440" cy="566928"/>
           </a:xfrm>
           <a:prstGeom prst="roundRect">
             <a:avLst>
@@ -5627,121 +4939,13 @@
           <a:bodyPr rtlCol="0" anchor="ctr" wrap="square"/>
           <a:lstStyle/>
           <a:p>
-            <a:pPr algn="ctr"/>
-          </a:p>
-        </p:txBody>
-      </p:sp>
-      <p:sp>
-        <p:nvSpPr>
-          <p:cNvPr id="22" name="TextBox 21"/>
-          <p:cNvSpPr txBox="1"/>
-          <p:nvPr/>
-        </p:nvSpPr>
-        <p:spPr>
-          <a:xfrm>
-            <a:off x="8238744" y="3566160"/>
-            <a:ext cx="2971800" cy="365760"/>
-          </a:xfrm>
-          <a:prstGeom prst="rect">
-            <a:avLst/>
-          </a:prstGeom>
-          <a:noFill/>
-        </p:spPr>
-        <p:txBody>
-          <a:bodyPr wrap="square" lIns="18288" rIns="18288" tIns="18288" bIns="18288" anchor="t">
-            <a:spAutoFit/>
-          </a:bodyPr>
-          <a:lstStyle/>
-          <a:p>
-            <a:pPr algn="l">
-              <a:lnSpc>
-                <a:spcPct val="115000"/>
-              </a:lnSpc>
-            </a:pPr>
-            <a:r>
-              <a:rPr sz="1500" b="1">
-                <a:solidFill>
-                  <a:srgbClr val="62736A"/>
-                </a:solidFill>
-                <a:latin typeface="Apple SD Gothic Neo"/>
-                <a:ea typeface="Apple SD Gothic Neo"/>
-                <a:cs typeface="Apple SD Gothic Neo"/>
-              </a:rPr>
-              <a:t>안전장치</a:t>
-            </a:r>
-          </a:p>
-        </p:txBody>
-      </p:sp>
-      <p:sp>
-        <p:nvSpPr>
-          <p:cNvPr id="23" name="TextBox 22"/>
-          <p:cNvSpPr txBox="1"/>
-          <p:nvPr/>
-        </p:nvSpPr>
-        <p:spPr>
-          <a:xfrm>
-            <a:off x="8238744" y="3886200"/>
-            <a:ext cx="2971800" cy="457200"/>
-          </a:xfrm>
-          <a:prstGeom prst="rect">
-            <a:avLst/>
-          </a:prstGeom>
-          <a:noFill/>
-        </p:spPr>
-        <p:txBody>
-          <a:bodyPr wrap="square" lIns="18288" rIns="18288" tIns="18288" bIns="18288" anchor="t">
-            <a:spAutoFit/>
-          </a:bodyPr>
-          <a:lstStyle/>
-          <a:p>
-            <a:pPr algn="l">
-              <a:lnSpc>
-                <a:spcPct val="115000"/>
-              </a:lnSpc>
-            </a:pPr>
-            <a:r>
-              <a:rPr sz="2100" b="1">
-                <a:solidFill>
-                  <a:srgbClr val="76B900"/>
-                </a:solidFill>
-                <a:latin typeface="Apple SD Gothic Neo"/>
-                <a:ea typeface="Apple SD Gothic Neo"/>
-                <a:cs typeface="Apple SD Gothic Neo"/>
-              </a:rPr>
-              <a:t>OpenShell</a:t>
-            </a:r>
-          </a:p>
-        </p:txBody>
-      </p:sp>
-      <p:sp>
-        <p:nvSpPr>
-          <p:cNvPr id="24" name="TextBox 23"/>
-          <p:cNvSpPr txBox="1"/>
-          <p:nvPr/>
-        </p:nvSpPr>
-        <p:spPr>
-          <a:xfrm>
-            <a:off x="8238744" y="4343400"/>
-            <a:ext cx="2971800" cy="548640"/>
-          </a:xfrm>
-          <a:prstGeom prst="rect">
-            <a:avLst/>
-          </a:prstGeom>
-          <a:noFill/>
-        </p:spPr>
-        <p:txBody>
-          <a:bodyPr wrap="square" lIns="18288" rIns="18288" tIns="18288" bIns="18288" anchor="t">
-            <a:spAutoFit/>
-          </a:bodyPr>
-          <a:lstStyle/>
-          <a:p>
-            <a:pPr algn="l">
-              <a:lnSpc>
-                <a:spcPct val="115000"/>
-              </a:lnSpc>
-            </a:pPr>
-            <a:r>
-              <a:rPr sz="1500" b="0">
+            <a:pPr algn="ctr">
+              <a:lnSpc>
+                <a:spcPct val="115000"/>
+              </a:lnSpc>
+            </a:pPr>
+            <a:r>
+              <a:rPr sz="1700" b="0">
                 <a:solidFill>
                   <a:srgbClr val="172B27"/>
                 </a:solidFill>
@@ -5749,21 +4953,21 @@
                 <a:ea typeface="Apple SD Gothic Neo"/>
                 <a:cs typeface="Apple SD Gothic Neo"/>
               </a:rPr>
-              <a:t>허용 파일 읽기만 통과 · 나머지 차단</a:t>
-            </a:r>
-          </a:p>
-        </p:txBody>
-      </p:sp>
-      <p:sp>
-        <p:nvSpPr>
-          <p:cNvPr id="25" name="Rounded Rectangle 24"/>
+              <a:t>센서 설명</a:t>
+            </a:r>
+          </a:p>
+        </p:txBody>
+      </p:sp>
+      <p:sp>
+        <p:nvSpPr>
+          <p:cNvPr id="7" name="Rounded Rectangle 6"/>
           <p:cNvSpPr/>
           <p:nvPr/>
         </p:nvSpPr>
         <p:spPr>
           <a:xfrm>
-            <a:off x="8238744" y="4910328"/>
-            <a:ext cx="2971800" cy="384048"/>
+            <a:off x="731520" y="3017520"/>
+            <a:ext cx="2377440" cy="566928"/>
           </a:xfrm>
           <a:prstGeom prst="roundRect">
             <a:avLst>
@@ -5771,7 +4975,395 @@
             </a:avLst>
           </a:prstGeom>
           <a:solidFill>
-            <a:srgbClr val="F1EEE6"/>
+            <a:srgbClr val="FFFFFF"/>
+          </a:solidFill>
+          <a:ln w="19050">
+            <a:solidFill>
+              <a:srgbClr val="76B900"/>
+            </a:solidFill>
+          </a:ln>
+          <a:effectLst/>
+        </p:spPr>
+        <p:style>
+          <a:lnRef idx="1">
+            <a:schemeClr val="accent1"/>
+          </a:lnRef>
+          <a:fillRef idx="3">
+            <a:schemeClr val="accent1"/>
+          </a:fillRef>
+          <a:effectRef idx="2">
+            <a:schemeClr val="accent1"/>
+          </a:effectRef>
+          <a:fontRef idx="minor">
+            <a:schemeClr val="lt1"/>
+          </a:fontRef>
+        </p:style>
+        <p:txBody>
+          <a:bodyPr rtlCol="0" anchor="ctr" wrap="square"/>
+          <a:lstStyle/>
+          <a:p>
+            <a:pPr algn="ctr">
+              <a:lnSpc>
+                <a:spcPct val="115000"/>
+              </a:lnSpc>
+            </a:pPr>
+            <a:r>
+              <a:rPr sz="1700" b="0">
+                <a:solidFill>
+                  <a:srgbClr val="172B27"/>
+                </a:solidFill>
+                <a:latin typeface="Apple SD Gothic Neo"/>
+                <a:ea typeface="Apple SD Gothic Neo"/>
+                <a:cs typeface="Apple SD Gothic Neo"/>
+              </a:rPr>
+              <a:t>과거 신고</a:t>
+            </a:r>
+          </a:p>
+        </p:txBody>
+      </p:sp>
+      <p:sp>
+        <p:nvSpPr>
+          <p:cNvPr id="8" name="Rounded Rectangle 7"/>
+          <p:cNvSpPr/>
+          <p:nvPr/>
+        </p:nvSpPr>
+        <p:spPr>
+          <a:xfrm>
+            <a:off x="3246120" y="3017520"/>
+            <a:ext cx="2377440" cy="566928"/>
+          </a:xfrm>
+          <a:prstGeom prst="roundRect">
+            <a:avLst>
+              <a:gd name="adj" fmla="val 12000"/>
+            </a:avLst>
+          </a:prstGeom>
+          <a:solidFill>
+            <a:srgbClr val="FFFFFF"/>
+          </a:solidFill>
+          <a:ln w="19050">
+            <a:solidFill>
+              <a:srgbClr val="76B900"/>
+            </a:solidFill>
+          </a:ln>
+          <a:effectLst/>
+        </p:spPr>
+        <p:style>
+          <a:lnRef idx="1">
+            <a:schemeClr val="accent1"/>
+          </a:lnRef>
+          <a:fillRef idx="3">
+            <a:schemeClr val="accent1"/>
+          </a:fillRef>
+          <a:effectRef idx="2">
+            <a:schemeClr val="accent1"/>
+          </a:effectRef>
+          <a:fontRef idx="minor">
+            <a:schemeClr val="lt1"/>
+          </a:fontRef>
+        </p:style>
+        <p:txBody>
+          <a:bodyPr rtlCol="0" anchor="ctr" wrap="square"/>
+          <a:lstStyle/>
+          <a:p>
+            <a:pPr algn="ctr">
+              <a:lnSpc>
+                <a:spcPct val="115000"/>
+              </a:lnSpc>
+            </a:pPr>
+            <a:r>
+              <a:rPr sz="1700" b="0">
+                <a:solidFill>
+                  <a:srgbClr val="172B27"/>
+                </a:solidFill>
+                <a:latin typeface="Apple SD Gothic Neo"/>
+                <a:ea typeface="Apple SD Gothic Neo"/>
+                <a:cs typeface="Apple SD Gothic Neo"/>
+              </a:rPr>
+              <a:t>정비 기록</a:t>
+            </a:r>
+          </a:p>
+        </p:txBody>
+      </p:sp>
+      <p:sp>
+        <p:nvSpPr>
+          <p:cNvPr id="9" name="Rounded Rectangle 8"/>
+          <p:cNvSpPr/>
+          <p:nvPr/>
+        </p:nvSpPr>
+        <p:spPr>
+          <a:xfrm>
+            <a:off x="731520" y="3749039"/>
+            <a:ext cx="2377440" cy="566928"/>
+          </a:xfrm>
+          <a:prstGeom prst="roundRect">
+            <a:avLst>
+              <a:gd name="adj" fmla="val 12000"/>
+            </a:avLst>
+          </a:prstGeom>
+          <a:solidFill>
+            <a:srgbClr val="FFFFFF"/>
+          </a:solidFill>
+          <a:ln w="19050">
+            <a:solidFill>
+              <a:srgbClr val="76B900"/>
+            </a:solidFill>
+          </a:ln>
+          <a:effectLst/>
+        </p:spPr>
+        <p:style>
+          <a:lnRef idx="1">
+            <a:schemeClr val="accent1"/>
+          </a:lnRef>
+          <a:fillRef idx="3">
+            <a:schemeClr val="accent1"/>
+          </a:fillRef>
+          <a:effectRef idx="2">
+            <a:schemeClr val="accent1"/>
+          </a:effectRef>
+          <a:fontRef idx="minor">
+            <a:schemeClr val="lt1"/>
+          </a:fontRef>
+        </p:style>
+        <p:txBody>
+          <a:bodyPr rtlCol="0" anchor="ctr" wrap="square"/>
+          <a:lstStyle/>
+          <a:p>
+            <a:pPr algn="ctr">
+              <a:lnSpc>
+                <a:spcPct val="115000"/>
+              </a:lnSpc>
+            </a:pPr>
+            <a:r>
+              <a:rPr sz="1700" b="0">
+                <a:solidFill>
+                  <a:srgbClr val="172B27"/>
+                </a:solidFill>
+                <a:latin typeface="Apple SD Gothic Neo"/>
+                <a:ea typeface="Apple SD Gothic Neo"/>
+                <a:cs typeface="Apple SD Gothic Neo"/>
+              </a:rPr>
+              <a:t>목표 이탈 시간대</a:t>
+            </a:r>
+          </a:p>
+        </p:txBody>
+      </p:sp>
+      <p:sp>
+        <p:nvSpPr>
+          <p:cNvPr id="10" name="Rounded Rectangle 9"/>
+          <p:cNvSpPr/>
+          <p:nvPr/>
+        </p:nvSpPr>
+        <p:spPr>
+          <a:xfrm>
+            <a:off x="3246120" y="3749039"/>
+            <a:ext cx="2377440" cy="566928"/>
+          </a:xfrm>
+          <a:prstGeom prst="roundRect">
+            <a:avLst>
+              <a:gd name="adj" fmla="val 12000"/>
+            </a:avLst>
+          </a:prstGeom>
+          <a:solidFill>
+            <a:srgbClr val="FFFFFF"/>
+          </a:solidFill>
+          <a:ln w="19050">
+            <a:solidFill>
+              <a:srgbClr val="76B900"/>
+            </a:solidFill>
+          </a:ln>
+          <a:effectLst/>
+        </p:spPr>
+        <p:style>
+          <a:lnRef idx="1">
+            <a:schemeClr val="accent1"/>
+          </a:lnRef>
+          <a:fillRef idx="3">
+            <a:schemeClr val="accent1"/>
+          </a:fillRef>
+          <a:effectRef idx="2">
+            <a:schemeClr val="accent1"/>
+          </a:effectRef>
+          <a:fontRef idx="minor">
+            <a:schemeClr val="lt1"/>
+          </a:fontRef>
+        </p:style>
+        <p:txBody>
+          <a:bodyPr rtlCol="0" anchor="ctr" wrap="square"/>
+          <a:lstStyle/>
+          <a:p>
+            <a:pPr algn="ctr">
+              <a:lnSpc>
+                <a:spcPct val="115000"/>
+              </a:lnSpc>
+            </a:pPr>
+            <a:r>
+              <a:rPr sz="1700" b="0">
+                <a:solidFill>
+                  <a:srgbClr val="172B27"/>
+                </a:solidFill>
+                <a:latin typeface="Apple SD Gothic Neo"/>
+                <a:ea typeface="Apple SD Gothic Neo"/>
+                <a:cs typeface="Apple SD Gothic Neo"/>
+              </a:rPr>
+              <a:t>13:00~14:18 재조회</a:t>
+            </a:r>
+          </a:p>
+        </p:txBody>
+      </p:sp>
+      <p:sp>
+        <p:nvSpPr>
+          <p:cNvPr id="11" name="TextBox 10"/>
+          <p:cNvSpPr txBox="1"/>
+          <p:nvPr/>
+        </p:nvSpPr>
+        <p:spPr>
+          <a:xfrm>
+            <a:off x="731520" y="4572000"/>
+            <a:ext cx="4937760" cy="822960"/>
+          </a:xfrm>
+          <a:prstGeom prst="rect">
+            <a:avLst/>
+          </a:prstGeom>
+          <a:noFill/>
+        </p:spPr>
+        <p:txBody>
+          <a:bodyPr wrap="square" lIns="18288" rIns="18288" tIns="18288" bIns="18288" anchor="t">
+            <a:spAutoFit/>
+          </a:bodyPr>
+          <a:lstStyle/>
+          <a:p>
+            <a:pPr algn="l">
+              <a:lnSpc>
+                <a:spcPct val="115000"/>
+              </a:lnSpc>
+            </a:pPr>
+            <a:r>
+              <a:rPr sz="4000" b="1">
+                <a:solidFill>
+                  <a:srgbClr val="172B27"/>
+                </a:solidFill>
+                <a:latin typeface="Apple SD Gothic Neo"/>
+                <a:ea typeface="Apple SD Gothic Neo"/>
+                <a:cs typeface="Apple SD Gothic Neo"/>
+              </a:rPr>
+              <a:t>약 20초</a:t>
+            </a:r>
+          </a:p>
+          <a:p>
+            <a:pPr algn="l">
+              <a:lnSpc>
+                <a:spcPct val="115000"/>
+              </a:lnSpc>
+            </a:pPr>
+            <a:r>
+              <a:rPr sz="1500" b="0">
+                <a:solidFill>
+                  <a:srgbClr val="62736A"/>
+                </a:solidFill>
+                <a:latin typeface="Apple SD Gothic Neo"/>
+                <a:ea typeface="Apple SD Gothic Neo"/>
+                <a:cs typeface="Apple SD Gothic Neo"/>
+              </a:rPr>
+              <a:t>모델·도구 실행 시간 (현장 처리 시간 아님)</a:t>
+            </a:r>
+          </a:p>
+        </p:txBody>
+      </p:sp>
+      <p:cxnSp>
+        <p:nvCxnSpPr>
+          <p:cNvPr id="12" name="Connector 11"/>
+          <p:cNvCxnSpPr/>
+          <p:nvPr/>
+        </p:nvCxnSpPr>
+        <p:spPr>
+          <a:xfrm>
+            <a:off x="5806440" y="3291840"/>
+            <a:ext cx="548640" cy="0"/>
+          </a:xfrm>
+          <a:prstGeom prst="line">
+            <a:avLst/>
+          </a:prstGeom>
+          <a:ln w="38100">
+            <a:solidFill>
+              <a:srgbClr val="D06B3D"/>
+            </a:solidFill>
+            <a:tailEnd type="triangle" w="med" len="med"/>
+          </a:ln>
+        </p:spPr>
+        <p:style>
+          <a:lnRef idx="2">
+            <a:schemeClr val="accent1"/>
+          </a:lnRef>
+          <a:fillRef idx="0">
+            <a:schemeClr val="accent1"/>
+          </a:fillRef>
+          <a:effectRef idx="1">
+            <a:schemeClr val="accent1"/>
+          </a:effectRef>
+          <a:fontRef idx="minor">
+            <a:schemeClr val="tx1"/>
+          </a:fontRef>
+        </p:style>
+      </p:cxnSp>
+      <p:sp>
+        <p:nvSpPr>
+          <p:cNvPr id="13" name="TextBox 12"/>
+          <p:cNvSpPr txBox="1"/>
+          <p:nvPr/>
+        </p:nvSpPr>
+        <p:spPr>
+          <a:xfrm>
+            <a:off x="6492240" y="1783080"/>
+            <a:ext cx="5120640" cy="365760"/>
+          </a:xfrm>
+          <a:prstGeom prst="rect">
+            <a:avLst/>
+          </a:prstGeom>
+          <a:noFill/>
+        </p:spPr>
+        <p:txBody>
+          <a:bodyPr wrap="square" lIns="18288" rIns="18288" tIns="18288" bIns="18288" anchor="t">
+            <a:spAutoFit/>
+          </a:bodyPr>
+          <a:lstStyle/>
+          <a:p>
+            <a:pPr algn="l">
+              <a:lnSpc>
+                <a:spcPct val="115000"/>
+              </a:lnSpc>
+            </a:pPr>
+            <a:r>
+              <a:rPr sz="2000" b="0">
+                <a:solidFill>
+                  <a:srgbClr val="172B27"/>
+                </a:solidFill>
+                <a:latin typeface="Apple SD Gothic Neo"/>
+                <a:ea typeface="Apple SD Gothic Neo"/>
+                <a:cs typeface="Apple SD Gothic Neo"/>
+              </a:rPr>
+              <a:t>점검 3가지 · 원본 기록에 연결</a:t>
+            </a:r>
+          </a:p>
+        </p:txBody>
+      </p:sp>
+      <p:sp>
+        <p:nvSpPr>
+          <p:cNvPr id="14" name="Rounded Rectangle 13"/>
+          <p:cNvSpPr/>
+          <p:nvPr/>
+        </p:nvSpPr>
+        <p:spPr>
+          <a:xfrm>
+            <a:off x="6492240" y="2286000"/>
+            <a:ext cx="4937760" cy="566928"/>
+          </a:xfrm>
+          <a:prstGeom prst="roundRect">
+            <a:avLst>
+              <a:gd name="adj" fmla="val 12000"/>
+            </a:avLst>
+          </a:prstGeom>
+          <a:solidFill>
+            <a:srgbClr val="244E41"/>
           </a:solidFill>
           <a:ln>
             <a:noFill/>
@@ -5796,35 +5388,220 @@
           <a:bodyPr rtlCol="0" anchor="ctr" wrap="square"/>
           <a:lstStyle/>
           <a:p>
-            <a:pPr algn="ctr">
-              <a:lnSpc>
-                <a:spcPct val="115000"/>
-              </a:lnSpc>
-            </a:pPr>
-            <a:r>
-              <a:rPr sz="1300" b="0">
-                <a:solidFill>
-                  <a:srgbClr val="172B27"/>
-                </a:solidFill>
-                <a:latin typeface="Apple SD Gothic Neo"/>
-                <a:ea typeface="Apple SD Gothic Neo"/>
-                <a:cs typeface="Apple SD Gothic Neo"/>
-              </a:rPr>
-              <a:t>공개 시험 데이터로만 확인</a:t>
-            </a:r>
-          </a:p>
-        </p:txBody>
-      </p:sp>
-      <p:sp>
-        <p:nvSpPr>
-          <p:cNvPr id="26" name="TextBox 25"/>
+            <a:pPr algn="l">
+              <a:lnSpc>
+                <a:spcPct val="115000"/>
+              </a:lnSpc>
+            </a:pPr>
+            <a:r>
+              <a:rPr sz="1900" b="1">
+                <a:solidFill>
+                  <a:srgbClr val="FFFFFF"/>
+                </a:solidFill>
+                <a:latin typeface="Apple SD Gothic Neo"/>
+                <a:ea typeface="Apple SD Gothic Neo"/>
+                <a:cs typeface="Apple SD Gothic Neo"/>
+              </a:rPr>
+              <a:t>① 실내·라디에이터 온도 확인</a:t>
+            </a:r>
+          </a:p>
+        </p:txBody>
+      </p:sp>
+      <p:sp>
+        <p:nvSpPr>
+          <p:cNvPr id="15" name="Rounded Rectangle 14"/>
+          <p:cNvSpPr/>
+          <p:nvPr/>
+        </p:nvSpPr>
+        <p:spPr>
+          <a:xfrm>
+            <a:off x="6492240" y="3017520"/>
+            <a:ext cx="4937760" cy="566928"/>
+          </a:xfrm>
+          <a:prstGeom prst="roundRect">
+            <a:avLst>
+              <a:gd name="adj" fmla="val 12000"/>
+            </a:avLst>
+          </a:prstGeom>
+          <a:solidFill>
+            <a:srgbClr val="244E41"/>
+          </a:solidFill>
+          <a:ln>
+            <a:noFill/>
+          </a:ln>
+          <a:effectLst/>
+        </p:spPr>
+        <p:style>
+          <a:lnRef idx="1">
+            <a:schemeClr val="accent1"/>
+          </a:lnRef>
+          <a:fillRef idx="3">
+            <a:schemeClr val="accent1"/>
+          </a:fillRef>
+          <a:effectRef idx="2">
+            <a:schemeClr val="accent1"/>
+          </a:effectRef>
+          <a:fontRef idx="minor">
+            <a:schemeClr val="lt1"/>
+          </a:fontRef>
+        </p:style>
+        <p:txBody>
+          <a:bodyPr rtlCol="0" anchor="ctr" wrap="square"/>
+          <a:lstStyle/>
+          <a:p>
+            <a:pPr algn="l">
+              <a:lnSpc>
+                <a:spcPct val="115000"/>
+              </a:lnSpc>
+            </a:pPr>
+            <a:r>
+              <a:rPr sz="1900" b="1">
+                <a:solidFill>
+                  <a:srgbClr val="FFFFFF"/>
+                </a:solidFill>
+                <a:latin typeface="Apple SD Gothic Neo"/>
+                <a:ea typeface="Apple SD Gothic Neo"/>
+                <a:cs typeface="Apple SD Gothic Neo"/>
+              </a:rPr>
+              <a:t>② 건물 배관 유량 측정</a:t>
+            </a:r>
+          </a:p>
+        </p:txBody>
+      </p:sp>
+      <p:sp>
+        <p:nvSpPr>
+          <p:cNvPr id="16" name="Rounded Rectangle 15"/>
+          <p:cNvSpPr/>
+          <p:nvPr/>
+        </p:nvSpPr>
+        <p:spPr>
+          <a:xfrm>
+            <a:off x="6492240" y="3749039"/>
+            <a:ext cx="4937760" cy="566928"/>
+          </a:xfrm>
+          <a:prstGeom prst="roundRect">
+            <a:avLst>
+              <a:gd name="adj" fmla="val 12000"/>
+            </a:avLst>
+          </a:prstGeom>
+          <a:solidFill>
+            <a:srgbClr val="244E41"/>
+          </a:solidFill>
+          <a:ln>
+            <a:noFill/>
+          </a:ln>
+          <a:effectLst/>
+        </p:spPr>
+        <p:style>
+          <a:lnRef idx="1">
+            <a:schemeClr val="accent1"/>
+          </a:lnRef>
+          <a:fillRef idx="3">
+            <a:schemeClr val="accent1"/>
+          </a:fillRef>
+          <a:effectRef idx="2">
+            <a:schemeClr val="accent1"/>
+          </a:effectRef>
+          <a:fontRef idx="minor">
+            <a:schemeClr val="lt1"/>
+          </a:fontRef>
+        </p:style>
+        <p:txBody>
+          <a:bodyPr rtlCol="0" anchor="ctr" wrap="square"/>
+          <a:lstStyle/>
+          <a:p>
+            <a:pPr algn="l">
+              <a:lnSpc>
+                <a:spcPct val="115000"/>
+              </a:lnSpc>
+            </a:pPr>
+            <a:r>
+              <a:rPr sz="1900" b="1">
+                <a:solidFill>
+                  <a:srgbClr val="FFFFFF"/>
+                </a:solidFill>
+                <a:latin typeface="Apple SD Gothic Neo"/>
+                <a:ea typeface="Apple SD Gothic Neo"/>
+                <a:cs typeface="Apple SD Gothic Neo"/>
+              </a:rPr>
+              <a:t>③ 제어기 설정·경보 기록 검토</a:t>
+            </a:r>
+          </a:p>
+        </p:txBody>
+      </p:sp>
+      <p:sp>
+        <p:nvSpPr>
+          <p:cNvPr id="17" name="Rounded Rectangle 16"/>
+          <p:cNvSpPr/>
+          <p:nvPr/>
+        </p:nvSpPr>
+        <p:spPr>
+          <a:xfrm>
+            <a:off x="6492240" y="4526280"/>
+            <a:ext cx="4937760" cy="566928"/>
+          </a:xfrm>
+          <a:prstGeom prst="roundRect">
+            <a:avLst>
+              <a:gd name="adj" fmla="val 12000"/>
+            </a:avLst>
+          </a:prstGeom>
+          <a:solidFill>
+            <a:srgbClr val="FBF9F4"/>
+          </a:solidFill>
+          <a:ln w="19050">
+            <a:solidFill>
+              <a:srgbClr val="D06B3D"/>
+            </a:solidFill>
+          </a:ln>
+          <a:effectLst/>
+        </p:spPr>
+        <p:style>
+          <a:lnRef idx="1">
+            <a:schemeClr val="accent1"/>
+          </a:lnRef>
+          <a:fillRef idx="3">
+            <a:schemeClr val="accent1"/>
+          </a:fillRef>
+          <a:effectRef idx="2">
+            <a:schemeClr val="accent1"/>
+          </a:effectRef>
+          <a:fontRef idx="minor">
+            <a:schemeClr val="lt1"/>
+          </a:fontRef>
+        </p:style>
+        <p:txBody>
+          <a:bodyPr rtlCol="0" anchor="ctr" wrap="square"/>
+          <a:lstStyle/>
+          <a:p>
+            <a:pPr algn="l">
+              <a:lnSpc>
+                <a:spcPct val="115000"/>
+              </a:lnSpc>
+            </a:pPr>
+            <a:r>
+              <a:rPr sz="1800" b="0">
+                <a:solidFill>
+                  <a:srgbClr val="D06B3D"/>
+                </a:solidFill>
+                <a:latin typeface="Apple SD Gothic Neo"/>
+                <a:ea typeface="Apple SD Gothic Neo"/>
+                <a:cs typeface="Apple SD Gothic Neo"/>
+              </a:rPr>
+              <a:t>+ 데이터로 알 수 없는 것도 함께 전달</a:t>
+            </a:r>
+          </a:p>
+        </p:txBody>
+      </p:sp>
+      <p:sp>
+        <p:nvSpPr>
+          <p:cNvPr id="18" name="TextBox 17"/>
           <p:cNvSpPr txBox="1"/>
           <p:nvPr/>
         </p:nvSpPr>
         <p:spPr>
           <a:xfrm>
-            <a:off x="731520" y="5669280"/>
-            <a:ext cx="10698480" cy="548640"/>
+            <a:off x="6492240" y="5349240"/>
+            <a:ext cx="4937760" cy="457200"/>
           </a:xfrm>
           <a:prstGeom prst="rect">
             <a:avLst/>
@@ -5843,7 +5620,7 @@
               </a:lnSpc>
             </a:pPr>
             <a:r>
-              <a:rPr sz="1900" b="0">
+              <a:rPr sz="2200" b="1">
                 <a:solidFill>
                   <a:srgbClr val="172B27"/>
                 </a:solidFill>
@@ -5851,25 +5628,14 @@
                 <a:ea typeface="Apple SD Gothic Neo"/>
                 <a:cs typeface="Apple SD Gothic Neo"/>
               </a:rPr>
-              <a:t>실행 환경 생태계가 갖춰져 있어 </a:t>
-            </a:r>
-            <a:r>
-              <a:rPr sz="1900" b="1">
-                <a:solidFill>
-                  <a:srgbClr val="244E41"/>
-                </a:solidFill>
-                <a:latin typeface="Apple SD Gothic Neo"/>
-                <a:ea typeface="Apple SD Gothic Neo"/>
-                <a:cs typeface="Apple SD Gothic Neo"/>
-              </a:rPr>
-              <a:t>로컬·보안 환경용 에이전트를 빠르게 구성</a:t>
-            </a:r>
-          </a:p>
-        </p:txBody>
-      </p:sp>
-      <p:sp>
-        <p:nvSpPr>
-          <p:cNvPr id="27" name="TextBox 26"/>
+              <a:t>판단은 엔지니어가 한다</a:t>
+            </a:r>
+          </a:p>
+        </p:txBody>
+      </p:sp>
+      <p:sp>
+        <p:nvSpPr>
+          <p:cNvPr id="19" name="TextBox 18"/>
           <p:cNvSpPr txBox="1"/>
           <p:nvPr/>
         </p:nvSpPr>
@@ -5970,7 +5736,7 @@
                 <a:ea typeface="Apple SD Gothic Neo"/>
                 <a:cs typeface="Apple SD Gothic Neo"/>
               </a:rPr>
-              <a:t>PreDist 사건 32건 · 같은 자료 · 같은 출력 형식 · 사건당 1회</a:t>
+              <a:t>로컬·보안 환경용 에이전트를 빠르게</a:t>
             </a:r>
           </a:p>
         </p:txBody>
@@ -6011,45 +5777,479 @@
                 <a:ea typeface="Apple SD Gothic Neo"/>
                 <a:cs typeface="Apple SD Gothic Neo"/>
               </a:rPr>
-              <a:t>평가 결과: 판단의 질은 상한선에 가깝다</a:t>
-            </a:r>
-          </a:p>
-        </p:txBody>
-      </p:sp>
-      <p:pic>
-        <p:nvPicPr>
-          <p:cNvPr id="4" name="Picture 3" descr="eval-cycle5.png"/>
-          <p:cNvPicPr>
-            <a:picLocks noChangeAspect="1"/>
-          </p:cNvPicPr>
-          <p:nvPr/>
-        </p:nvPicPr>
-        <p:blipFill>
-          <a:blip r:embed="rId3"/>
-          <a:stretch>
-            <a:fillRect/>
-          </a:stretch>
-        </p:blipFill>
-        <p:spPr>
-          <a:xfrm>
-            <a:off x="548640" y="1783080"/>
-            <a:ext cx="6675120" cy="3319558"/>
-          </a:xfrm>
-          <a:prstGeom prst="rect">
+              <a:t>구조와 NVIDIA 기술</a:t>
+            </a:r>
+          </a:p>
+        </p:txBody>
+      </p:sp>
+      <p:sp>
+        <p:nvSpPr>
+          <p:cNvPr id="4" name="Rounded Rectangle 3"/>
+          <p:cNvSpPr/>
+          <p:nvPr/>
+        </p:nvSpPr>
+        <p:spPr>
+          <a:xfrm>
+            <a:off x="731520" y="1874519"/>
+            <a:ext cx="1828800" cy="1097280"/>
+          </a:xfrm>
+          <a:prstGeom prst="roundRect">
+            <a:avLst>
+              <a:gd name="adj" fmla="val 12000"/>
+            </a:avLst>
+          </a:prstGeom>
+          <a:solidFill>
+            <a:srgbClr val="FFFFFF"/>
+          </a:solidFill>
+          <a:ln w="15875">
+            <a:solidFill>
+              <a:srgbClr val="BFC8BF"/>
+            </a:solidFill>
+          </a:ln>
+          <a:effectLst/>
+        </p:spPr>
+        <p:style>
+          <a:lnRef idx="1">
+            <a:schemeClr val="accent1"/>
+          </a:lnRef>
+          <a:fillRef idx="3">
+            <a:schemeClr val="accent1"/>
+          </a:fillRef>
+          <a:effectRef idx="2">
+            <a:schemeClr val="accent1"/>
+          </a:effectRef>
+          <a:fontRef idx="minor">
+            <a:schemeClr val="lt1"/>
+          </a:fontRef>
+        </p:style>
+        <p:txBody>
+          <a:bodyPr rtlCol="0" anchor="ctr" wrap="square"/>
+          <a:lstStyle/>
+          <a:p>
+            <a:pPr algn="ctr">
+              <a:lnSpc>
+                <a:spcPct val="115000"/>
+              </a:lnSpc>
+            </a:pPr>
+            <a:r>
+              <a:rPr sz="1800" b="0">
+                <a:solidFill>
+                  <a:srgbClr val="172B27"/>
+                </a:solidFill>
+                <a:latin typeface="Apple SD Gothic Neo"/>
+                <a:ea typeface="Apple SD Gothic Neo"/>
+                <a:cs typeface="Apple SD Gothic Neo"/>
+              </a:rPr>
+              <a:t>신고</a:t>
+            </a:r>
+          </a:p>
+          <a:p>
+            <a:pPr algn="ctr">
+              <a:lnSpc>
+                <a:spcPct val="115000"/>
+              </a:lnSpc>
+            </a:pPr>
+            <a:r>
+              <a:rPr sz="1800" b="0">
+                <a:solidFill>
+                  <a:srgbClr val="172B27"/>
+                </a:solidFill>
+                <a:latin typeface="Apple SD Gothic Neo"/>
+                <a:ea typeface="Apple SD Gothic Neo"/>
+                <a:cs typeface="Apple SD Gothic Neo"/>
+              </a:rPr>
+              <a:t>+ 접수 시각</a:t>
+            </a:r>
+          </a:p>
+        </p:txBody>
+      </p:sp>
+      <p:sp>
+        <p:nvSpPr>
+          <p:cNvPr id="5" name="Rounded Rectangle 4"/>
+          <p:cNvSpPr/>
+          <p:nvPr/>
+        </p:nvSpPr>
+        <p:spPr>
+          <a:xfrm>
+            <a:off x="3108960" y="1783079"/>
+            <a:ext cx="2743200" cy="1280160"/>
+          </a:xfrm>
+          <a:prstGeom prst="roundRect">
+            <a:avLst>
+              <a:gd name="adj" fmla="val 12000"/>
+            </a:avLst>
+          </a:prstGeom>
+          <a:solidFill>
+            <a:srgbClr val="76B900"/>
+          </a:solidFill>
+          <a:ln>
+            <a:noFill/>
+          </a:ln>
+          <a:effectLst/>
+        </p:spPr>
+        <p:style>
+          <a:lnRef idx="1">
+            <a:schemeClr val="accent1"/>
+          </a:lnRef>
+          <a:fillRef idx="3">
+            <a:schemeClr val="accent1"/>
+          </a:fillRef>
+          <a:effectRef idx="2">
+            <a:schemeClr val="accent1"/>
+          </a:effectRef>
+          <a:fontRef idx="minor">
+            <a:schemeClr val="lt1"/>
+          </a:fontRef>
+        </p:style>
+        <p:txBody>
+          <a:bodyPr rtlCol="0" anchor="ctr" wrap="square"/>
+          <a:lstStyle/>
+          <a:p>
+            <a:pPr algn="ctr">
+              <a:lnSpc>
+                <a:spcPct val="115000"/>
+              </a:lnSpc>
+            </a:pPr>
+            <a:r>
+              <a:rPr sz="2000" b="1">
+                <a:solidFill>
+                  <a:srgbClr val="FFFFFF"/>
+                </a:solidFill>
+                <a:latin typeface="Apple SD Gothic Neo"/>
+                <a:ea typeface="Apple SD Gothic Neo"/>
+                <a:cs typeface="Apple SD Gothic Neo"/>
+              </a:rPr>
+              <a:t>Nemotron 3 Ultra</a:t>
+            </a:r>
+          </a:p>
+          <a:p>
+            <a:pPr algn="ctr">
+              <a:lnSpc>
+                <a:spcPct val="115000"/>
+              </a:lnSpc>
+            </a:pPr>
+            <a:r>
+              <a:rPr sz="1500" b="0">
+                <a:solidFill>
+                  <a:srgbClr val="FFFFFF"/>
+                </a:solidFill>
+                <a:latin typeface="Apple SD Gothic Neo"/>
+                <a:ea typeface="Apple SD Gothic Neo"/>
+                <a:cs typeface="Apple SD Gothic Neo"/>
+              </a:rPr>
+              <a:t>NVIDIA NIM</a:t>
+            </a:r>
+          </a:p>
+        </p:txBody>
+      </p:sp>
+      <p:sp>
+        <p:nvSpPr>
+          <p:cNvPr id="6" name="Rounded Rectangle 5"/>
+          <p:cNvSpPr/>
+          <p:nvPr/>
+        </p:nvSpPr>
+        <p:spPr>
+          <a:xfrm>
+            <a:off x="6400800" y="1874519"/>
+            <a:ext cx="2194560" cy="1097280"/>
+          </a:xfrm>
+          <a:prstGeom prst="roundRect">
+            <a:avLst>
+              <a:gd name="adj" fmla="val 12000"/>
+            </a:avLst>
+          </a:prstGeom>
+          <a:solidFill>
+            <a:srgbClr val="FFFFFF"/>
+          </a:solidFill>
+          <a:ln w="15875">
+            <a:solidFill>
+              <a:srgbClr val="BFC8BF"/>
+            </a:solidFill>
+          </a:ln>
+          <a:effectLst/>
+        </p:spPr>
+        <p:style>
+          <a:lnRef idx="1">
+            <a:schemeClr val="accent1"/>
+          </a:lnRef>
+          <a:fillRef idx="3">
+            <a:schemeClr val="accent1"/>
+          </a:fillRef>
+          <a:effectRef idx="2">
+            <a:schemeClr val="accent1"/>
+          </a:effectRef>
+          <a:fontRef idx="minor">
+            <a:schemeClr val="lt1"/>
+          </a:fontRef>
+        </p:style>
+        <p:txBody>
+          <a:bodyPr rtlCol="0" anchor="ctr" wrap="square"/>
+          <a:lstStyle/>
+          <a:p>
+            <a:pPr algn="ctr">
+              <a:lnSpc>
+                <a:spcPct val="115000"/>
+              </a:lnSpc>
+            </a:pPr>
+            <a:r>
+              <a:rPr sz="1800" b="0">
+                <a:solidFill>
+                  <a:srgbClr val="172B27"/>
+                </a:solidFill>
+                <a:latin typeface="Apple SD Gothic Neo"/>
+                <a:ea typeface="Apple SD Gothic Neo"/>
+                <a:cs typeface="Apple SD Gothic Neo"/>
+              </a:rPr>
+              <a:t>근거 연결</a:t>
+            </a:r>
+          </a:p>
+          <a:p>
+            <a:pPr algn="ctr">
+              <a:lnSpc>
+                <a:spcPct val="115000"/>
+              </a:lnSpc>
+            </a:pPr>
+            <a:r>
+              <a:rPr sz="1800" b="0">
+                <a:solidFill>
+                  <a:srgbClr val="172B27"/>
+                </a:solidFill>
+                <a:latin typeface="Apple SD Gothic Neo"/>
+                <a:ea typeface="Apple SD Gothic Neo"/>
+                <a:cs typeface="Apple SD Gothic Neo"/>
+              </a:rPr>
+              <a:t>검사</a:t>
+            </a:r>
+          </a:p>
+        </p:txBody>
+      </p:sp>
+      <p:sp>
+        <p:nvSpPr>
+          <p:cNvPr id="7" name="Rounded Rectangle 6"/>
+          <p:cNvSpPr/>
+          <p:nvPr/>
+        </p:nvSpPr>
+        <p:spPr>
+          <a:xfrm>
+            <a:off x="9144000" y="1874519"/>
+            <a:ext cx="2286000" cy="1097280"/>
+          </a:xfrm>
+          <a:prstGeom prst="roundRect">
+            <a:avLst>
+              <a:gd name="adj" fmla="val 12000"/>
+            </a:avLst>
+          </a:prstGeom>
+          <a:solidFill>
+            <a:srgbClr val="244E41"/>
+          </a:solidFill>
+          <a:ln>
+            <a:noFill/>
+          </a:ln>
+          <a:effectLst/>
+        </p:spPr>
+        <p:style>
+          <a:lnRef idx="1">
+            <a:schemeClr val="accent1"/>
+          </a:lnRef>
+          <a:fillRef idx="3">
+            <a:schemeClr val="accent1"/>
+          </a:fillRef>
+          <a:effectRef idx="2">
+            <a:schemeClr val="accent1"/>
+          </a:effectRef>
+          <a:fontRef idx="minor">
+            <a:schemeClr val="lt1"/>
+          </a:fontRef>
+        </p:style>
+        <p:txBody>
+          <a:bodyPr rtlCol="0" anchor="ctr" wrap="square"/>
+          <a:lstStyle/>
+          <a:p>
+            <a:pPr algn="ctr">
+              <a:lnSpc>
+                <a:spcPct val="115000"/>
+              </a:lnSpc>
+            </a:pPr>
+            <a:r>
+              <a:rPr sz="2000" b="1">
+                <a:solidFill>
+                  <a:srgbClr val="FFFFFF"/>
+                </a:solidFill>
+                <a:latin typeface="Apple SD Gothic Neo"/>
+                <a:ea typeface="Apple SD Gothic Neo"/>
+                <a:cs typeface="Apple SD Gothic Neo"/>
+              </a:rPr>
+              <a:t>엔지니어</a:t>
+            </a:r>
+          </a:p>
+        </p:txBody>
+      </p:sp>
+      <p:cxnSp>
+        <p:nvCxnSpPr>
+          <p:cNvPr id="8" name="Connector 7"/>
+          <p:cNvCxnSpPr/>
+          <p:nvPr/>
+        </p:nvCxnSpPr>
+        <p:spPr>
+          <a:xfrm>
+            <a:off x="2606040" y="2423160"/>
+            <a:ext cx="457200" cy="0"/>
+          </a:xfrm>
+          <a:prstGeom prst="line">
             <a:avLst/>
           </a:prstGeom>
-        </p:spPr>
-      </p:pic>
-      <p:sp>
-        <p:nvSpPr>
-          <p:cNvPr id="5" name="TextBox 4"/>
+          <a:ln w="25400">
+            <a:solidFill>
+              <a:srgbClr val="62736A"/>
+            </a:solidFill>
+            <a:tailEnd type="triangle" w="med" len="med"/>
+          </a:ln>
+        </p:spPr>
+        <p:style>
+          <a:lnRef idx="2">
+            <a:schemeClr val="accent1"/>
+          </a:lnRef>
+          <a:fillRef idx="0">
+            <a:schemeClr val="accent1"/>
+          </a:fillRef>
+          <a:effectRef idx="1">
+            <a:schemeClr val="accent1"/>
+          </a:effectRef>
+          <a:fontRef idx="minor">
+            <a:schemeClr val="tx1"/>
+          </a:fontRef>
+        </p:style>
+      </p:cxnSp>
+      <p:cxnSp>
+        <p:nvCxnSpPr>
+          <p:cNvPr id="9" name="Connector 8"/>
+          <p:cNvCxnSpPr/>
+          <p:nvPr/>
+        </p:nvCxnSpPr>
+        <p:spPr>
+          <a:xfrm>
+            <a:off x="5897880" y="2423160"/>
+            <a:ext cx="457200" cy="0"/>
+          </a:xfrm>
+          <a:prstGeom prst="line">
+            <a:avLst/>
+          </a:prstGeom>
+          <a:ln w="25400">
+            <a:solidFill>
+              <a:srgbClr val="62736A"/>
+            </a:solidFill>
+            <a:tailEnd type="triangle" w="med" len="med"/>
+          </a:ln>
+        </p:spPr>
+        <p:style>
+          <a:lnRef idx="2">
+            <a:schemeClr val="accent1"/>
+          </a:lnRef>
+          <a:fillRef idx="0">
+            <a:schemeClr val="accent1"/>
+          </a:fillRef>
+          <a:effectRef idx="1">
+            <a:schemeClr val="accent1"/>
+          </a:effectRef>
+          <a:fontRef idx="minor">
+            <a:schemeClr val="tx1"/>
+          </a:fontRef>
+        </p:style>
+      </p:cxnSp>
+      <p:cxnSp>
+        <p:nvCxnSpPr>
+          <p:cNvPr id="10" name="Connector 9"/>
+          <p:cNvCxnSpPr/>
+          <p:nvPr/>
+        </p:nvCxnSpPr>
+        <p:spPr>
+          <a:xfrm>
+            <a:off x="8641080" y="2423160"/>
+            <a:ext cx="457200" cy="0"/>
+          </a:xfrm>
+          <a:prstGeom prst="line">
+            <a:avLst/>
+          </a:prstGeom>
+          <a:ln w="25400">
+            <a:solidFill>
+              <a:srgbClr val="62736A"/>
+            </a:solidFill>
+            <a:tailEnd type="triangle" w="med" len="med"/>
+          </a:ln>
+        </p:spPr>
+        <p:style>
+          <a:lnRef idx="2">
+            <a:schemeClr val="accent1"/>
+          </a:lnRef>
+          <a:fillRef idx="0">
+            <a:schemeClr val="accent1"/>
+          </a:fillRef>
+          <a:effectRef idx="1">
+            <a:schemeClr val="accent1"/>
+          </a:effectRef>
+          <a:fontRef idx="minor">
+            <a:schemeClr val="tx1"/>
+          </a:fontRef>
+        </p:style>
+      </p:cxnSp>
+      <p:sp>
+        <p:nvSpPr>
+          <p:cNvPr id="11" name="Rounded Rectangle 10"/>
+          <p:cNvSpPr/>
+          <p:nvPr/>
+        </p:nvSpPr>
+        <p:spPr>
+          <a:xfrm>
+            <a:off x="731520" y="3429000"/>
+            <a:ext cx="3429000" cy="2011680"/>
+          </a:xfrm>
+          <a:prstGeom prst="roundRect">
+            <a:avLst>
+              <a:gd name="adj" fmla="val 12000"/>
+            </a:avLst>
+          </a:prstGeom>
+          <a:solidFill>
+            <a:srgbClr val="FFFFFF"/>
+          </a:solidFill>
+          <a:ln w="31750">
+            <a:solidFill>
+              <a:srgbClr val="76B900"/>
+            </a:solidFill>
+          </a:ln>
+          <a:effectLst/>
+        </p:spPr>
+        <p:style>
+          <a:lnRef idx="1">
+            <a:schemeClr val="accent1"/>
+          </a:lnRef>
+          <a:fillRef idx="3">
+            <a:schemeClr val="accent1"/>
+          </a:fillRef>
+          <a:effectRef idx="2">
+            <a:schemeClr val="accent1"/>
+          </a:effectRef>
+          <a:fontRef idx="minor">
+            <a:schemeClr val="lt1"/>
+          </a:fontRef>
+        </p:style>
+        <p:txBody>
+          <a:bodyPr rtlCol="0" anchor="ctr" wrap="square"/>
+          <a:lstStyle/>
+          <a:p>
+            <a:pPr algn="ctr"/>
+          </a:p>
+        </p:txBody>
+      </p:sp>
+      <p:sp>
+        <p:nvSpPr>
+          <p:cNvPr id="12" name="TextBox 11"/>
           <p:cNvSpPr txBox="1"/>
           <p:nvPr/>
         </p:nvSpPr>
         <p:spPr>
           <a:xfrm>
-            <a:off x="7498079" y="1783080"/>
-            <a:ext cx="4206240" cy="3566160"/>
+            <a:off x="960120" y="3566160"/>
+            <a:ext cx="2971800" cy="365760"/>
           </a:xfrm>
           <a:prstGeom prst="rect">
             <a:avLst/>
@@ -6068,7 +6268,7 @@
               </a:lnSpc>
             </a:pPr>
             <a:r>
-              <a:rPr sz="1900" b="1">
+              <a:rPr sz="1500" b="1">
                 <a:solidFill>
                   <a:srgbClr val="62736A"/>
                 </a:solidFill>
@@ -6076,9 +6276,32 @@
                 <a:ea typeface="Apple SD Gothic Neo"/>
                 <a:cs typeface="Apple SD Gothic Neo"/>
               </a:rPr>
-              <a:t>Sonnet 5 = 클라우드 상한선</a:t>
-            </a:r>
-          </a:p>
+              <a:t>모델 제공</a:t>
+            </a:r>
+          </a:p>
+        </p:txBody>
+      </p:sp>
+      <p:sp>
+        <p:nvSpPr>
+          <p:cNvPr id="13" name="TextBox 12"/>
+          <p:cNvSpPr txBox="1"/>
+          <p:nvPr/>
+        </p:nvSpPr>
+        <p:spPr>
+          <a:xfrm>
+            <a:off x="960120" y="3886200"/>
+            <a:ext cx="2971800" cy="457200"/>
+          </a:xfrm>
+          <a:prstGeom prst="rect">
+            <a:avLst/>
+          </a:prstGeom>
+          <a:noFill/>
+        </p:spPr>
+        <p:txBody>
+          <a:bodyPr wrap="square" lIns="18288" rIns="18288" tIns="18288" bIns="18288" anchor="t">
+            <a:spAutoFit/>
+          </a:bodyPr>
+          <a:lstStyle/>
           <a:p>
             <a:pPr algn="l">
               <a:lnSpc>
@@ -6086,17 +6309,231 @@
               </a:lnSpc>
             </a:pPr>
             <a:r>
+              <a:rPr sz="2100" b="1">
+                <a:solidFill>
+                  <a:srgbClr val="76B900"/>
+                </a:solidFill>
+                <a:latin typeface="Apple SD Gothic Neo"/>
+                <a:ea typeface="Apple SD Gothic Neo"/>
+                <a:cs typeface="Apple SD Gothic Neo"/>
+              </a:rPr>
+              <a:t>NIM</a:t>
+            </a:r>
+          </a:p>
+        </p:txBody>
+      </p:sp>
+      <p:sp>
+        <p:nvSpPr>
+          <p:cNvPr id="14" name="TextBox 13"/>
+          <p:cNvSpPr txBox="1"/>
+          <p:nvPr/>
+        </p:nvSpPr>
+        <p:spPr>
+          <a:xfrm>
+            <a:off x="960120" y="4343400"/>
+            <a:ext cx="2971800" cy="548640"/>
+          </a:xfrm>
+          <a:prstGeom prst="rect">
+            <a:avLst/>
+          </a:prstGeom>
+          <a:noFill/>
+        </p:spPr>
+        <p:txBody>
+          <a:bodyPr wrap="square" lIns="18288" rIns="18288" tIns="18288" bIns="18288" anchor="t">
+            <a:spAutoFit/>
+          </a:bodyPr>
+          <a:lstStyle/>
+          <a:p>
+            <a:pPr algn="l">
+              <a:lnSpc>
+                <a:spcPct val="115000"/>
+              </a:lnSpc>
+            </a:pPr>
+            <a:r>
               <a:rPr sz="1500" b="0">
                 <a:solidFill>
+                  <a:srgbClr val="172B27"/>
+                </a:solidFill>
+                <a:latin typeface="Apple SD Gothic Neo"/>
+                <a:ea typeface="Apple SD Gothic Neo"/>
+                <a:cs typeface="Apple SD Gothic Neo"/>
+              </a:rPr>
+              <a:t>Ultra를 표준 API로 호출</a:t>
+            </a:r>
+          </a:p>
+        </p:txBody>
+      </p:sp>
+      <p:sp>
+        <p:nvSpPr>
+          <p:cNvPr id="15" name="Rounded Rectangle 14"/>
+          <p:cNvSpPr/>
+          <p:nvPr/>
+        </p:nvSpPr>
+        <p:spPr>
+          <a:xfrm>
+            <a:off x="960120" y="4910328"/>
+            <a:ext cx="2971800" cy="384048"/>
+          </a:xfrm>
+          <a:prstGeom prst="roundRect">
+            <a:avLst>
+              <a:gd name="adj" fmla="val 12000"/>
+            </a:avLst>
+          </a:prstGeom>
+          <a:solidFill>
+            <a:srgbClr val="76B900"/>
+          </a:solidFill>
+          <a:ln>
+            <a:noFill/>
+          </a:ln>
+          <a:effectLst/>
+        </p:spPr>
+        <p:style>
+          <a:lnRef idx="1">
+            <a:schemeClr val="accent1"/>
+          </a:lnRef>
+          <a:fillRef idx="3">
+            <a:schemeClr val="accent1"/>
+          </a:fillRef>
+          <a:effectRef idx="2">
+            <a:schemeClr val="accent1"/>
+          </a:effectRef>
+          <a:fontRef idx="minor">
+            <a:schemeClr val="lt1"/>
+          </a:fontRef>
+        </p:style>
+        <p:txBody>
+          <a:bodyPr rtlCol="0" anchor="ctr" wrap="square"/>
+          <a:lstStyle/>
+          <a:p>
+            <a:pPr algn="ctr">
+              <a:lnSpc>
+                <a:spcPct val="115000"/>
+              </a:lnSpc>
+            </a:pPr>
+            <a:r>
+              <a:rPr sz="1300" b="1">
+                <a:solidFill>
+                  <a:srgbClr val="FFFFFF"/>
+                </a:solidFill>
+                <a:latin typeface="Apple SD Gothic Neo"/>
+                <a:ea typeface="Apple SD Gothic Neo"/>
+                <a:cs typeface="Apple SD Gothic Neo"/>
+              </a:rPr>
+              <a:t>데모 핵심 경로</a:t>
+            </a:r>
+          </a:p>
+        </p:txBody>
+      </p:sp>
+      <p:sp>
+        <p:nvSpPr>
+          <p:cNvPr id="16" name="Rounded Rectangle 15"/>
+          <p:cNvSpPr/>
+          <p:nvPr/>
+        </p:nvSpPr>
+        <p:spPr>
+          <a:xfrm>
+            <a:off x="4370832" y="3429000"/>
+            <a:ext cx="3429000" cy="2011680"/>
+          </a:xfrm>
+          <a:prstGeom prst="roundRect">
+            <a:avLst>
+              <a:gd name="adj" fmla="val 12000"/>
+            </a:avLst>
+          </a:prstGeom>
+          <a:solidFill>
+            <a:srgbClr val="FFFFFF"/>
+          </a:solidFill>
+          <a:ln w="19050">
+            <a:solidFill>
+              <a:srgbClr val="76B900"/>
+            </a:solidFill>
+          </a:ln>
+          <a:effectLst/>
+        </p:spPr>
+        <p:style>
+          <a:lnRef idx="1">
+            <a:schemeClr val="accent1"/>
+          </a:lnRef>
+          <a:fillRef idx="3">
+            <a:schemeClr val="accent1"/>
+          </a:fillRef>
+          <a:effectRef idx="2">
+            <a:schemeClr val="accent1"/>
+          </a:effectRef>
+          <a:fontRef idx="minor">
+            <a:schemeClr val="lt1"/>
+          </a:fontRef>
+        </p:style>
+        <p:txBody>
+          <a:bodyPr rtlCol="0" anchor="ctr" wrap="square"/>
+          <a:lstStyle/>
+          <a:p>
+            <a:pPr algn="ctr"/>
+          </a:p>
+        </p:txBody>
+      </p:sp>
+      <p:sp>
+        <p:nvSpPr>
+          <p:cNvPr id="17" name="TextBox 16"/>
+          <p:cNvSpPr txBox="1"/>
+          <p:nvPr/>
+        </p:nvSpPr>
+        <p:spPr>
+          <a:xfrm>
+            <a:off x="4599432" y="3566160"/>
+            <a:ext cx="2971800" cy="365760"/>
+          </a:xfrm>
+          <a:prstGeom prst="rect">
+            <a:avLst/>
+          </a:prstGeom>
+          <a:noFill/>
+        </p:spPr>
+        <p:txBody>
+          <a:bodyPr wrap="square" lIns="18288" rIns="18288" tIns="18288" bIns="18288" anchor="t">
+            <a:spAutoFit/>
+          </a:bodyPr>
+          <a:lstStyle/>
+          <a:p>
+            <a:pPr algn="l">
+              <a:lnSpc>
+                <a:spcPct val="115000"/>
+              </a:lnSpc>
+            </a:pPr>
+            <a:r>
+              <a:rPr sz="1500" b="1">
+                <a:solidFill>
                   <a:srgbClr val="62736A"/>
                 </a:solidFill>
                 <a:latin typeface="Apple SD Gothic Neo"/>
                 <a:ea typeface="Apple SD Gothic Neo"/>
                 <a:cs typeface="Apple SD Gothic Neo"/>
               </a:rPr>
-              <a:t>보안상 현장 사용 불가 · 32/32</a:t>
-            </a:r>
-          </a:p>
+              <a:t>도구 실행</a:t>
+            </a:r>
+          </a:p>
+        </p:txBody>
+      </p:sp>
+      <p:sp>
+        <p:nvSpPr>
+          <p:cNvPr id="18" name="TextBox 17"/>
+          <p:cNvSpPr txBox="1"/>
+          <p:nvPr/>
+        </p:nvSpPr>
+        <p:spPr>
+          <a:xfrm>
+            <a:off x="4599432" y="3886200"/>
+            <a:ext cx="2971800" cy="457200"/>
+          </a:xfrm>
+          <a:prstGeom prst="rect">
+            <a:avLst/>
+          </a:prstGeom>
+          <a:noFill/>
+        </p:spPr>
+        <p:txBody>
+          <a:bodyPr wrap="square" lIns="18288" rIns="18288" tIns="18288" bIns="18288" anchor="t">
+            <a:spAutoFit/>
+          </a:bodyPr>
+          <a:lstStyle/>
           <a:p>
             <a:pPr algn="l">
               <a:lnSpc>
@@ -6104,7 +6541,48 @@
               </a:lnSpc>
             </a:pPr>
             <a:r>
-              <a:rPr sz="800" b="0">
+              <a:rPr sz="2100" b="1">
+                <a:solidFill>
+                  <a:srgbClr val="76B900"/>
+                </a:solidFill>
+                <a:latin typeface="Apple SD Gothic Neo"/>
+                <a:ea typeface="Apple SD Gothic Neo"/>
+                <a:cs typeface="Apple SD Gothic Neo"/>
+              </a:rPr>
+              <a:t>NeMo Agent Toolkit</a:t>
+            </a:r>
+          </a:p>
+        </p:txBody>
+      </p:sp>
+      <p:sp>
+        <p:nvSpPr>
+          <p:cNvPr id="19" name="TextBox 18"/>
+          <p:cNvSpPr txBox="1"/>
+          <p:nvPr/>
+        </p:nvSpPr>
+        <p:spPr>
+          <a:xfrm>
+            <a:off x="4599432" y="4343400"/>
+            <a:ext cx="2971800" cy="548640"/>
+          </a:xfrm>
+          <a:prstGeom prst="rect">
+            <a:avLst/>
+          </a:prstGeom>
+          <a:noFill/>
+        </p:spPr>
+        <p:txBody>
+          <a:bodyPr wrap="square" lIns="18288" rIns="18288" tIns="18288" bIns="18288" anchor="t">
+            <a:spAutoFit/>
+          </a:bodyPr>
+          <a:lstStyle/>
+          <a:p>
+            <a:pPr algn="l">
+              <a:lnSpc>
+                <a:spcPct val="115000"/>
+              </a:lnSpc>
+            </a:pPr>
+            <a:r>
+              <a:rPr sz="1500" b="0">
                 <a:solidFill>
                   <a:srgbClr val="172B27"/>
                 </a:solidFill>
@@ -6112,147 +6590,21 @@
                 <a:ea typeface="Apple SD Gothic Neo"/>
                 <a:cs typeface="Apple SD Gothic Neo"/>
               </a:rPr>
-              <a:t/>
-            </a:r>
-          </a:p>
-          <a:p>
-            <a:pPr algn="l">
-              <a:lnSpc>
-                <a:spcPct val="115000"/>
-              </a:lnSpc>
-            </a:pPr>
-            <a:r>
-              <a:rPr sz="1900" b="1">
-                <a:solidFill>
-                  <a:srgbClr val="76B900"/>
-                </a:solidFill>
-                <a:latin typeface="Apple SD Gothic Neo"/>
-                <a:ea typeface="Apple SD Gothic Neo"/>
-                <a:cs typeface="Apple SD Gothic Neo"/>
-              </a:rPr>
-              <a:t>Ultra가 쓴 점검안 15개</a:t>
-            </a:r>
-          </a:p>
-          <a:p>
-            <a:pPr algn="l">
-              <a:lnSpc>
-                <a:spcPct val="115000"/>
-              </a:lnSpc>
-            </a:pPr>
-            <a:r>
-              <a:rPr sz="1500" b="0">
-                <a:solidFill>
-                  <a:srgbClr val="172B27"/>
-                </a:solidFill>
-                <a:latin typeface="Apple SD Gothic Neo"/>
-                <a:ea typeface="Apple SD Gothic Neo"/>
-                <a:cs typeface="Apple SD Gothic Neo"/>
-              </a:rPr>
-              <a:t>근거 조작 0건 · 모두 검사 통과</a:t>
-            </a:r>
-          </a:p>
-          <a:p>
-            <a:pPr algn="l">
-              <a:lnSpc>
-                <a:spcPct val="115000"/>
-              </a:lnSpc>
-            </a:pPr>
-            <a:r>
-              <a:rPr sz="800" b="0">
-                <a:solidFill>
-                  <a:srgbClr val="172B27"/>
-                </a:solidFill>
-                <a:latin typeface="Apple SD Gothic Neo"/>
-                <a:ea typeface="Apple SD Gothic Neo"/>
-                <a:cs typeface="Apple SD Gothic Neo"/>
-              </a:rPr>
-              <a:t/>
-            </a:r>
-          </a:p>
-          <a:p>
-            <a:pPr algn="l">
-              <a:lnSpc>
-                <a:spcPct val="115000"/>
-              </a:lnSpc>
-            </a:pPr>
-            <a:r>
-              <a:rPr sz="1900" b="1">
-                <a:solidFill>
-                  <a:srgbClr val="D06B3D"/>
-                </a:solidFill>
-                <a:latin typeface="Apple SD Gothic Neo"/>
-                <a:ea typeface="Apple SD Gothic Neo"/>
-                <a:cs typeface="Apple SD Gothic Neo"/>
-              </a:rPr>
-              <a:t>놓친 17건의 이유</a:t>
-            </a:r>
-          </a:p>
-          <a:p>
-            <a:pPr algn="l">
-              <a:lnSpc>
-                <a:spcPct val="115000"/>
-              </a:lnSpc>
-            </a:pPr>
-            <a:r>
-              <a:rPr sz="1500" b="0">
-                <a:solidFill>
-                  <a:srgbClr val="172B27"/>
-                </a:solidFill>
-                <a:latin typeface="Apple SD Gothic Neo"/>
-                <a:ea typeface="Apple SD Gothic Neo"/>
-                <a:cs typeface="Apple SD Gothic Neo"/>
-              </a:rPr>
-              <a:t>API 오류 13 · 도구 실수 4 (한 가지)</a:t>
-            </a:r>
-          </a:p>
-          <a:p>
-            <a:pPr algn="l">
-              <a:lnSpc>
-                <a:spcPct val="115000"/>
-              </a:lnSpc>
-            </a:pPr>
-            <a:r>
-              <a:rPr sz="800" b="0">
-                <a:solidFill>
-                  <a:srgbClr val="172B27"/>
-                </a:solidFill>
-                <a:latin typeface="Apple SD Gothic Neo"/>
-                <a:ea typeface="Apple SD Gothic Neo"/>
-                <a:cs typeface="Apple SD Gothic Neo"/>
-              </a:rPr>
-              <a:t/>
-            </a:r>
-          </a:p>
-          <a:p>
-            <a:pPr algn="l">
-              <a:lnSpc>
-                <a:spcPct val="115000"/>
-              </a:lnSpc>
-            </a:pPr>
-            <a:r>
-              <a:rPr sz="1900" b="1">
-                <a:solidFill>
-                  <a:srgbClr val="172B27"/>
-                </a:solidFill>
-                <a:latin typeface="Apple SD Gothic Neo"/>
-                <a:ea typeface="Apple SD Gothic Neo"/>
-                <a:cs typeface="Apple SD Gothic Neo"/>
-              </a:rPr>
-              <a:t>내용 점수 41 : 42 / 48 (2건)</a:t>
-            </a:r>
-          </a:p>
-        </p:txBody>
-      </p:sp>
-      <p:sp>
-        <p:nvSpPr>
-          <p:cNvPr id="6" name="Rounded Rectangle 5"/>
+              <a:t>읽기 도구 등록 · 사례 52 조회 6회</a:t>
+            </a:r>
+          </a:p>
+        </p:txBody>
+      </p:sp>
+      <p:sp>
+        <p:nvSpPr>
+          <p:cNvPr id="20" name="Rounded Rectangle 19"/>
           <p:cNvSpPr/>
           <p:nvPr/>
         </p:nvSpPr>
         <p:spPr>
           <a:xfrm>
-            <a:off x="731520" y="5486400"/>
-            <a:ext cx="10698480" cy="640080"/>
+            <a:off x="4599432" y="4910328"/>
+            <a:ext cx="2971800" cy="384048"/>
           </a:xfrm>
           <a:prstGeom prst="roundRect">
             <a:avLst>
@@ -6285,20 +6637,83 @@
           <a:bodyPr rtlCol="0" anchor="ctr" wrap="square"/>
           <a:lstStyle/>
           <a:p>
+            <a:pPr algn="ctr">
+              <a:lnSpc>
+                <a:spcPct val="115000"/>
+              </a:lnSpc>
+            </a:pPr>
+            <a:r>
+              <a:rPr sz="1300" b="0">
+                <a:solidFill>
+                  <a:srgbClr val="172B27"/>
+                </a:solidFill>
+                <a:latin typeface="Apple SD Gothic Neo"/>
+                <a:ea typeface="Apple SD Gothic Neo"/>
+                <a:cs typeface="Apple SD Gothic Neo"/>
+              </a:rPr>
+              <a:t>일부 적용 · 루프는 자체 코드</a:t>
+            </a:r>
+          </a:p>
+        </p:txBody>
+      </p:sp>
+      <p:sp>
+        <p:nvSpPr>
+          <p:cNvPr id="21" name="Rounded Rectangle 20"/>
+          <p:cNvSpPr/>
+          <p:nvPr/>
+        </p:nvSpPr>
+        <p:spPr>
+          <a:xfrm>
+            <a:off x="8010144" y="3429000"/>
+            <a:ext cx="3429000" cy="2011680"/>
+          </a:xfrm>
+          <a:prstGeom prst="roundRect">
+            <a:avLst>
+              <a:gd name="adj" fmla="val 12000"/>
+            </a:avLst>
+          </a:prstGeom>
+          <a:solidFill>
+            <a:srgbClr val="FFFFFF"/>
+          </a:solidFill>
+          <a:ln w="19050">
+            <a:solidFill>
+              <a:srgbClr val="76B900"/>
+            </a:solidFill>
+          </a:ln>
+          <a:effectLst/>
+        </p:spPr>
+        <p:style>
+          <a:lnRef idx="1">
+            <a:schemeClr val="accent1"/>
+          </a:lnRef>
+          <a:fillRef idx="3">
+            <a:schemeClr val="accent1"/>
+          </a:fillRef>
+          <a:effectRef idx="2">
+            <a:schemeClr val="accent1"/>
+          </a:effectRef>
+          <a:fontRef idx="minor">
+            <a:schemeClr val="lt1"/>
+          </a:fontRef>
+        </p:style>
+        <p:txBody>
+          <a:bodyPr rtlCol="0" anchor="ctr" wrap="square"/>
+          <a:lstStyle/>
+          <a:p>
             <a:pPr algn="ctr"/>
           </a:p>
         </p:txBody>
       </p:sp>
       <p:sp>
         <p:nvSpPr>
-          <p:cNvPr id="7" name="TextBox 6"/>
+          <p:cNvPr id="22" name="TextBox 21"/>
           <p:cNvSpPr txBox="1"/>
           <p:nvPr/>
         </p:nvSpPr>
         <p:spPr>
           <a:xfrm>
-            <a:off x="1005840" y="5486400"/>
-            <a:ext cx="10241280" cy="640080"/>
+            <a:off x="8238744" y="3566160"/>
+            <a:ext cx="2971800" cy="365760"/>
           </a:xfrm>
           <a:prstGeom prst="rect">
             <a:avLst/>
@@ -6306,7 +6721,7 @@
           <a:noFill/>
         </p:spPr>
         <p:txBody>
-          <a:bodyPr wrap="square" lIns="18288" rIns="18288" tIns="18288" bIns="18288" anchor="ctr">
+          <a:bodyPr wrap="square" lIns="18288" rIns="18288" tIns="18288" bIns="18288" anchor="t">
             <a:spAutoFit/>
           </a:bodyPr>
           <a:lstStyle/>
@@ -6317,7 +6732,89 @@
               </a:lnSpc>
             </a:pPr>
             <a:r>
-              <a:rPr sz="2000" b="0">
+              <a:rPr sz="1500" b="1">
+                <a:solidFill>
+                  <a:srgbClr val="62736A"/>
+                </a:solidFill>
+                <a:latin typeface="Apple SD Gothic Neo"/>
+                <a:ea typeface="Apple SD Gothic Neo"/>
+                <a:cs typeface="Apple SD Gothic Neo"/>
+              </a:rPr>
+              <a:t>안전장치</a:t>
+            </a:r>
+          </a:p>
+        </p:txBody>
+      </p:sp>
+      <p:sp>
+        <p:nvSpPr>
+          <p:cNvPr id="23" name="TextBox 22"/>
+          <p:cNvSpPr txBox="1"/>
+          <p:nvPr/>
+        </p:nvSpPr>
+        <p:spPr>
+          <a:xfrm>
+            <a:off x="8238744" y="3886200"/>
+            <a:ext cx="2971800" cy="457200"/>
+          </a:xfrm>
+          <a:prstGeom prst="rect">
+            <a:avLst/>
+          </a:prstGeom>
+          <a:noFill/>
+        </p:spPr>
+        <p:txBody>
+          <a:bodyPr wrap="square" lIns="18288" rIns="18288" tIns="18288" bIns="18288" anchor="t">
+            <a:spAutoFit/>
+          </a:bodyPr>
+          <a:lstStyle/>
+          <a:p>
+            <a:pPr algn="l">
+              <a:lnSpc>
+                <a:spcPct val="115000"/>
+              </a:lnSpc>
+            </a:pPr>
+            <a:r>
+              <a:rPr sz="2100" b="1">
+                <a:solidFill>
+                  <a:srgbClr val="76B900"/>
+                </a:solidFill>
+                <a:latin typeface="Apple SD Gothic Neo"/>
+                <a:ea typeface="Apple SD Gothic Neo"/>
+                <a:cs typeface="Apple SD Gothic Neo"/>
+              </a:rPr>
+              <a:t>OpenShell</a:t>
+            </a:r>
+          </a:p>
+        </p:txBody>
+      </p:sp>
+      <p:sp>
+        <p:nvSpPr>
+          <p:cNvPr id="24" name="TextBox 23"/>
+          <p:cNvSpPr txBox="1"/>
+          <p:nvPr/>
+        </p:nvSpPr>
+        <p:spPr>
+          <a:xfrm>
+            <a:off x="8238744" y="4343400"/>
+            <a:ext cx="2971800" cy="548640"/>
+          </a:xfrm>
+          <a:prstGeom prst="rect">
+            <a:avLst/>
+          </a:prstGeom>
+          <a:noFill/>
+        </p:spPr>
+        <p:txBody>
+          <a:bodyPr wrap="square" lIns="18288" rIns="18288" tIns="18288" bIns="18288" anchor="t">
+            <a:spAutoFit/>
+          </a:bodyPr>
+          <a:lstStyle/>
+          <a:p>
+            <a:pPr algn="l">
+              <a:lnSpc>
+                <a:spcPct val="115000"/>
+              </a:lnSpc>
+            </a:pPr>
+            <a:r>
+              <a:rPr sz="1500" b="0">
                 <a:solidFill>
                   <a:srgbClr val="172B27"/>
                 </a:solidFill>
@@ -6325,10 +6822,112 @@
                 <a:ea typeface="Apple SD Gothic Neo"/>
                 <a:cs typeface="Apple SD Gothic Neo"/>
               </a:rPr>
-              <a:t>격차는 판단력이 아니라 </a:t>
-            </a:r>
-            <a:r>
-              <a:rPr sz="2000" b="1">
+              <a:t>허용 파일 읽기만 통과 · 나머지 차단</a:t>
+            </a:r>
+          </a:p>
+        </p:txBody>
+      </p:sp>
+      <p:sp>
+        <p:nvSpPr>
+          <p:cNvPr id="25" name="Rounded Rectangle 24"/>
+          <p:cNvSpPr/>
+          <p:nvPr/>
+        </p:nvSpPr>
+        <p:spPr>
+          <a:xfrm>
+            <a:off x="8238744" y="4910328"/>
+            <a:ext cx="2971800" cy="384048"/>
+          </a:xfrm>
+          <a:prstGeom prst="roundRect">
+            <a:avLst>
+              <a:gd name="adj" fmla="val 12000"/>
+            </a:avLst>
+          </a:prstGeom>
+          <a:solidFill>
+            <a:srgbClr val="F1EEE6"/>
+          </a:solidFill>
+          <a:ln>
+            <a:noFill/>
+          </a:ln>
+          <a:effectLst/>
+        </p:spPr>
+        <p:style>
+          <a:lnRef idx="1">
+            <a:schemeClr val="accent1"/>
+          </a:lnRef>
+          <a:fillRef idx="3">
+            <a:schemeClr val="accent1"/>
+          </a:fillRef>
+          <a:effectRef idx="2">
+            <a:schemeClr val="accent1"/>
+          </a:effectRef>
+          <a:fontRef idx="minor">
+            <a:schemeClr val="lt1"/>
+          </a:fontRef>
+        </p:style>
+        <p:txBody>
+          <a:bodyPr rtlCol="0" anchor="ctr" wrap="square"/>
+          <a:lstStyle/>
+          <a:p>
+            <a:pPr algn="ctr">
+              <a:lnSpc>
+                <a:spcPct val="115000"/>
+              </a:lnSpc>
+            </a:pPr>
+            <a:r>
+              <a:rPr sz="1300" b="0">
+                <a:solidFill>
+                  <a:srgbClr val="172B27"/>
+                </a:solidFill>
+                <a:latin typeface="Apple SD Gothic Neo"/>
+                <a:ea typeface="Apple SD Gothic Neo"/>
+                <a:cs typeface="Apple SD Gothic Neo"/>
+              </a:rPr>
+              <a:t>공개 시험 데이터로만 확인</a:t>
+            </a:r>
+          </a:p>
+        </p:txBody>
+      </p:sp>
+      <p:sp>
+        <p:nvSpPr>
+          <p:cNvPr id="26" name="TextBox 25"/>
+          <p:cNvSpPr txBox="1"/>
+          <p:nvPr/>
+        </p:nvSpPr>
+        <p:spPr>
+          <a:xfrm>
+            <a:off x="731520" y="5669280"/>
+            <a:ext cx="10698480" cy="548640"/>
+          </a:xfrm>
+          <a:prstGeom prst="rect">
+            <a:avLst/>
+          </a:prstGeom>
+          <a:noFill/>
+        </p:spPr>
+        <p:txBody>
+          <a:bodyPr wrap="square" lIns="18288" rIns="18288" tIns="18288" bIns="18288" anchor="t">
+            <a:spAutoFit/>
+          </a:bodyPr>
+          <a:lstStyle/>
+          <a:p>
+            <a:pPr algn="l">
+              <a:lnSpc>
+                <a:spcPct val="115000"/>
+              </a:lnSpc>
+            </a:pPr>
+            <a:r>
+              <a:rPr sz="1900" b="0">
+                <a:solidFill>
+                  <a:srgbClr val="172B27"/>
+                </a:solidFill>
+                <a:latin typeface="Apple SD Gothic Neo"/>
+                <a:ea typeface="Apple SD Gothic Neo"/>
+                <a:cs typeface="Apple SD Gothic Neo"/>
+              </a:rPr>
+              <a:t>실행 환경 생태계가 갖춰져 있어 </a:t>
+            </a:r>
+            <a:r>
+              <a:rPr sz="1900" b="1">
                 <a:solidFill>
                   <a:srgbClr val="244E41"/>
                 </a:solidFill>
@@ -6336,25 +6935,14 @@
                 <a:ea typeface="Apple SD Gothic Neo"/>
                 <a:cs typeface="Apple SD Gothic Neo"/>
               </a:rPr>
-              <a:t>실행 안정성</a:t>
-            </a:r>
-            <a:r>
-              <a:rPr sz="1600" b="0">
-                <a:solidFill>
-                  <a:srgbClr val="62736A"/>
-                </a:solidFill>
-                <a:latin typeface="Apple SD Gothic Neo"/>
-                <a:ea typeface="Apple SD Gothic Neo"/>
-                <a:cs typeface="Apple SD Gothic Neo"/>
-              </a:rPr>
-              <a:t>  →  현장 배포 + 도구 보완으로 오프라인에서 해결 예정</a:t>
-            </a:r>
-          </a:p>
-        </p:txBody>
-      </p:sp>
-      <p:sp>
-        <p:nvSpPr>
-          <p:cNvPr id="8" name="TextBox 7"/>
+              <a:t>로컬·보안 환경용 에이전트를 빠르게 구성</a:t>
+            </a:r>
+          </a:p>
+        </p:txBody>
+      </p:sp>
+      <p:sp>
+        <p:nvSpPr>
+          <p:cNvPr id="27" name="TextBox 26"/>
           <p:cNvSpPr txBox="1"/>
           <p:nvPr/>
         </p:nvSpPr>
@@ -6427,6 +7015,491 @@
         </p:nvSpPr>
         <p:spPr>
           <a:xfrm>
+            <a:off x="731520" y="457200"/>
+            <a:ext cx="10515600" cy="365760"/>
+          </a:xfrm>
+          <a:prstGeom prst="rect">
+            <a:avLst/>
+          </a:prstGeom>
+          <a:noFill/>
+        </p:spPr>
+        <p:txBody>
+          <a:bodyPr wrap="square" lIns="18288" rIns="18288" tIns="18288" bIns="18288" anchor="t">
+            <a:spAutoFit/>
+          </a:bodyPr>
+          <a:lstStyle/>
+          <a:p>
+            <a:pPr algn="l">
+              <a:lnSpc>
+                <a:spcPct val="115000"/>
+              </a:lnSpc>
+            </a:pPr>
+            <a:r>
+              <a:rPr sz="1600" b="1">
+                <a:solidFill>
+                  <a:srgbClr val="D06B3D"/>
+                </a:solidFill>
+                <a:latin typeface="Apple SD Gothic Neo"/>
+                <a:ea typeface="Apple SD Gothic Neo"/>
+                <a:cs typeface="Apple SD Gothic Neo"/>
+              </a:rPr>
+              <a:t>PreDist 사건 32건 · 같은 자료 · 같은 출력 형식 · 사건당 1회</a:t>
+            </a:r>
+          </a:p>
+        </p:txBody>
+      </p:sp>
+      <p:sp>
+        <p:nvSpPr>
+          <p:cNvPr id="3" name="TextBox 2"/>
+          <p:cNvSpPr txBox="1"/>
+          <p:nvPr/>
+        </p:nvSpPr>
+        <p:spPr>
+          <a:xfrm>
+            <a:off x="731520" y="777240"/>
+            <a:ext cx="10789920" cy="822960"/>
+          </a:xfrm>
+          <a:prstGeom prst="rect">
+            <a:avLst/>
+          </a:prstGeom>
+          <a:noFill/>
+        </p:spPr>
+        <p:txBody>
+          <a:bodyPr wrap="square" lIns="18288" rIns="18288" tIns="18288" bIns="18288" anchor="t">
+            <a:spAutoFit/>
+          </a:bodyPr>
+          <a:lstStyle/>
+          <a:p>
+            <a:pPr algn="l">
+              <a:lnSpc>
+                <a:spcPct val="115000"/>
+              </a:lnSpc>
+            </a:pPr>
+            <a:r>
+              <a:rPr sz="3600" b="1">
+                <a:solidFill>
+                  <a:srgbClr val="172B27"/>
+                </a:solidFill>
+                <a:latin typeface="Apple SD Gothic Neo"/>
+                <a:ea typeface="Apple SD Gothic Neo"/>
+                <a:cs typeface="Apple SD Gothic Neo"/>
+              </a:rPr>
+              <a:t>평가 결과: 판단의 질은 상한선에 가깝다</a:t>
+            </a:r>
+          </a:p>
+        </p:txBody>
+      </p:sp>
+      <p:pic>
+        <p:nvPicPr>
+          <p:cNvPr id="4" name="Picture 3" descr="eval-cycle5.png"/>
+          <p:cNvPicPr>
+            <a:picLocks noChangeAspect="1"/>
+          </p:cNvPicPr>
+          <p:nvPr/>
+        </p:nvPicPr>
+        <p:blipFill>
+          <a:blip r:embed="rId3"/>
+          <a:stretch>
+            <a:fillRect/>
+          </a:stretch>
+        </p:blipFill>
+        <p:spPr>
+          <a:xfrm>
+            <a:off x="548640" y="1783080"/>
+            <a:ext cx="6675120" cy="3319558"/>
+          </a:xfrm>
+          <a:prstGeom prst="rect">
+            <a:avLst/>
+          </a:prstGeom>
+        </p:spPr>
+      </p:pic>
+      <p:sp>
+        <p:nvSpPr>
+          <p:cNvPr id="5" name="TextBox 4"/>
+          <p:cNvSpPr txBox="1"/>
+          <p:nvPr/>
+        </p:nvSpPr>
+        <p:spPr>
+          <a:xfrm>
+            <a:off x="7498079" y="1783080"/>
+            <a:ext cx="4206240" cy="3566160"/>
+          </a:xfrm>
+          <a:prstGeom prst="rect">
+            <a:avLst/>
+          </a:prstGeom>
+          <a:noFill/>
+        </p:spPr>
+        <p:txBody>
+          <a:bodyPr wrap="square" lIns="18288" rIns="18288" tIns="18288" bIns="18288" anchor="t">
+            <a:spAutoFit/>
+          </a:bodyPr>
+          <a:lstStyle/>
+          <a:p>
+            <a:pPr algn="l">
+              <a:lnSpc>
+                <a:spcPct val="115000"/>
+              </a:lnSpc>
+            </a:pPr>
+            <a:r>
+              <a:rPr sz="1900" b="1">
+                <a:solidFill>
+                  <a:srgbClr val="62736A"/>
+                </a:solidFill>
+                <a:latin typeface="Apple SD Gothic Neo"/>
+                <a:ea typeface="Apple SD Gothic Neo"/>
+                <a:cs typeface="Apple SD Gothic Neo"/>
+              </a:rPr>
+              <a:t>Sonnet 5 = 클라우드 상한선</a:t>
+            </a:r>
+          </a:p>
+          <a:p>
+            <a:pPr algn="l">
+              <a:lnSpc>
+                <a:spcPct val="115000"/>
+              </a:lnSpc>
+            </a:pPr>
+            <a:r>
+              <a:rPr sz="1500" b="0">
+                <a:solidFill>
+                  <a:srgbClr val="62736A"/>
+                </a:solidFill>
+                <a:latin typeface="Apple SD Gothic Neo"/>
+                <a:ea typeface="Apple SD Gothic Neo"/>
+                <a:cs typeface="Apple SD Gothic Neo"/>
+              </a:rPr>
+              <a:t>보안상 현장 사용 불가 · 32/32</a:t>
+            </a:r>
+          </a:p>
+          <a:p>
+            <a:pPr algn="l">
+              <a:lnSpc>
+                <a:spcPct val="115000"/>
+              </a:lnSpc>
+            </a:pPr>
+            <a:r>
+              <a:rPr sz="800" b="0">
+                <a:solidFill>
+                  <a:srgbClr val="172B27"/>
+                </a:solidFill>
+                <a:latin typeface="Apple SD Gothic Neo"/>
+                <a:ea typeface="Apple SD Gothic Neo"/>
+                <a:cs typeface="Apple SD Gothic Neo"/>
+              </a:rPr>
+              <a:t/>
+            </a:r>
+          </a:p>
+          <a:p>
+            <a:pPr algn="l">
+              <a:lnSpc>
+                <a:spcPct val="115000"/>
+              </a:lnSpc>
+            </a:pPr>
+            <a:r>
+              <a:rPr sz="1900" b="1">
+                <a:solidFill>
+                  <a:srgbClr val="76B900"/>
+                </a:solidFill>
+                <a:latin typeface="Apple SD Gothic Neo"/>
+                <a:ea typeface="Apple SD Gothic Neo"/>
+                <a:cs typeface="Apple SD Gothic Neo"/>
+              </a:rPr>
+              <a:t>Ultra가 쓴 점검안 15개</a:t>
+            </a:r>
+          </a:p>
+          <a:p>
+            <a:pPr algn="l">
+              <a:lnSpc>
+                <a:spcPct val="115000"/>
+              </a:lnSpc>
+            </a:pPr>
+            <a:r>
+              <a:rPr sz="1500" b="0">
+                <a:solidFill>
+                  <a:srgbClr val="172B27"/>
+                </a:solidFill>
+                <a:latin typeface="Apple SD Gothic Neo"/>
+                <a:ea typeface="Apple SD Gothic Neo"/>
+                <a:cs typeface="Apple SD Gothic Neo"/>
+              </a:rPr>
+              <a:t>근거 조작 0건 · 모두 검사 통과</a:t>
+            </a:r>
+          </a:p>
+          <a:p>
+            <a:pPr algn="l">
+              <a:lnSpc>
+                <a:spcPct val="115000"/>
+              </a:lnSpc>
+            </a:pPr>
+            <a:r>
+              <a:rPr sz="800" b="0">
+                <a:solidFill>
+                  <a:srgbClr val="172B27"/>
+                </a:solidFill>
+                <a:latin typeface="Apple SD Gothic Neo"/>
+                <a:ea typeface="Apple SD Gothic Neo"/>
+                <a:cs typeface="Apple SD Gothic Neo"/>
+              </a:rPr>
+              <a:t/>
+            </a:r>
+          </a:p>
+          <a:p>
+            <a:pPr algn="l">
+              <a:lnSpc>
+                <a:spcPct val="115000"/>
+              </a:lnSpc>
+            </a:pPr>
+            <a:r>
+              <a:rPr sz="1900" b="1">
+                <a:solidFill>
+                  <a:srgbClr val="D06B3D"/>
+                </a:solidFill>
+                <a:latin typeface="Apple SD Gothic Neo"/>
+                <a:ea typeface="Apple SD Gothic Neo"/>
+                <a:cs typeface="Apple SD Gothic Neo"/>
+              </a:rPr>
+              <a:t>놓친 17건의 이유</a:t>
+            </a:r>
+          </a:p>
+          <a:p>
+            <a:pPr algn="l">
+              <a:lnSpc>
+                <a:spcPct val="115000"/>
+              </a:lnSpc>
+            </a:pPr>
+            <a:r>
+              <a:rPr sz="1500" b="0">
+                <a:solidFill>
+                  <a:srgbClr val="172B27"/>
+                </a:solidFill>
+                <a:latin typeface="Apple SD Gothic Neo"/>
+                <a:ea typeface="Apple SD Gothic Neo"/>
+                <a:cs typeface="Apple SD Gothic Neo"/>
+              </a:rPr>
+              <a:t>API 오류 13 · 도구 실수 4 (한 가지)</a:t>
+            </a:r>
+          </a:p>
+          <a:p>
+            <a:pPr algn="l">
+              <a:lnSpc>
+                <a:spcPct val="115000"/>
+              </a:lnSpc>
+            </a:pPr>
+            <a:r>
+              <a:rPr sz="800" b="0">
+                <a:solidFill>
+                  <a:srgbClr val="172B27"/>
+                </a:solidFill>
+                <a:latin typeface="Apple SD Gothic Neo"/>
+                <a:ea typeface="Apple SD Gothic Neo"/>
+                <a:cs typeface="Apple SD Gothic Neo"/>
+              </a:rPr>
+              <a:t/>
+            </a:r>
+          </a:p>
+          <a:p>
+            <a:pPr algn="l">
+              <a:lnSpc>
+                <a:spcPct val="115000"/>
+              </a:lnSpc>
+            </a:pPr>
+            <a:r>
+              <a:rPr sz="1900" b="1">
+                <a:solidFill>
+                  <a:srgbClr val="172B27"/>
+                </a:solidFill>
+                <a:latin typeface="Apple SD Gothic Neo"/>
+                <a:ea typeface="Apple SD Gothic Neo"/>
+                <a:cs typeface="Apple SD Gothic Neo"/>
+              </a:rPr>
+              <a:t>내용 점수 41 : 42 / 48 (2건)</a:t>
+            </a:r>
+          </a:p>
+        </p:txBody>
+      </p:sp>
+      <p:sp>
+        <p:nvSpPr>
+          <p:cNvPr id="6" name="Rounded Rectangle 5"/>
+          <p:cNvSpPr/>
+          <p:nvPr/>
+        </p:nvSpPr>
+        <p:spPr>
+          <a:xfrm>
+            <a:off x="731520" y="5486400"/>
+            <a:ext cx="10698480" cy="640080"/>
+          </a:xfrm>
+          <a:prstGeom prst="roundRect">
+            <a:avLst>
+              <a:gd name="adj" fmla="val 12000"/>
+            </a:avLst>
+          </a:prstGeom>
+          <a:solidFill>
+            <a:srgbClr val="F1EEE6"/>
+          </a:solidFill>
+          <a:ln>
+            <a:noFill/>
+          </a:ln>
+          <a:effectLst/>
+        </p:spPr>
+        <p:style>
+          <a:lnRef idx="1">
+            <a:schemeClr val="accent1"/>
+          </a:lnRef>
+          <a:fillRef idx="3">
+            <a:schemeClr val="accent1"/>
+          </a:fillRef>
+          <a:effectRef idx="2">
+            <a:schemeClr val="accent1"/>
+          </a:effectRef>
+          <a:fontRef idx="minor">
+            <a:schemeClr val="lt1"/>
+          </a:fontRef>
+        </p:style>
+        <p:txBody>
+          <a:bodyPr rtlCol="0" anchor="ctr" wrap="square"/>
+          <a:lstStyle/>
+          <a:p>
+            <a:pPr algn="ctr"/>
+          </a:p>
+        </p:txBody>
+      </p:sp>
+      <p:sp>
+        <p:nvSpPr>
+          <p:cNvPr id="7" name="TextBox 6"/>
+          <p:cNvSpPr txBox="1"/>
+          <p:nvPr/>
+        </p:nvSpPr>
+        <p:spPr>
+          <a:xfrm>
+            <a:off x="1005840" y="5486400"/>
+            <a:ext cx="10241280" cy="640080"/>
+          </a:xfrm>
+          <a:prstGeom prst="rect">
+            <a:avLst/>
+          </a:prstGeom>
+          <a:noFill/>
+        </p:spPr>
+        <p:txBody>
+          <a:bodyPr wrap="square" lIns="18288" rIns="18288" tIns="18288" bIns="18288" anchor="ctr">
+            <a:spAutoFit/>
+          </a:bodyPr>
+          <a:lstStyle/>
+          <a:p>
+            <a:pPr algn="l">
+              <a:lnSpc>
+                <a:spcPct val="115000"/>
+              </a:lnSpc>
+            </a:pPr>
+            <a:r>
+              <a:rPr sz="2000" b="0">
+                <a:solidFill>
+                  <a:srgbClr val="172B27"/>
+                </a:solidFill>
+                <a:latin typeface="Apple SD Gothic Neo"/>
+                <a:ea typeface="Apple SD Gothic Neo"/>
+                <a:cs typeface="Apple SD Gothic Neo"/>
+              </a:rPr>
+              <a:t>격차는 판단력이 아니라 </a:t>
+            </a:r>
+            <a:r>
+              <a:rPr sz="2000" b="1">
+                <a:solidFill>
+                  <a:srgbClr val="244E41"/>
+                </a:solidFill>
+                <a:latin typeface="Apple SD Gothic Neo"/>
+                <a:ea typeface="Apple SD Gothic Neo"/>
+                <a:cs typeface="Apple SD Gothic Neo"/>
+              </a:rPr>
+              <a:t>실행 안정성</a:t>
+            </a:r>
+            <a:r>
+              <a:rPr sz="1600" b="0">
+                <a:solidFill>
+                  <a:srgbClr val="62736A"/>
+                </a:solidFill>
+                <a:latin typeface="Apple SD Gothic Neo"/>
+                <a:ea typeface="Apple SD Gothic Neo"/>
+                <a:cs typeface="Apple SD Gothic Neo"/>
+              </a:rPr>
+              <a:t>  →  현장 배포 + 도구 보완으로 오프라인에서 해결 예정</a:t>
+            </a:r>
+          </a:p>
+        </p:txBody>
+      </p:sp>
+      <p:sp>
+        <p:nvSpPr>
+          <p:cNvPr id="8" name="TextBox 7"/>
+          <p:cNvSpPr txBox="1"/>
+          <p:nvPr/>
+        </p:nvSpPr>
+        <p:spPr>
+          <a:xfrm>
+            <a:off x="11155680" y="6355080"/>
+            <a:ext cx="731520" cy="274320"/>
+          </a:xfrm>
+          <a:prstGeom prst="rect">
+            <a:avLst/>
+          </a:prstGeom>
+          <a:noFill/>
+        </p:spPr>
+        <p:txBody>
+          <a:bodyPr wrap="square" lIns="18288" rIns="18288" tIns="18288" bIns="18288" anchor="t">
+            <a:spAutoFit/>
+          </a:bodyPr>
+          <a:lstStyle/>
+          <a:p>
+            <a:pPr algn="r">
+              <a:lnSpc>
+                <a:spcPct val="115000"/>
+              </a:lnSpc>
+            </a:pPr>
+            <a:r>
+              <a:rPr sz="1200" b="0">
+                <a:solidFill>
+                  <a:srgbClr val="62736A"/>
+                </a:solidFill>
+                <a:latin typeface="Apple SD Gothic Neo"/>
+                <a:ea typeface="Apple SD Gothic Neo"/>
+                <a:cs typeface="Apple SD Gothic Neo"/>
+              </a:rPr>
+              <a:t>12</a:t>
+            </a:r>
+          </a:p>
+        </p:txBody>
+      </p:sp>
+    </p:spTree>
+  </p:cSld>
+  <p:clrMapOvr>
+    <a:masterClrMapping/>
+  </p:clrMapOvr>
+</p:sld>
+</file>
+
+<file path=ppt/slides/slide13.xml><?xml version="1.0" encoding="utf-8"?>
+<p:sld xmlns:a="http://schemas.openxmlformats.org/drawingml/2006/main" xmlns:p="http://schemas.openxmlformats.org/presentationml/2006/main" xmlns:r="http://schemas.openxmlformats.org/officeDocument/2006/relationships">
+  <p:cSld>
+    <p:bg>
+      <p:bgPr>
+        <a:solidFill>
+          <a:srgbClr val="FBF9F4"/>
+        </a:solidFill>
+        <a:effectLst/>
+      </p:bgPr>
+    </p:bg>
+    <p:spTree>
+      <p:nvGrpSpPr>
+        <p:cNvPr id="1" name=""/>
+        <p:cNvGrpSpPr/>
+        <p:nvPr/>
+      </p:nvGrpSpPr>
+      <p:grpSpPr/>
+      <p:sp>
+        <p:nvSpPr>
+          <p:cNvPr id="2" name="TextBox 1"/>
+          <p:cNvSpPr txBox="1"/>
+          <p:nvPr/>
+        </p:nvSpPr>
+        <p:spPr>
+          <a:xfrm>
             <a:off x="731520" y="777240"/>
             <a:ext cx="10789920" cy="822960"/>
           </a:xfrm>
@@ -7116,7 +8189,7 @@
                 <a:ea typeface="Apple SD Gothic Neo"/>
                 <a:cs typeface="Apple SD Gothic Neo"/>
               </a:rPr>
-              <a:t>12</a:t>
+              <a:t>13</a:t>
             </a:r>
           </a:p>
         </p:txBody>
@@ -10194,8 +11267,8 @@
         </p:nvSpPr>
         <p:spPr>
           <a:xfrm>
-            <a:off x="731520" y="457200"/>
-            <a:ext cx="10515600" cy="365760"/>
+            <a:off x="731520" y="777240"/>
+            <a:ext cx="10789920" cy="822960"/>
           </a:xfrm>
           <a:prstGeom prst="rect">
             <a:avLst/>
@@ -10214,957 +11287,46 @@
               </a:lnSpc>
             </a:pPr>
             <a:r>
-              <a:rPr sz="1600" b="1">
-                <a:solidFill>
-                  <a:srgbClr val="D06B3D"/>
-                </a:solidFill>
-                <a:latin typeface="Apple SD Gothic Neo"/>
-                <a:ea typeface="Apple SD Gothic Neo"/>
-                <a:cs typeface="Apple SD Gothic Neo"/>
-              </a:rPr>
-              <a:t>설계 부하 · 계산값</a:t>
-            </a:r>
-          </a:p>
-        </p:txBody>
-      </p:sp>
-      <p:sp>
-        <p:nvSpPr>
-          <p:cNvPr id="3" name="TextBox 2"/>
-          <p:cNvSpPr txBox="1"/>
-          <p:nvPr/>
-        </p:nvSpPr>
-        <p:spPr>
-          <a:xfrm>
-            <a:off x="731520" y="777240"/>
-            <a:ext cx="10789920" cy="822960"/>
+              <a:rPr sz="3600" b="1">
+                <a:solidFill>
+                  <a:srgbClr val="172B27"/>
+                </a:solidFill>
+                <a:latin typeface="Apple SD Gothic Neo"/>
+                <a:ea typeface="Apple SD Gothic Neo"/>
+                <a:cs typeface="Apple SD Gothic Neo"/>
+              </a:rPr>
+              <a:t>전체 구조</a:t>
+            </a:r>
+          </a:p>
+        </p:txBody>
+      </p:sp>
+      <p:pic>
+        <p:nvPicPr>
+          <p:cNvPr id="3" name="Picture 2" descr="architecture.png"/>
+          <p:cNvPicPr>
+            <a:picLocks noChangeAspect="1"/>
+          </p:cNvPicPr>
+          <p:nvPr/>
+        </p:nvPicPr>
+        <p:blipFill>
+          <a:blip r:embed="rId3"/>
+          <a:stretch>
+            <a:fillRect/>
+          </a:stretch>
+        </p:blipFill>
+        <p:spPr>
+          <a:xfrm>
+            <a:off x="1737360" y="1554480"/>
+            <a:ext cx="8696960" cy="4892040"/>
           </a:xfrm>
           <a:prstGeom prst="rect">
             <a:avLst/>
           </a:prstGeom>
-          <a:noFill/>
-        </p:spPr>
-        <p:txBody>
-          <a:bodyPr wrap="square" lIns="18288" rIns="18288" tIns="18288" bIns="18288" anchor="t">
-            <a:spAutoFit/>
-          </a:bodyPr>
-          <a:lstStyle/>
-          <a:p>
-            <a:pPr algn="l">
-              <a:lnSpc>
-                <a:spcPct val="115000"/>
-              </a:lnSpc>
-            </a:pPr>
-            <a:r>
-              <a:rPr sz="3600" b="1">
-                <a:solidFill>
-                  <a:srgbClr val="172B27"/>
-                </a:solidFill>
-                <a:latin typeface="Apple SD Gothic Neo"/>
-                <a:ea typeface="Apple SD Gothic Neo"/>
-                <a:cs typeface="Apple SD Gothic Neo"/>
-              </a:rPr>
-              <a:t>System 1이 감당할 양</a:t>
-            </a:r>
-          </a:p>
-        </p:txBody>
-      </p:sp>
-      <p:sp>
-        <p:nvSpPr>
-          <p:cNvPr id="4" name="Rounded Rectangle 3"/>
-          <p:cNvSpPr/>
-          <p:nvPr/>
-        </p:nvSpPr>
-        <p:spPr>
-          <a:xfrm>
-            <a:off x="731520" y="1783080"/>
-            <a:ext cx="2514600" cy="1463040"/>
-          </a:xfrm>
-          <a:prstGeom prst="roundRect">
-            <a:avLst>
-              <a:gd name="adj" fmla="val 12000"/>
-            </a:avLst>
-          </a:prstGeom>
-          <a:solidFill>
-            <a:srgbClr val="FFFFFF"/>
-          </a:solidFill>
-          <a:ln w="15875">
-            <a:solidFill>
-              <a:srgbClr val="BFC8BF"/>
-            </a:solidFill>
-          </a:ln>
-          <a:effectLst/>
-        </p:spPr>
-        <p:style>
-          <a:lnRef idx="1">
-            <a:schemeClr val="accent1"/>
-          </a:lnRef>
-          <a:fillRef idx="3">
-            <a:schemeClr val="accent1"/>
-          </a:fillRef>
-          <a:effectRef idx="2">
-            <a:schemeClr val="accent1"/>
-          </a:effectRef>
-          <a:fontRef idx="minor">
-            <a:schemeClr val="lt1"/>
-          </a:fontRef>
-        </p:style>
-        <p:txBody>
-          <a:bodyPr rtlCol="0" anchor="ctr" wrap="square"/>
-          <a:lstStyle/>
-          <a:p>
-            <a:pPr algn="ctr"/>
-          </a:p>
-        </p:txBody>
-      </p:sp>
-      <p:sp>
-        <p:nvSpPr>
-          <p:cNvPr id="5" name="TextBox 4"/>
-          <p:cNvSpPr txBox="1"/>
-          <p:nvPr/>
-        </p:nvSpPr>
-        <p:spPr>
-          <a:xfrm>
-            <a:off x="914400" y="1920240"/>
-            <a:ext cx="2148840" cy="685800"/>
-          </a:xfrm>
-          <a:prstGeom prst="rect">
-            <a:avLst/>
-          </a:prstGeom>
-          <a:noFill/>
-        </p:spPr>
-        <p:txBody>
-          <a:bodyPr wrap="square" lIns="18288" rIns="18288" tIns="18288" bIns="18288" anchor="t">
-            <a:spAutoFit/>
-          </a:bodyPr>
-          <a:lstStyle/>
-          <a:p>
-            <a:pPr algn="ctr">
-              <a:lnSpc>
-                <a:spcPct val="115000"/>
-              </a:lnSpc>
-            </a:pPr>
-            <a:r>
-              <a:rPr sz="3000" b="1">
-                <a:solidFill>
-                  <a:srgbClr val="244E41"/>
-                </a:solidFill>
-                <a:latin typeface="Apple SD Gothic Neo"/>
-                <a:ea typeface="Apple SD Gothic Neo"/>
-                <a:cs typeface="Apple SD Gothic Neo"/>
-              </a:rPr>
-              <a:t>50,000</a:t>
-            </a:r>
-          </a:p>
-        </p:txBody>
-      </p:sp>
-      <p:sp>
-        <p:nvSpPr>
-          <p:cNvPr id="6" name="TextBox 5"/>
-          <p:cNvSpPr txBox="1"/>
-          <p:nvPr/>
-        </p:nvSpPr>
-        <p:spPr>
-          <a:xfrm>
-            <a:off x="914400" y="2651760"/>
-            <a:ext cx="2148840" cy="457200"/>
-          </a:xfrm>
-          <a:prstGeom prst="rect">
-            <a:avLst/>
-          </a:prstGeom>
-          <a:noFill/>
-        </p:spPr>
-        <p:txBody>
-          <a:bodyPr wrap="square" lIns="18288" rIns="18288" tIns="18288" bIns="18288" anchor="t">
-            <a:spAutoFit/>
-          </a:bodyPr>
-          <a:lstStyle/>
-          <a:p>
-            <a:pPr algn="ctr">
-              <a:lnSpc>
-                <a:spcPct val="115000"/>
-              </a:lnSpc>
-            </a:pPr>
-            <a:r>
-              <a:rPr sz="1500" b="0">
-                <a:solidFill>
-                  <a:srgbClr val="62736A"/>
-                </a:solidFill>
-                <a:latin typeface="Apple SD Gothic Neo"/>
-                <a:ea typeface="Apple SD Gothic Neo"/>
-                <a:cs typeface="Apple SD Gothic Neo"/>
-              </a:rPr>
-              <a:t>신호</a:t>
-            </a:r>
-          </a:p>
-        </p:txBody>
-      </p:sp>
-      <p:sp>
-        <p:nvSpPr>
-          <p:cNvPr id="7" name="Rounded Rectangle 6"/>
-          <p:cNvSpPr/>
-          <p:nvPr/>
-        </p:nvSpPr>
-        <p:spPr>
-          <a:xfrm>
-            <a:off x="3447288" y="1783080"/>
-            <a:ext cx="2514600" cy="1463040"/>
-          </a:xfrm>
-          <a:prstGeom prst="roundRect">
-            <a:avLst>
-              <a:gd name="adj" fmla="val 12000"/>
-            </a:avLst>
-          </a:prstGeom>
-          <a:solidFill>
-            <a:srgbClr val="FFFFFF"/>
-          </a:solidFill>
-          <a:ln w="15875">
-            <a:solidFill>
-              <a:srgbClr val="BFC8BF"/>
-            </a:solidFill>
-          </a:ln>
-          <a:effectLst/>
-        </p:spPr>
-        <p:style>
-          <a:lnRef idx="1">
-            <a:schemeClr val="accent1"/>
-          </a:lnRef>
-          <a:fillRef idx="3">
-            <a:schemeClr val="accent1"/>
-          </a:fillRef>
-          <a:effectRef idx="2">
-            <a:schemeClr val="accent1"/>
-          </a:effectRef>
-          <a:fontRef idx="minor">
-            <a:schemeClr val="lt1"/>
-          </a:fontRef>
-        </p:style>
-        <p:txBody>
-          <a:bodyPr rtlCol="0" anchor="ctr" wrap="square"/>
-          <a:lstStyle/>
-          <a:p>
-            <a:pPr algn="ctr"/>
-          </a:p>
-        </p:txBody>
-      </p:sp>
-      <p:sp>
-        <p:nvSpPr>
-          <p:cNvPr id="8" name="TextBox 7"/>
-          <p:cNvSpPr txBox="1"/>
-          <p:nvPr/>
-        </p:nvSpPr>
-        <p:spPr>
-          <a:xfrm>
-            <a:off x="3630168" y="1920240"/>
-            <a:ext cx="2148840" cy="685800"/>
-          </a:xfrm>
-          <a:prstGeom prst="rect">
-            <a:avLst/>
-          </a:prstGeom>
-          <a:noFill/>
-        </p:spPr>
-        <p:txBody>
-          <a:bodyPr wrap="square" lIns="18288" rIns="18288" tIns="18288" bIns="18288" anchor="t">
-            <a:spAutoFit/>
-          </a:bodyPr>
-          <a:lstStyle/>
-          <a:p>
-            <a:pPr algn="ctr">
-              <a:lnSpc>
-                <a:spcPct val="115000"/>
-              </a:lnSpc>
-            </a:pPr>
-            <a:r>
-              <a:rPr sz="3000" b="1">
-                <a:solidFill>
-                  <a:srgbClr val="244E41"/>
-                </a:solidFill>
-                <a:latin typeface="Apple SD Gothic Neo"/>
-                <a:ea typeface="Apple SD Gothic Neo"/>
-                <a:cs typeface="Apple SD Gothic Neo"/>
-              </a:rPr>
-              <a:t>100 ms</a:t>
-            </a:r>
-          </a:p>
-        </p:txBody>
-      </p:sp>
-      <p:sp>
-        <p:nvSpPr>
-          <p:cNvPr id="9" name="TextBox 8"/>
-          <p:cNvSpPr txBox="1"/>
-          <p:nvPr/>
-        </p:nvSpPr>
-        <p:spPr>
-          <a:xfrm>
-            <a:off x="3630168" y="2651760"/>
-            <a:ext cx="2148840" cy="457200"/>
-          </a:xfrm>
-          <a:prstGeom prst="rect">
-            <a:avLst/>
-          </a:prstGeom>
-          <a:noFill/>
-        </p:spPr>
-        <p:txBody>
-          <a:bodyPr wrap="square" lIns="18288" rIns="18288" tIns="18288" bIns="18288" anchor="t">
-            <a:spAutoFit/>
-          </a:bodyPr>
-          <a:lstStyle/>
-          <a:p>
-            <a:pPr algn="ctr">
-              <a:lnSpc>
-                <a:spcPct val="115000"/>
-              </a:lnSpc>
-            </a:pPr>
-            <a:r>
-              <a:rPr sz="1500" b="0">
-                <a:solidFill>
-                  <a:srgbClr val="62736A"/>
-                </a:solidFill>
-                <a:latin typeface="Apple SD Gothic Neo"/>
-                <a:ea typeface="Apple SD Gothic Neo"/>
-                <a:cs typeface="Apple SD Gothic Neo"/>
-              </a:rPr>
-              <a:t>갱신 주기</a:t>
-            </a:r>
-          </a:p>
-        </p:txBody>
-      </p:sp>
-      <p:sp>
-        <p:nvSpPr>
-          <p:cNvPr id="10" name="Rounded Rectangle 9"/>
-          <p:cNvSpPr/>
-          <p:nvPr/>
-        </p:nvSpPr>
-        <p:spPr>
-          <a:xfrm>
-            <a:off x="6163056" y="1783080"/>
-            <a:ext cx="2514600" cy="1463040"/>
-          </a:xfrm>
-          <a:prstGeom prst="roundRect">
-            <a:avLst>
-              <a:gd name="adj" fmla="val 12000"/>
-            </a:avLst>
-          </a:prstGeom>
-          <a:solidFill>
-            <a:srgbClr val="FFFFFF"/>
-          </a:solidFill>
-          <a:ln w="15875">
-            <a:solidFill>
-              <a:srgbClr val="BFC8BF"/>
-            </a:solidFill>
-          </a:ln>
-          <a:effectLst/>
-        </p:spPr>
-        <p:style>
-          <a:lnRef idx="1">
-            <a:schemeClr val="accent1"/>
-          </a:lnRef>
-          <a:fillRef idx="3">
-            <a:schemeClr val="accent1"/>
-          </a:fillRef>
-          <a:effectRef idx="2">
-            <a:schemeClr val="accent1"/>
-          </a:effectRef>
-          <a:fontRef idx="minor">
-            <a:schemeClr val="lt1"/>
-          </a:fontRef>
-        </p:style>
-        <p:txBody>
-          <a:bodyPr rtlCol="0" anchor="ctr" wrap="square"/>
-          <a:lstStyle/>
-          <a:p>
-            <a:pPr algn="ctr"/>
-          </a:p>
-        </p:txBody>
-      </p:sp>
-      <p:sp>
-        <p:nvSpPr>
-          <p:cNvPr id="11" name="TextBox 10"/>
-          <p:cNvSpPr txBox="1"/>
-          <p:nvPr/>
-        </p:nvSpPr>
-        <p:spPr>
-          <a:xfrm>
-            <a:off x="6345936" y="1920240"/>
-            <a:ext cx="2148840" cy="685800"/>
-          </a:xfrm>
-          <a:prstGeom prst="rect">
-            <a:avLst/>
-          </a:prstGeom>
-          <a:noFill/>
-        </p:spPr>
-        <p:txBody>
-          <a:bodyPr wrap="square" lIns="18288" rIns="18288" tIns="18288" bIns="18288" anchor="t">
-            <a:spAutoFit/>
-          </a:bodyPr>
-          <a:lstStyle/>
-          <a:p>
-            <a:pPr algn="ctr">
-              <a:lnSpc>
-                <a:spcPct val="115000"/>
-              </a:lnSpc>
-            </a:pPr>
-            <a:r>
-              <a:rPr sz="3000" b="1">
-                <a:solidFill>
-                  <a:srgbClr val="244E41"/>
-                </a:solidFill>
-                <a:latin typeface="Apple SD Gothic Neo"/>
-                <a:ea typeface="Apple SD Gothic Neo"/>
-                <a:cs typeface="Apple SD Gothic Neo"/>
-              </a:rPr>
-              <a:t>50만/초</a:t>
-            </a:r>
-          </a:p>
-        </p:txBody>
-      </p:sp>
-      <p:sp>
-        <p:nvSpPr>
-          <p:cNvPr id="12" name="TextBox 11"/>
-          <p:cNvSpPr txBox="1"/>
-          <p:nvPr/>
-        </p:nvSpPr>
-        <p:spPr>
-          <a:xfrm>
-            <a:off x="6345936" y="2651760"/>
-            <a:ext cx="2148840" cy="457200"/>
-          </a:xfrm>
-          <a:prstGeom prst="rect">
-            <a:avLst/>
-          </a:prstGeom>
-          <a:noFill/>
-        </p:spPr>
-        <p:txBody>
-          <a:bodyPr wrap="square" lIns="18288" rIns="18288" tIns="18288" bIns="18288" anchor="t">
-            <a:spAutoFit/>
-          </a:bodyPr>
-          <a:lstStyle/>
-          <a:p>
-            <a:pPr algn="ctr">
-              <a:lnSpc>
-                <a:spcPct val="115000"/>
-              </a:lnSpc>
-            </a:pPr>
-            <a:r>
-              <a:rPr sz="1500" b="0">
-                <a:solidFill>
-                  <a:srgbClr val="62736A"/>
-                </a:solidFill>
-                <a:latin typeface="Apple SD Gothic Neo"/>
-                <a:ea typeface="Apple SD Gothic Neo"/>
-                <a:cs typeface="Apple SD Gothic Neo"/>
-              </a:rPr>
-              <a:t>관측값</a:t>
-            </a:r>
-          </a:p>
-        </p:txBody>
-      </p:sp>
-      <p:sp>
-        <p:nvSpPr>
-          <p:cNvPr id="13" name="Rounded Rectangle 12"/>
-          <p:cNvSpPr/>
-          <p:nvPr/>
-        </p:nvSpPr>
-        <p:spPr>
-          <a:xfrm>
-            <a:off x="8878824" y="1783080"/>
-            <a:ext cx="2514600" cy="1463040"/>
-          </a:xfrm>
-          <a:prstGeom prst="roundRect">
-            <a:avLst>
-              <a:gd name="adj" fmla="val 12000"/>
-            </a:avLst>
-          </a:prstGeom>
-          <a:solidFill>
-            <a:srgbClr val="FFFFFF"/>
-          </a:solidFill>
-          <a:ln w="15875">
-            <a:solidFill>
-              <a:srgbClr val="BFC8BF"/>
-            </a:solidFill>
-          </a:ln>
-          <a:effectLst/>
-        </p:spPr>
-        <p:style>
-          <a:lnRef idx="1">
-            <a:schemeClr val="accent1"/>
-          </a:lnRef>
-          <a:fillRef idx="3">
-            <a:schemeClr val="accent1"/>
-          </a:fillRef>
-          <a:effectRef idx="2">
-            <a:schemeClr val="accent1"/>
-          </a:effectRef>
-          <a:fontRef idx="minor">
-            <a:schemeClr val="lt1"/>
-          </a:fontRef>
-        </p:style>
-        <p:txBody>
-          <a:bodyPr rtlCol="0" anchor="ctr" wrap="square"/>
-          <a:lstStyle/>
-          <a:p>
-            <a:pPr algn="ctr"/>
-          </a:p>
-        </p:txBody>
-      </p:sp>
-      <p:sp>
-        <p:nvSpPr>
-          <p:cNvPr id="14" name="TextBox 13"/>
-          <p:cNvSpPr txBox="1"/>
-          <p:nvPr/>
-        </p:nvSpPr>
-        <p:spPr>
-          <a:xfrm>
-            <a:off x="9061704" y="1920240"/>
-            <a:ext cx="2148840" cy="685800"/>
-          </a:xfrm>
-          <a:prstGeom prst="rect">
-            <a:avLst/>
-          </a:prstGeom>
-          <a:noFill/>
-        </p:spPr>
-        <p:txBody>
-          <a:bodyPr wrap="square" lIns="18288" rIns="18288" tIns="18288" bIns="18288" anchor="t">
-            <a:spAutoFit/>
-          </a:bodyPr>
-          <a:lstStyle/>
-          <a:p>
-            <a:pPr algn="ctr">
-              <a:lnSpc>
-                <a:spcPct val="115000"/>
-              </a:lnSpc>
-            </a:pPr>
-            <a:r>
-              <a:rPr sz="3000" b="1">
-                <a:solidFill>
-                  <a:srgbClr val="244E41"/>
-                </a:solidFill>
-                <a:latin typeface="Apple SD Gothic Neo"/>
-                <a:ea typeface="Apple SD Gothic Neo"/>
-                <a:cs typeface="Apple SD Gothic Neo"/>
-              </a:rPr>
-              <a:t>691 GB/일</a:t>
-            </a:r>
-          </a:p>
-        </p:txBody>
-      </p:sp>
-      <p:sp>
-        <p:nvSpPr>
-          <p:cNvPr id="15" name="TextBox 14"/>
-          <p:cNvSpPr txBox="1"/>
-          <p:nvPr/>
-        </p:nvSpPr>
-        <p:spPr>
-          <a:xfrm>
-            <a:off x="9061704" y="2651760"/>
-            <a:ext cx="2148840" cy="457200"/>
-          </a:xfrm>
-          <a:prstGeom prst="rect">
-            <a:avLst/>
-          </a:prstGeom>
-          <a:noFill/>
-        </p:spPr>
-        <p:txBody>
-          <a:bodyPr wrap="square" lIns="18288" rIns="18288" tIns="18288" bIns="18288" anchor="t">
-            <a:spAutoFit/>
-          </a:bodyPr>
-          <a:lstStyle/>
-          <a:p>
-            <a:pPr algn="ctr">
-              <a:lnSpc>
-                <a:spcPct val="115000"/>
-              </a:lnSpc>
-            </a:pPr>
-            <a:r>
-              <a:rPr sz="1500" b="0">
-                <a:solidFill>
-                  <a:srgbClr val="62736A"/>
-                </a:solidFill>
-                <a:latin typeface="Apple SD Gothic Neo"/>
-                <a:ea typeface="Apple SD Gothic Neo"/>
-                <a:cs typeface="Apple SD Gothic Neo"/>
-              </a:rPr>
-              <a:t>값+시각 16바이트 기준</a:t>
-            </a:r>
-          </a:p>
-        </p:txBody>
-      </p:sp>
-      <p:sp>
-        <p:nvSpPr>
-          <p:cNvPr id="16" name="Rounded Rectangle 15"/>
-          <p:cNvSpPr/>
-          <p:nvPr/>
-        </p:nvSpPr>
-        <p:spPr>
-          <a:xfrm>
-            <a:off x="731520" y="3657600"/>
-            <a:ext cx="3200400" cy="1143000"/>
-          </a:xfrm>
-          <a:prstGeom prst="roundRect">
-            <a:avLst>
-              <a:gd name="adj" fmla="val 12000"/>
-            </a:avLst>
-          </a:prstGeom>
-          <a:solidFill>
-            <a:srgbClr val="FFFFFF"/>
-          </a:solidFill>
-          <a:ln w="22225">
-            <a:solidFill>
-              <a:srgbClr val="BFC8BF"/>
-            </a:solidFill>
-          </a:ln>
-          <a:effectLst/>
-        </p:spPr>
-        <p:style>
-          <a:lnRef idx="1">
-            <a:schemeClr val="accent1"/>
-          </a:lnRef>
-          <a:fillRef idx="3">
-            <a:schemeClr val="accent1"/>
-          </a:fillRef>
-          <a:effectRef idx="2">
-            <a:schemeClr val="accent1"/>
-          </a:effectRef>
-          <a:fontRef idx="minor">
-            <a:schemeClr val="lt1"/>
-          </a:fontRef>
-        </p:style>
-        <p:txBody>
-          <a:bodyPr rtlCol="0" anchor="ctr" wrap="square"/>
-          <a:lstStyle/>
-          <a:p>
-            <a:pPr algn="ctr">
-              <a:lnSpc>
-                <a:spcPct val="115000"/>
-              </a:lnSpc>
-            </a:pPr>
-            <a:r>
-              <a:rPr sz="2100" b="1">
-                <a:solidFill>
-                  <a:srgbClr val="172B27"/>
-                </a:solidFill>
-                <a:latin typeface="Apple SD Gothic Neo"/>
-                <a:ea typeface="Apple SD Gothic Neo"/>
-                <a:cs typeface="Apple SD Gothic Neo"/>
-              </a:rPr>
-              <a:t>시계열 코드</a:t>
-            </a:r>
-          </a:p>
-          <a:p>
-            <a:pPr algn="ctr">
-              <a:lnSpc>
-                <a:spcPct val="115000"/>
-              </a:lnSpc>
-            </a:pPr>
-            <a:r>
-              <a:rPr sz="1600" b="0">
-                <a:solidFill>
-                  <a:srgbClr val="172B27"/>
-                </a:solidFill>
-                <a:latin typeface="Apple SD Gothic Neo"/>
-                <a:ea typeface="Apple SD Gothic Neo"/>
-                <a:cs typeface="Apple SD Gothic Neo"/>
-              </a:rPr>
-              <a:t>요약 · 후보 추출</a:t>
-            </a:r>
-          </a:p>
-        </p:txBody>
-      </p:sp>
-      <p:cxnSp>
-        <p:nvCxnSpPr>
-          <p:cNvPr id="17" name="Connector 16"/>
-          <p:cNvCxnSpPr/>
-          <p:nvPr/>
-        </p:nvCxnSpPr>
-        <p:spPr>
-          <a:xfrm>
-            <a:off x="3977639" y="4224528"/>
-            <a:ext cx="411481" cy="0"/>
-          </a:xfrm>
-          <a:prstGeom prst="line">
-            <a:avLst/>
-          </a:prstGeom>
-          <a:ln w="31750">
-            <a:solidFill>
-              <a:srgbClr val="D06B3D"/>
-            </a:solidFill>
-            <a:tailEnd type="triangle" w="med" len="med"/>
-          </a:ln>
-        </p:spPr>
-        <p:style>
-          <a:lnRef idx="2">
-            <a:schemeClr val="accent1"/>
-          </a:lnRef>
-          <a:fillRef idx="0">
-            <a:schemeClr val="accent1"/>
-          </a:fillRef>
-          <a:effectRef idx="1">
-            <a:schemeClr val="accent1"/>
-          </a:effectRef>
-          <a:fontRef idx="minor">
-            <a:schemeClr val="tx1"/>
-          </a:fontRef>
-        </p:style>
-      </p:cxnSp>
-      <p:sp>
-        <p:nvSpPr>
-          <p:cNvPr id="18" name="Rounded Rectangle 17"/>
-          <p:cNvSpPr/>
-          <p:nvPr/>
-        </p:nvSpPr>
-        <p:spPr>
-          <a:xfrm>
-            <a:off x="4434840" y="3657600"/>
-            <a:ext cx="3200400" cy="1143000"/>
-          </a:xfrm>
-          <a:prstGeom prst="roundRect">
-            <a:avLst>
-              <a:gd name="adj" fmla="val 12000"/>
-            </a:avLst>
-          </a:prstGeom>
-          <a:solidFill>
-            <a:srgbClr val="FFFFFF"/>
-          </a:solidFill>
-          <a:ln w="22225">
-            <a:solidFill>
-              <a:srgbClr val="76B900"/>
-            </a:solidFill>
-          </a:ln>
-          <a:effectLst/>
-        </p:spPr>
-        <p:style>
-          <a:lnRef idx="1">
-            <a:schemeClr val="accent1"/>
-          </a:lnRef>
-          <a:fillRef idx="3">
-            <a:schemeClr val="accent1"/>
-          </a:fillRef>
-          <a:effectRef idx="2">
-            <a:schemeClr val="accent1"/>
-          </a:effectRef>
-          <a:fontRef idx="minor">
-            <a:schemeClr val="lt1"/>
-          </a:fontRef>
-        </p:style>
-        <p:txBody>
-          <a:bodyPr rtlCol="0" anchor="ctr" wrap="square"/>
-          <a:lstStyle/>
-          <a:p>
-            <a:pPr algn="ctr">
-              <a:lnSpc>
-                <a:spcPct val="115000"/>
-              </a:lnSpc>
-            </a:pPr>
-            <a:r>
-              <a:rPr sz="2100" b="1">
-                <a:solidFill>
-                  <a:srgbClr val="172B27"/>
-                </a:solidFill>
-                <a:latin typeface="Apple SD Gothic Neo"/>
-                <a:ea typeface="Apple SD Gothic Neo"/>
-                <a:cs typeface="Apple SD Gothic Neo"/>
-              </a:rPr>
-              <a:t>Nano</a:t>
-            </a:r>
-          </a:p>
-          <a:p>
-            <a:pPr algn="ctr">
-              <a:lnSpc>
-                <a:spcPct val="115000"/>
-              </a:lnSpc>
-            </a:pPr>
-            <a:r>
-              <a:rPr sz="1600" b="0">
-                <a:solidFill>
-                  <a:srgbClr val="172B27"/>
-                </a:solidFill>
-                <a:latin typeface="Apple SD Gothic Neo"/>
-                <a:ea typeface="Apple SD Gothic Neo"/>
-                <a:cs typeface="Apple SD Gothic Neo"/>
-              </a:rPr>
-              <a:t>사건 묶기 · 우선순위</a:t>
-            </a:r>
-          </a:p>
-        </p:txBody>
-      </p:sp>
-      <p:cxnSp>
-        <p:nvCxnSpPr>
-          <p:cNvPr id="19" name="Connector 18"/>
-          <p:cNvCxnSpPr/>
-          <p:nvPr/>
-        </p:nvCxnSpPr>
-        <p:spPr>
-          <a:xfrm>
-            <a:off x="7680959" y="4224528"/>
-            <a:ext cx="411481" cy="0"/>
-          </a:xfrm>
-          <a:prstGeom prst="line">
-            <a:avLst/>
-          </a:prstGeom>
-          <a:ln w="31750">
-            <a:solidFill>
-              <a:srgbClr val="D06B3D"/>
-            </a:solidFill>
-            <a:tailEnd type="triangle" w="med" len="med"/>
-          </a:ln>
-        </p:spPr>
-        <p:style>
-          <a:lnRef idx="2">
-            <a:schemeClr val="accent1"/>
-          </a:lnRef>
-          <a:fillRef idx="0">
-            <a:schemeClr val="accent1"/>
-          </a:fillRef>
-          <a:effectRef idx="1">
-            <a:schemeClr val="accent1"/>
-          </a:effectRef>
-          <a:fontRef idx="minor">
-            <a:schemeClr val="tx1"/>
-          </a:fontRef>
-        </p:style>
-      </p:cxnSp>
-      <p:sp>
-        <p:nvSpPr>
-          <p:cNvPr id="20" name="Rounded Rectangle 19"/>
-          <p:cNvSpPr/>
-          <p:nvPr/>
-        </p:nvSpPr>
-        <p:spPr>
-          <a:xfrm>
-            <a:off x="8138160" y="3657600"/>
-            <a:ext cx="3200400" cy="1143000"/>
-          </a:xfrm>
-          <a:prstGeom prst="roundRect">
-            <a:avLst>
-              <a:gd name="adj" fmla="val 12000"/>
-            </a:avLst>
-          </a:prstGeom>
-          <a:solidFill>
-            <a:srgbClr val="76B900"/>
-          </a:solidFill>
-          <a:ln w="22225">
-            <a:solidFill>
-              <a:srgbClr val="76B900"/>
-            </a:solidFill>
-          </a:ln>
-          <a:effectLst/>
-        </p:spPr>
-        <p:style>
-          <a:lnRef idx="1">
-            <a:schemeClr val="accent1"/>
-          </a:lnRef>
-          <a:fillRef idx="3">
-            <a:schemeClr val="accent1"/>
-          </a:fillRef>
-          <a:effectRef idx="2">
-            <a:schemeClr val="accent1"/>
-          </a:effectRef>
-          <a:fontRef idx="minor">
-            <a:schemeClr val="lt1"/>
-          </a:fontRef>
-        </p:style>
-        <p:txBody>
-          <a:bodyPr rtlCol="0" anchor="ctr" wrap="square"/>
-          <a:lstStyle/>
-          <a:p>
-            <a:pPr algn="ctr">
-              <a:lnSpc>
-                <a:spcPct val="115000"/>
-              </a:lnSpc>
-            </a:pPr>
-            <a:r>
-              <a:rPr sz="2100" b="1">
-                <a:solidFill>
-                  <a:srgbClr val="FFFFFF"/>
-                </a:solidFill>
-                <a:latin typeface="Apple SD Gothic Neo"/>
-                <a:ea typeface="Apple SD Gothic Neo"/>
-                <a:cs typeface="Apple SD Gothic Neo"/>
-              </a:rPr>
-              <a:t>Ultra</a:t>
-            </a:r>
-          </a:p>
-          <a:p>
-            <a:pPr algn="ctr">
-              <a:lnSpc>
-                <a:spcPct val="115000"/>
-              </a:lnSpc>
-            </a:pPr>
-            <a:r>
-              <a:rPr sz="1600" b="0">
-                <a:solidFill>
-                  <a:srgbClr val="FFFFFF"/>
-                </a:solidFill>
-                <a:latin typeface="Apple SD Gothic Neo"/>
-                <a:ea typeface="Apple SD Gothic Neo"/>
-                <a:cs typeface="Apple SD Gothic Neo"/>
-              </a:rPr>
-              <a:t>선별된 사건만 조사</a:t>
-            </a:r>
-          </a:p>
-        </p:txBody>
-      </p:sp>
-      <p:sp>
-        <p:nvSpPr>
-          <p:cNvPr id="21" name="TextBox 20"/>
-          <p:cNvSpPr txBox="1"/>
-          <p:nvPr/>
-        </p:nvSpPr>
-        <p:spPr>
-          <a:xfrm>
-            <a:off x="731520" y="5074920"/>
-            <a:ext cx="10698480" cy="1097280"/>
-          </a:xfrm>
-          <a:prstGeom prst="rect">
-            <a:avLst/>
-          </a:prstGeom>
-          <a:noFill/>
-        </p:spPr>
-        <p:txBody>
-          <a:bodyPr wrap="square" lIns="18288" rIns="18288" tIns="18288" bIns="18288" anchor="t">
-            <a:spAutoFit/>
-          </a:bodyPr>
-          <a:lstStyle/>
-          <a:p>
-            <a:pPr algn="l">
-              <a:lnSpc>
-                <a:spcPct val="115000"/>
-              </a:lnSpc>
-            </a:pPr>
-            <a:r>
-              <a:rPr sz="2100" b="1">
-                <a:solidFill>
-                  <a:srgbClr val="172B27"/>
-                </a:solidFill>
-                <a:latin typeface="Apple SD Gothic Neo"/>
-                <a:ea typeface="Apple SD Gothic Neo"/>
-                <a:cs typeface="Apple SD Gothic Neo"/>
-              </a:rPr>
-              <a:t>원시 데이터를 전부 큰 모델에 보내지 않는다</a:t>
-            </a:r>
-          </a:p>
-          <a:p>
-            <a:pPr algn="l">
-              <a:lnSpc>
-                <a:spcPct val="115000"/>
-              </a:lnSpc>
-            </a:pPr>
-            <a:r>
-              <a:rPr sz="1600" b="0">
-                <a:solidFill>
-                  <a:srgbClr val="62736A"/>
-                </a:solidFill>
-                <a:latin typeface="Apple SD Gothic Neo"/>
-                <a:ea typeface="Apple SD Gothic Neo"/>
-                <a:cs typeface="Apple SD Gothic Neo"/>
-              </a:rPr>
-              <a:t>현재 로컬 Nano 요청 6.3~11.5초 → 병목 가능, 부하 시험이 다음 과제</a:t>
-            </a:r>
-          </a:p>
-        </p:txBody>
-      </p:sp>
-      <p:sp>
-        <p:nvSpPr>
-          <p:cNvPr id="22" name="TextBox 21"/>
+        </p:spPr>
+      </p:pic>
+      <p:sp>
+        <p:nvSpPr>
+          <p:cNvPr id="4" name="TextBox 3"/>
           <p:cNvSpPr txBox="1"/>
           <p:nvPr/>
         </p:nvSpPr>
@@ -11265,7 +11427,7 @@
                 <a:ea typeface="Apple SD Gothic Neo"/>
                 <a:cs typeface="Apple SD Gothic Neo"/>
               </a:rPr>
-              <a:t>고객 데이터는 비공개 → 공개 데이터로 벤치마크 구성</a:t>
+              <a:t>설계 부하 · 계산값</a:t>
             </a:r>
           </a:p>
         </p:txBody>
@@ -11306,7 +11468,7 @@
                 <a:ea typeface="Apple SD Gothic Neo"/>
                 <a:cs typeface="Apple SD Gothic Neo"/>
               </a:rPr>
-              <a:t>데이터: 공개 PreDist v2 (지역난방)</a:t>
+              <a:t>System 1이 감당할 양</a:t>
             </a:r>
           </a:p>
         </p:txBody>
@@ -11319,8 +11481,8 @@
         </p:nvSpPr>
         <p:spPr>
           <a:xfrm>
-            <a:off x="731520" y="2148840"/>
-            <a:ext cx="1828800" cy="1143000"/>
+            <a:off x="731520" y="1783080"/>
+            <a:ext cx="2514600" cy="1463040"/>
           </a:xfrm>
           <a:prstGeom prst="roundRect">
             <a:avLst>
@@ -11355,71 +11517,102 @@
           <a:bodyPr rtlCol="0" anchor="ctr" wrap="square"/>
           <a:lstStyle/>
           <a:p>
+            <a:pPr algn="ctr"/>
+          </a:p>
+        </p:txBody>
+      </p:sp>
+      <p:sp>
+        <p:nvSpPr>
+          <p:cNvPr id="5" name="TextBox 4"/>
+          <p:cNvSpPr txBox="1"/>
+          <p:nvPr/>
+        </p:nvSpPr>
+        <p:spPr>
+          <a:xfrm>
+            <a:off x="914400" y="1920240"/>
+            <a:ext cx="2148840" cy="685800"/>
+          </a:xfrm>
+          <a:prstGeom prst="rect">
+            <a:avLst/>
+          </a:prstGeom>
+          <a:noFill/>
+        </p:spPr>
+        <p:txBody>
+          <a:bodyPr wrap="square" lIns="18288" rIns="18288" tIns="18288" bIns="18288" anchor="t">
+            <a:spAutoFit/>
+          </a:bodyPr>
+          <a:lstStyle/>
+          <a:p>
             <a:pPr algn="ctr">
               <a:lnSpc>
                 <a:spcPct val="115000"/>
               </a:lnSpc>
             </a:pPr>
             <a:r>
-              <a:rPr sz="1900" b="0">
-                <a:solidFill>
-                  <a:srgbClr val="172B27"/>
-                </a:solidFill>
-                <a:latin typeface="Apple SD Gothic Neo"/>
-                <a:ea typeface="Apple SD Gothic Neo"/>
-                <a:cs typeface="Apple SD Gothic Neo"/>
-              </a:rPr>
-              <a:t>열 생산 시설</a:t>
-            </a:r>
-          </a:p>
-        </p:txBody>
-      </p:sp>
-      <p:cxnSp>
-        <p:nvCxnSpPr>
-          <p:cNvPr id="5" name="Connector 4"/>
-          <p:cNvCxnSpPr/>
-          <p:nvPr/>
-        </p:nvCxnSpPr>
-        <p:spPr>
-          <a:xfrm>
-            <a:off x="2596896" y="2715768"/>
-            <a:ext cx="310895" cy="0"/>
-          </a:xfrm>
-          <a:prstGeom prst="line">
+              <a:rPr sz="3000" b="1">
+                <a:solidFill>
+                  <a:srgbClr val="244E41"/>
+                </a:solidFill>
+                <a:latin typeface="Apple SD Gothic Neo"/>
+                <a:ea typeface="Apple SD Gothic Neo"/>
+                <a:cs typeface="Apple SD Gothic Neo"/>
+              </a:rPr>
+              <a:t>50,000</a:t>
+            </a:r>
+          </a:p>
+        </p:txBody>
+      </p:sp>
+      <p:sp>
+        <p:nvSpPr>
+          <p:cNvPr id="6" name="TextBox 5"/>
+          <p:cNvSpPr txBox="1"/>
+          <p:nvPr/>
+        </p:nvSpPr>
+        <p:spPr>
+          <a:xfrm>
+            <a:off x="914400" y="2651760"/>
+            <a:ext cx="2148840" cy="457200"/>
+          </a:xfrm>
+          <a:prstGeom prst="rect">
             <a:avLst/>
           </a:prstGeom>
-          <a:ln w="31750">
-            <a:solidFill>
-              <a:srgbClr val="D06B3D"/>
-            </a:solidFill>
-            <a:tailEnd type="triangle" w="med" len="med"/>
-          </a:ln>
-        </p:spPr>
-        <p:style>
-          <a:lnRef idx="2">
-            <a:schemeClr val="accent1"/>
-          </a:lnRef>
-          <a:fillRef idx="0">
-            <a:schemeClr val="accent1"/>
-          </a:fillRef>
-          <a:effectRef idx="1">
-            <a:schemeClr val="accent1"/>
-          </a:effectRef>
-          <a:fontRef idx="minor">
-            <a:schemeClr val="tx1"/>
-          </a:fontRef>
-        </p:style>
-      </p:cxnSp>
-      <p:sp>
-        <p:nvSpPr>
-          <p:cNvPr id="6" name="Rounded Rectangle 5"/>
+          <a:noFill/>
+        </p:spPr>
+        <p:txBody>
+          <a:bodyPr wrap="square" lIns="18288" rIns="18288" tIns="18288" bIns="18288" anchor="t">
+            <a:spAutoFit/>
+          </a:bodyPr>
+          <a:lstStyle/>
+          <a:p>
+            <a:pPr algn="ctr">
+              <a:lnSpc>
+                <a:spcPct val="115000"/>
+              </a:lnSpc>
+            </a:pPr>
+            <a:r>
+              <a:rPr sz="1500" b="0">
+                <a:solidFill>
+                  <a:srgbClr val="62736A"/>
+                </a:solidFill>
+                <a:latin typeface="Apple SD Gothic Neo"/>
+                <a:ea typeface="Apple SD Gothic Neo"/>
+                <a:cs typeface="Apple SD Gothic Neo"/>
+              </a:rPr>
+              <a:t>신호</a:t>
+            </a:r>
+          </a:p>
+        </p:txBody>
+      </p:sp>
+      <p:sp>
+        <p:nvSpPr>
+          <p:cNvPr id="7" name="Rounded Rectangle 6"/>
           <p:cNvSpPr/>
           <p:nvPr/>
         </p:nvSpPr>
         <p:spPr>
           <a:xfrm>
-            <a:off x="2944368" y="2148840"/>
-            <a:ext cx="1828800" cy="1143000"/>
+            <a:off x="3447288" y="1783080"/>
+            <a:ext cx="2514600" cy="1463040"/>
           </a:xfrm>
           <a:prstGeom prst="roundRect">
             <a:avLst>
@@ -11454,23 +11647,72 @@
           <a:bodyPr rtlCol="0" anchor="ctr" wrap="square"/>
           <a:lstStyle/>
           <a:p>
+            <a:pPr algn="ctr"/>
+          </a:p>
+        </p:txBody>
+      </p:sp>
+      <p:sp>
+        <p:nvSpPr>
+          <p:cNvPr id="8" name="TextBox 7"/>
+          <p:cNvSpPr txBox="1"/>
+          <p:nvPr/>
+        </p:nvSpPr>
+        <p:spPr>
+          <a:xfrm>
+            <a:off x="3630168" y="1920240"/>
+            <a:ext cx="2148840" cy="685800"/>
+          </a:xfrm>
+          <a:prstGeom prst="rect">
+            <a:avLst/>
+          </a:prstGeom>
+          <a:noFill/>
+        </p:spPr>
+        <p:txBody>
+          <a:bodyPr wrap="square" lIns="18288" rIns="18288" tIns="18288" bIns="18288" anchor="t">
+            <a:spAutoFit/>
+          </a:bodyPr>
+          <a:lstStyle/>
+          <a:p>
             <a:pPr algn="ctr">
               <a:lnSpc>
                 <a:spcPct val="115000"/>
               </a:lnSpc>
             </a:pPr>
             <a:r>
-              <a:rPr sz="1900" b="0">
-                <a:solidFill>
-                  <a:srgbClr val="172B27"/>
-                </a:solidFill>
-                <a:latin typeface="Apple SD Gothic Neo"/>
-                <a:ea typeface="Apple SD Gothic Neo"/>
-                <a:cs typeface="Apple SD Gothic Neo"/>
-              </a:rPr>
-              <a:t>도시 배관</a:t>
-            </a:r>
-          </a:p>
+              <a:rPr sz="3000" b="1">
+                <a:solidFill>
+                  <a:srgbClr val="244E41"/>
+                </a:solidFill>
+                <a:latin typeface="Apple SD Gothic Neo"/>
+                <a:ea typeface="Apple SD Gothic Neo"/>
+                <a:cs typeface="Apple SD Gothic Neo"/>
+              </a:rPr>
+              <a:t>100 ms</a:t>
+            </a:r>
+          </a:p>
+        </p:txBody>
+      </p:sp>
+      <p:sp>
+        <p:nvSpPr>
+          <p:cNvPr id="9" name="TextBox 8"/>
+          <p:cNvSpPr txBox="1"/>
+          <p:nvPr/>
+        </p:nvSpPr>
+        <p:spPr>
+          <a:xfrm>
+            <a:off x="3630168" y="2651760"/>
+            <a:ext cx="2148840" cy="457200"/>
+          </a:xfrm>
+          <a:prstGeom prst="rect">
+            <a:avLst/>
+          </a:prstGeom>
+          <a:noFill/>
+        </p:spPr>
+        <p:txBody>
+          <a:bodyPr wrap="square" lIns="18288" rIns="18288" tIns="18288" bIns="18288" anchor="t">
+            <a:spAutoFit/>
+          </a:bodyPr>
+          <a:lstStyle/>
           <a:p>
             <a:pPr algn="ctr">
               <a:lnSpc>
@@ -11478,170 +11720,19 @@
               </a:lnSpc>
             </a:pPr>
             <a:r>
-              <a:rPr sz="1900" b="0">
-                <a:solidFill>
-                  <a:srgbClr val="172B27"/>
-                </a:solidFill>
-                <a:latin typeface="Apple SD Gothic Neo"/>
-                <a:ea typeface="Apple SD Gothic Neo"/>
-                <a:cs typeface="Apple SD Gothic Neo"/>
-              </a:rPr>
-              <a:t>(1차)</a:t>
-            </a:r>
-          </a:p>
-        </p:txBody>
-      </p:sp>
-      <p:cxnSp>
-        <p:nvCxnSpPr>
-          <p:cNvPr id="7" name="Connector 6"/>
-          <p:cNvCxnSpPr/>
-          <p:nvPr/>
-        </p:nvCxnSpPr>
-        <p:spPr>
-          <a:xfrm>
-            <a:off x="4809744" y="2715768"/>
-            <a:ext cx="310896" cy="0"/>
-          </a:xfrm>
-          <a:prstGeom prst="line">
-            <a:avLst/>
-          </a:prstGeom>
-          <a:ln w="31750">
-            <a:solidFill>
-              <a:srgbClr val="D06B3D"/>
-            </a:solidFill>
-            <a:tailEnd type="triangle" w="med" len="med"/>
-          </a:ln>
-        </p:spPr>
-        <p:style>
-          <a:lnRef idx="2">
-            <a:schemeClr val="accent1"/>
-          </a:lnRef>
-          <a:fillRef idx="0">
-            <a:schemeClr val="accent1"/>
-          </a:fillRef>
-          <a:effectRef idx="1">
-            <a:schemeClr val="accent1"/>
-          </a:effectRef>
-          <a:fontRef idx="minor">
-            <a:schemeClr val="tx1"/>
-          </a:fontRef>
-        </p:style>
-      </p:cxnSp>
-      <p:sp>
-        <p:nvSpPr>
-          <p:cNvPr id="8" name="Rounded Rectangle 7"/>
-          <p:cNvSpPr/>
-          <p:nvPr/>
-        </p:nvSpPr>
-        <p:spPr>
-          <a:xfrm>
-            <a:off x="5157216" y="2148840"/>
-            <a:ext cx="1828800" cy="1143000"/>
-          </a:xfrm>
-          <a:prstGeom prst="roundRect">
-            <a:avLst>
-              <a:gd name="adj" fmla="val 12000"/>
-            </a:avLst>
-          </a:prstGeom>
-          <a:solidFill>
-            <a:srgbClr val="244E41"/>
-          </a:solidFill>
-          <a:ln>
-            <a:noFill/>
-          </a:ln>
-          <a:effectLst/>
-        </p:spPr>
-        <p:style>
-          <a:lnRef idx="1">
-            <a:schemeClr val="accent1"/>
-          </a:lnRef>
-          <a:fillRef idx="3">
-            <a:schemeClr val="accent1"/>
-          </a:fillRef>
-          <a:effectRef idx="2">
-            <a:schemeClr val="accent1"/>
-          </a:effectRef>
-          <a:fontRef idx="minor">
-            <a:schemeClr val="lt1"/>
-          </a:fontRef>
-        </p:style>
-        <p:txBody>
-          <a:bodyPr rtlCol="0" anchor="ctr" wrap="square"/>
-          <a:lstStyle/>
-          <a:p>
-            <a:pPr algn="ctr">
-              <a:lnSpc>
-                <a:spcPct val="115000"/>
-              </a:lnSpc>
-            </a:pPr>
-            <a:r>
-              <a:rPr sz="1900" b="1">
-                <a:solidFill>
-                  <a:srgbClr val="FFFFFF"/>
-                </a:solidFill>
-                <a:latin typeface="Apple SD Gothic Neo"/>
-                <a:ea typeface="Apple SD Gothic Neo"/>
-                <a:cs typeface="Apple SD Gothic Neo"/>
-              </a:rPr>
-              <a:t>서브스테이션</a:t>
-            </a:r>
-          </a:p>
-          <a:p>
-            <a:pPr algn="ctr">
-              <a:lnSpc>
-                <a:spcPct val="115000"/>
-              </a:lnSpc>
-            </a:pPr>
-            <a:r>
-              <a:rPr sz="1900" b="1">
-                <a:solidFill>
-                  <a:srgbClr val="FFFFFF"/>
-                </a:solidFill>
-                <a:latin typeface="Apple SD Gothic Neo"/>
-                <a:ea typeface="Apple SD Gothic Neo"/>
-                <a:cs typeface="Apple SD Gothic Neo"/>
-              </a:rPr>
-              <a:t>(열교환)</a:t>
-            </a:r>
-          </a:p>
-        </p:txBody>
-      </p:sp>
-      <p:cxnSp>
-        <p:nvCxnSpPr>
-          <p:cNvPr id="9" name="Connector 8"/>
-          <p:cNvCxnSpPr/>
-          <p:nvPr/>
-        </p:nvCxnSpPr>
-        <p:spPr>
-          <a:xfrm>
-            <a:off x="7022592" y="2715768"/>
-            <a:ext cx="310896" cy="0"/>
-          </a:xfrm>
-          <a:prstGeom prst="line">
-            <a:avLst/>
-          </a:prstGeom>
-          <a:ln w="31750">
-            <a:solidFill>
-              <a:srgbClr val="D06B3D"/>
-            </a:solidFill>
-            <a:tailEnd type="triangle" w="med" len="med"/>
-          </a:ln>
-        </p:spPr>
-        <p:style>
-          <a:lnRef idx="2">
-            <a:schemeClr val="accent1"/>
-          </a:lnRef>
-          <a:fillRef idx="0">
-            <a:schemeClr val="accent1"/>
-          </a:fillRef>
-          <a:effectRef idx="1">
-            <a:schemeClr val="accent1"/>
-          </a:effectRef>
-          <a:fontRef idx="minor">
-            <a:schemeClr val="tx1"/>
-          </a:fontRef>
-        </p:style>
-      </p:cxnSp>
+              <a:rPr sz="1500" b="0">
+                <a:solidFill>
+                  <a:srgbClr val="62736A"/>
+                </a:solidFill>
+                <a:latin typeface="Apple SD Gothic Neo"/>
+                <a:ea typeface="Apple SD Gothic Neo"/>
+                <a:cs typeface="Apple SD Gothic Neo"/>
+              </a:rPr>
+              <a:t>갱신 주기</a:t>
+            </a:r>
+          </a:p>
+        </p:txBody>
+      </p:sp>
       <p:sp>
         <p:nvSpPr>
           <p:cNvPr id="10" name="Rounded Rectangle 9"/>
@@ -11650,8 +11741,8 @@
         </p:nvSpPr>
         <p:spPr>
           <a:xfrm>
-            <a:off x="7370064" y="2148840"/>
-            <a:ext cx="1828800" cy="1143000"/>
+            <a:off x="6163056" y="1783080"/>
+            <a:ext cx="2514600" cy="1463040"/>
           </a:xfrm>
           <a:prstGeom prst="roundRect">
             <a:avLst>
@@ -11686,23 +11777,72 @@
           <a:bodyPr rtlCol="0" anchor="ctr" wrap="square"/>
           <a:lstStyle/>
           <a:p>
+            <a:pPr algn="ctr"/>
+          </a:p>
+        </p:txBody>
+      </p:sp>
+      <p:sp>
+        <p:nvSpPr>
+          <p:cNvPr id="11" name="TextBox 10"/>
+          <p:cNvSpPr txBox="1"/>
+          <p:nvPr/>
+        </p:nvSpPr>
+        <p:spPr>
+          <a:xfrm>
+            <a:off x="6345936" y="1920240"/>
+            <a:ext cx="2148840" cy="685800"/>
+          </a:xfrm>
+          <a:prstGeom prst="rect">
+            <a:avLst/>
+          </a:prstGeom>
+          <a:noFill/>
+        </p:spPr>
+        <p:txBody>
+          <a:bodyPr wrap="square" lIns="18288" rIns="18288" tIns="18288" bIns="18288" anchor="t">
+            <a:spAutoFit/>
+          </a:bodyPr>
+          <a:lstStyle/>
+          <a:p>
             <a:pPr algn="ctr">
               <a:lnSpc>
                 <a:spcPct val="115000"/>
               </a:lnSpc>
             </a:pPr>
             <a:r>
-              <a:rPr sz="1900" b="0">
-                <a:solidFill>
-                  <a:srgbClr val="172B27"/>
-                </a:solidFill>
-                <a:latin typeface="Apple SD Gothic Neo"/>
-                <a:ea typeface="Apple SD Gothic Neo"/>
-                <a:cs typeface="Apple SD Gothic Neo"/>
-              </a:rPr>
-              <a:t>건물 배관</a:t>
-            </a:r>
-          </a:p>
+              <a:rPr sz="3000" b="1">
+                <a:solidFill>
+                  <a:srgbClr val="244E41"/>
+                </a:solidFill>
+                <a:latin typeface="Apple SD Gothic Neo"/>
+                <a:ea typeface="Apple SD Gothic Neo"/>
+                <a:cs typeface="Apple SD Gothic Neo"/>
+              </a:rPr>
+              <a:t>50만/초</a:t>
+            </a:r>
+          </a:p>
+        </p:txBody>
+      </p:sp>
+      <p:sp>
+        <p:nvSpPr>
+          <p:cNvPr id="12" name="TextBox 11"/>
+          <p:cNvSpPr txBox="1"/>
+          <p:nvPr/>
+        </p:nvSpPr>
+        <p:spPr>
+          <a:xfrm>
+            <a:off x="6345936" y="2651760"/>
+            <a:ext cx="2148840" cy="457200"/>
+          </a:xfrm>
+          <a:prstGeom prst="rect">
+            <a:avLst/>
+          </a:prstGeom>
+          <a:noFill/>
+        </p:spPr>
+        <p:txBody>
+          <a:bodyPr wrap="square" lIns="18288" rIns="18288" tIns="18288" bIns="18288" anchor="t">
+            <a:spAutoFit/>
+          </a:bodyPr>
+          <a:lstStyle/>
           <a:p>
             <a:pPr algn="ctr">
               <a:lnSpc>
@@ -11710,65 +11850,29 @@
               </a:lnSpc>
             </a:pPr>
             <a:r>
-              <a:rPr sz="1900" b="0">
-                <a:solidFill>
-                  <a:srgbClr val="172B27"/>
-                </a:solidFill>
-                <a:latin typeface="Apple SD Gothic Neo"/>
-                <a:ea typeface="Apple SD Gothic Neo"/>
-                <a:cs typeface="Apple SD Gothic Neo"/>
-              </a:rPr>
-              <a:t>(2차)</a:t>
-            </a:r>
-          </a:p>
-        </p:txBody>
-      </p:sp>
-      <p:cxnSp>
-        <p:nvCxnSpPr>
-          <p:cNvPr id="11" name="Connector 10"/>
-          <p:cNvCxnSpPr/>
-          <p:nvPr/>
-        </p:nvCxnSpPr>
-        <p:spPr>
-          <a:xfrm>
-            <a:off x="9235440" y="2715768"/>
-            <a:ext cx="310896" cy="0"/>
-          </a:xfrm>
-          <a:prstGeom prst="line">
-            <a:avLst/>
-          </a:prstGeom>
-          <a:ln w="31750">
-            <a:solidFill>
-              <a:srgbClr val="D06B3D"/>
-            </a:solidFill>
-            <a:tailEnd type="triangle" w="med" len="med"/>
-          </a:ln>
-        </p:spPr>
-        <p:style>
-          <a:lnRef idx="2">
-            <a:schemeClr val="accent1"/>
-          </a:lnRef>
-          <a:fillRef idx="0">
-            <a:schemeClr val="accent1"/>
-          </a:fillRef>
-          <a:effectRef idx="1">
-            <a:schemeClr val="accent1"/>
-          </a:effectRef>
-          <a:fontRef idx="minor">
-            <a:schemeClr val="tx1"/>
-          </a:fontRef>
-        </p:style>
-      </p:cxnSp>
-      <p:sp>
-        <p:nvSpPr>
-          <p:cNvPr id="12" name="Rounded Rectangle 11"/>
+              <a:rPr sz="1500" b="0">
+                <a:solidFill>
+                  <a:srgbClr val="62736A"/>
+                </a:solidFill>
+                <a:latin typeface="Apple SD Gothic Neo"/>
+                <a:ea typeface="Apple SD Gothic Neo"/>
+                <a:cs typeface="Apple SD Gothic Neo"/>
+              </a:rPr>
+              <a:t>관측값</a:t>
+            </a:r>
+          </a:p>
+        </p:txBody>
+      </p:sp>
+      <p:sp>
+        <p:nvSpPr>
+          <p:cNvPr id="13" name="Rounded Rectangle 12"/>
           <p:cNvSpPr/>
           <p:nvPr/>
         </p:nvSpPr>
         <p:spPr>
           <a:xfrm>
-            <a:off x="9582912" y="2148840"/>
-            <a:ext cx="1828800" cy="1143000"/>
+            <a:off x="8878824" y="1783080"/>
+            <a:ext cx="2514600" cy="1463040"/>
           </a:xfrm>
           <a:prstGeom prst="roundRect">
             <a:avLst>
@@ -11803,13 +11907,143 @@
           <a:bodyPr rtlCol="0" anchor="ctr" wrap="square"/>
           <a:lstStyle/>
           <a:p>
+            <a:pPr algn="ctr"/>
+          </a:p>
+        </p:txBody>
+      </p:sp>
+      <p:sp>
+        <p:nvSpPr>
+          <p:cNvPr id="14" name="TextBox 13"/>
+          <p:cNvSpPr txBox="1"/>
+          <p:nvPr/>
+        </p:nvSpPr>
+        <p:spPr>
+          <a:xfrm>
+            <a:off x="9061704" y="1920240"/>
+            <a:ext cx="2148840" cy="685800"/>
+          </a:xfrm>
+          <a:prstGeom prst="rect">
+            <a:avLst/>
+          </a:prstGeom>
+          <a:noFill/>
+        </p:spPr>
+        <p:txBody>
+          <a:bodyPr wrap="square" lIns="18288" rIns="18288" tIns="18288" bIns="18288" anchor="t">
+            <a:spAutoFit/>
+          </a:bodyPr>
+          <a:lstStyle/>
+          <a:p>
             <a:pPr algn="ctr">
               <a:lnSpc>
                 <a:spcPct val="115000"/>
               </a:lnSpc>
             </a:pPr>
             <a:r>
-              <a:rPr sz="1900" b="0">
+              <a:rPr sz="3000" b="1">
+                <a:solidFill>
+                  <a:srgbClr val="244E41"/>
+                </a:solidFill>
+                <a:latin typeface="Apple SD Gothic Neo"/>
+                <a:ea typeface="Apple SD Gothic Neo"/>
+                <a:cs typeface="Apple SD Gothic Neo"/>
+              </a:rPr>
+              <a:t>691 GB/일</a:t>
+            </a:r>
+          </a:p>
+        </p:txBody>
+      </p:sp>
+      <p:sp>
+        <p:nvSpPr>
+          <p:cNvPr id="15" name="TextBox 14"/>
+          <p:cNvSpPr txBox="1"/>
+          <p:nvPr/>
+        </p:nvSpPr>
+        <p:spPr>
+          <a:xfrm>
+            <a:off x="9061704" y="2651760"/>
+            <a:ext cx="2148840" cy="457200"/>
+          </a:xfrm>
+          <a:prstGeom prst="rect">
+            <a:avLst/>
+          </a:prstGeom>
+          <a:noFill/>
+        </p:spPr>
+        <p:txBody>
+          <a:bodyPr wrap="square" lIns="18288" rIns="18288" tIns="18288" bIns="18288" anchor="t">
+            <a:spAutoFit/>
+          </a:bodyPr>
+          <a:lstStyle/>
+          <a:p>
+            <a:pPr algn="ctr">
+              <a:lnSpc>
+                <a:spcPct val="115000"/>
+              </a:lnSpc>
+            </a:pPr>
+            <a:r>
+              <a:rPr sz="1500" b="0">
+                <a:solidFill>
+                  <a:srgbClr val="62736A"/>
+                </a:solidFill>
+                <a:latin typeface="Apple SD Gothic Neo"/>
+                <a:ea typeface="Apple SD Gothic Neo"/>
+                <a:cs typeface="Apple SD Gothic Neo"/>
+              </a:rPr>
+              <a:t>값+시각 16바이트 기준</a:t>
+            </a:r>
+          </a:p>
+        </p:txBody>
+      </p:sp>
+      <p:sp>
+        <p:nvSpPr>
+          <p:cNvPr id="16" name="Rounded Rectangle 15"/>
+          <p:cNvSpPr/>
+          <p:nvPr/>
+        </p:nvSpPr>
+        <p:spPr>
+          <a:xfrm>
+            <a:off x="731520" y="3657600"/>
+            <a:ext cx="3200400" cy="1143000"/>
+          </a:xfrm>
+          <a:prstGeom prst="roundRect">
+            <a:avLst>
+              <a:gd name="adj" fmla="val 12000"/>
+            </a:avLst>
+          </a:prstGeom>
+          <a:solidFill>
+            <a:srgbClr val="FFFFFF"/>
+          </a:solidFill>
+          <a:ln w="22225">
+            <a:solidFill>
+              <a:srgbClr val="BFC8BF"/>
+            </a:solidFill>
+          </a:ln>
+          <a:effectLst/>
+        </p:spPr>
+        <p:style>
+          <a:lnRef idx="1">
+            <a:schemeClr val="accent1"/>
+          </a:lnRef>
+          <a:fillRef idx="3">
+            <a:schemeClr val="accent1"/>
+          </a:fillRef>
+          <a:effectRef idx="2">
+            <a:schemeClr val="accent1"/>
+          </a:effectRef>
+          <a:fontRef idx="minor">
+            <a:schemeClr val="lt1"/>
+          </a:fontRef>
+        </p:style>
+        <p:txBody>
+          <a:bodyPr rtlCol="0" anchor="ctr" wrap="square"/>
+          <a:lstStyle/>
+          <a:p>
+            <a:pPr algn="ctr">
+              <a:lnSpc>
+                <a:spcPct val="115000"/>
+              </a:lnSpc>
+            </a:pPr>
+            <a:r>
+              <a:rPr sz="2100" b="1">
                 <a:solidFill>
                   <a:srgbClr val="172B27"/>
                 </a:solidFill>
@@ -11817,7 +12051,7 @@
                 <a:ea typeface="Apple SD Gothic Neo"/>
                 <a:cs typeface="Apple SD Gothic Neo"/>
               </a:rPr>
-              <a:t>집 안</a:t>
+              <a:t>시계열 코드</a:t>
             </a:r>
           </a:p>
           <a:p>
@@ -11827,7 +12061,7 @@
               </a:lnSpc>
             </a:pPr>
             <a:r>
-              <a:rPr sz="1900" b="0">
+              <a:rPr sz="1600" b="0">
                 <a:solidFill>
                   <a:srgbClr val="172B27"/>
                 </a:solidFill>
@@ -11835,28 +12069,28 @@
                 <a:ea typeface="Apple SD Gothic Neo"/>
                 <a:cs typeface="Apple SD Gothic Neo"/>
               </a:rPr>
-              <a:t>라디에이터</a:t>
+              <a:t>요약 · 후보 추출</a:t>
             </a:r>
           </a:p>
         </p:txBody>
       </p:sp>
       <p:cxnSp>
         <p:nvCxnSpPr>
-          <p:cNvPr id="13" name="Connector 12"/>
+          <p:cNvPr id="17" name="Connector 16"/>
           <p:cNvCxnSpPr/>
           <p:nvPr/>
         </p:nvCxnSpPr>
         <p:spPr>
           <a:xfrm>
-            <a:off x="6071616" y="3337560"/>
-            <a:ext cx="0" cy="411479"/>
+            <a:off x="3977639" y="4224528"/>
+            <a:ext cx="411481" cy="0"/>
           </a:xfrm>
           <a:prstGeom prst="line">
             <a:avLst/>
           </a:prstGeom>
-          <a:ln w="19050">
+          <a:ln w="31750">
             <a:solidFill>
-              <a:srgbClr val="244E41"/>
+              <a:srgbClr val="D06B3D"/>
             </a:solidFill>
             <a:tailEnd type="triangle" w="med" len="med"/>
           </a:ln>
@@ -11878,14 +12112,14 @@
       </p:cxnSp>
       <p:sp>
         <p:nvSpPr>
-          <p:cNvPr id="14" name="Rounded Rectangle 13"/>
+          <p:cNvPr id="18" name="Rounded Rectangle 17"/>
           <p:cNvSpPr/>
           <p:nvPr/>
         </p:nvSpPr>
         <p:spPr>
           <a:xfrm>
-            <a:off x="5157216" y="3794760"/>
-            <a:ext cx="1828800" cy="868680"/>
+            <a:off x="4434840" y="3657600"/>
+            <a:ext cx="3200400" cy="1143000"/>
           </a:xfrm>
           <a:prstGeom prst="roundRect">
             <a:avLst>
@@ -11893,11 +12127,11 @@
             </a:avLst>
           </a:prstGeom>
           <a:solidFill>
-            <a:srgbClr val="FBF9F4"/>
+            <a:srgbClr val="FFFFFF"/>
           </a:solidFill>
           <a:ln w="22225">
             <a:solidFill>
-              <a:srgbClr val="244E41"/>
+              <a:srgbClr val="76B900"/>
             </a:solidFill>
           </a:ln>
           <a:effectLst/>
@@ -11926,7 +12160,7 @@
               </a:lnSpc>
             </a:pPr>
             <a:r>
-              <a:rPr sz="1700" b="0">
+              <a:rPr sz="2100" b="1">
                 <a:solidFill>
                   <a:srgbClr val="172B27"/>
                 </a:solidFill>
@@ -11934,7 +12168,7 @@
                 <a:ea typeface="Apple SD Gothic Neo"/>
                 <a:cs typeface="Apple SD Gothic Neo"/>
               </a:rPr>
-              <a:t>공급온도 센서</a:t>
+              <a:t>Nano</a:t>
             </a:r>
           </a:p>
           <a:p>
@@ -11944,34 +12178,34 @@
               </a:lnSpc>
             </a:pPr>
             <a:r>
-              <a:rPr sz="1800" b="1">
-                <a:solidFill>
-                  <a:srgbClr val="244E41"/>
-                </a:solidFill>
-                <a:latin typeface="Apple SD Gothic Neo"/>
-                <a:ea typeface="Apple SD Gothic Neo"/>
-                <a:cs typeface="Apple SD Gothic Neo"/>
-              </a:rPr>
-              <a:t>기록 있음</a:t>
+              <a:rPr sz="1600" b="0">
+                <a:solidFill>
+                  <a:srgbClr val="172B27"/>
+                </a:solidFill>
+                <a:latin typeface="Apple SD Gothic Neo"/>
+                <a:ea typeface="Apple SD Gothic Neo"/>
+                <a:cs typeface="Apple SD Gothic Neo"/>
+              </a:rPr>
+              <a:t>사건 묶기 · 우선순위</a:t>
             </a:r>
           </a:p>
         </p:txBody>
       </p:sp>
       <p:cxnSp>
         <p:nvCxnSpPr>
-          <p:cNvPr id="15" name="Connector 14"/>
+          <p:cNvPr id="19" name="Connector 18"/>
           <p:cNvCxnSpPr/>
           <p:nvPr/>
         </p:nvCxnSpPr>
         <p:spPr>
           <a:xfrm>
-            <a:off x="8284464" y="3337560"/>
-            <a:ext cx="0" cy="411479"/>
+            <a:off x="7680959" y="4224528"/>
+            <a:ext cx="411481" cy="0"/>
           </a:xfrm>
           <a:prstGeom prst="line">
             <a:avLst/>
           </a:prstGeom>
-          <a:ln w="19050">
+          <a:ln w="31750">
             <a:solidFill>
               <a:srgbClr val="D06B3D"/>
             </a:solidFill>
@@ -11995,14 +12229,14 @@
       </p:cxnSp>
       <p:sp>
         <p:nvSpPr>
-          <p:cNvPr id="16" name="Rounded Rectangle 15"/>
+          <p:cNvPr id="20" name="Rounded Rectangle 19"/>
           <p:cNvSpPr/>
           <p:nvPr/>
         </p:nvSpPr>
         <p:spPr>
           <a:xfrm>
-            <a:off x="7370064" y="3794760"/>
-            <a:ext cx="1828800" cy="868680"/>
+            <a:off x="8138160" y="3657600"/>
+            <a:ext cx="3200400" cy="1143000"/>
           </a:xfrm>
           <a:prstGeom prst="roundRect">
             <a:avLst>
@@ -12010,11 +12244,11 @@
             </a:avLst>
           </a:prstGeom>
           <a:solidFill>
-            <a:srgbClr val="FBF9F4"/>
+            <a:srgbClr val="76B900"/>
           </a:solidFill>
           <a:ln w="22225">
             <a:solidFill>
-              <a:srgbClr val="D06B3D"/>
+              <a:srgbClr val="76B900"/>
             </a:solidFill>
           </a:ln>
           <a:effectLst/>
@@ -12043,15 +12277,15 @@
               </a:lnSpc>
             </a:pPr>
             <a:r>
-              <a:rPr sz="1700" b="0">
-                <a:solidFill>
-                  <a:srgbClr val="172B27"/>
-                </a:solidFill>
-                <a:latin typeface="Apple SD Gothic Neo"/>
-                <a:ea typeface="Apple SD Gothic Neo"/>
-                <a:cs typeface="Apple SD Gothic Neo"/>
-              </a:rPr>
-              <a:t>건물 배관 유량</a:t>
+              <a:rPr sz="2100" b="1">
+                <a:solidFill>
+                  <a:srgbClr val="FFFFFF"/>
+                </a:solidFill>
+                <a:latin typeface="Apple SD Gothic Neo"/>
+                <a:ea typeface="Apple SD Gothic Neo"/>
+                <a:cs typeface="Apple SD Gothic Neo"/>
+              </a:rPr>
+              <a:t>Ultra</a:t>
             </a:r>
           </a:p>
           <a:p>
@@ -12061,192 +12295,29 @@
               </a:lnSpc>
             </a:pPr>
             <a:r>
-              <a:rPr sz="1800" b="1">
-                <a:solidFill>
-                  <a:srgbClr val="D06B3D"/>
-                </a:solidFill>
-                <a:latin typeface="Apple SD Gothic Neo"/>
-                <a:ea typeface="Apple SD Gothic Neo"/>
-                <a:cs typeface="Apple SD Gothic Neo"/>
-              </a:rPr>
-              <a:t>기록 없음</a:t>
-            </a:r>
-          </a:p>
-        </p:txBody>
-      </p:sp>
-      <p:cxnSp>
-        <p:nvCxnSpPr>
-          <p:cNvPr id="17" name="Connector 16"/>
-          <p:cNvCxnSpPr/>
-          <p:nvPr/>
-        </p:nvCxnSpPr>
-        <p:spPr>
-          <a:xfrm>
-            <a:off x="10497312" y="3337560"/>
-            <a:ext cx="0" cy="411479"/>
-          </a:xfrm>
-          <a:prstGeom prst="line">
-            <a:avLst/>
-          </a:prstGeom>
-          <a:ln w="19050">
-            <a:solidFill>
-              <a:srgbClr val="D06B3D"/>
-            </a:solidFill>
-            <a:tailEnd type="triangle" w="med" len="med"/>
-          </a:ln>
-        </p:spPr>
-        <p:style>
-          <a:lnRef idx="2">
-            <a:schemeClr val="accent1"/>
-          </a:lnRef>
-          <a:fillRef idx="0">
-            <a:schemeClr val="accent1"/>
-          </a:fillRef>
-          <a:effectRef idx="1">
-            <a:schemeClr val="accent1"/>
-          </a:effectRef>
-          <a:fontRef idx="minor">
-            <a:schemeClr val="tx1"/>
-          </a:fontRef>
-        </p:style>
-      </p:cxnSp>
-      <p:sp>
-        <p:nvSpPr>
-          <p:cNvPr id="18" name="Rounded Rectangle 17"/>
-          <p:cNvSpPr/>
-          <p:nvPr/>
-        </p:nvSpPr>
-        <p:spPr>
-          <a:xfrm>
-            <a:off x="9582912" y="3794760"/>
-            <a:ext cx="1828800" cy="868680"/>
-          </a:xfrm>
-          <a:prstGeom prst="roundRect">
-            <a:avLst>
-              <a:gd name="adj" fmla="val 12000"/>
-            </a:avLst>
-          </a:prstGeom>
-          <a:solidFill>
-            <a:srgbClr val="FBF9F4"/>
-          </a:solidFill>
-          <a:ln w="22225">
-            <a:solidFill>
-              <a:srgbClr val="D06B3D"/>
-            </a:solidFill>
-          </a:ln>
-          <a:effectLst/>
-        </p:spPr>
-        <p:style>
-          <a:lnRef idx="1">
-            <a:schemeClr val="accent1"/>
-          </a:lnRef>
-          <a:fillRef idx="3">
-            <a:schemeClr val="accent1"/>
-          </a:fillRef>
-          <a:effectRef idx="2">
-            <a:schemeClr val="accent1"/>
-          </a:effectRef>
-          <a:fontRef idx="minor">
-            <a:schemeClr val="lt1"/>
-          </a:fontRef>
-        </p:style>
-        <p:txBody>
-          <a:bodyPr rtlCol="0" anchor="ctr" wrap="square"/>
-          <a:lstStyle/>
-          <a:p>
-            <a:pPr algn="ctr">
-              <a:lnSpc>
-                <a:spcPct val="115000"/>
-              </a:lnSpc>
-            </a:pPr>
-            <a:r>
-              <a:rPr sz="1700" b="0">
-                <a:solidFill>
-                  <a:srgbClr val="172B27"/>
-                </a:solidFill>
-                <a:latin typeface="Apple SD Gothic Neo"/>
-                <a:ea typeface="Apple SD Gothic Neo"/>
-                <a:cs typeface="Apple SD Gothic Neo"/>
-              </a:rPr>
-              <a:t>실내 온도</a:t>
-            </a:r>
-          </a:p>
-          <a:p>
-            <a:pPr algn="ctr">
-              <a:lnSpc>
-                <a:spcPct val="115000"/>
-              </a:lnSpc>
-            </a:pPr>
-            <a:r>
-              <a:rPr sz="1800" b="1">
-                <a:solidFill>
-                  <a:srgbClr val="D06B3D"/>
-                </a:solidFill>
-                <a:latin typeface="Apple SD Gothic Neo"/>
-                <a:ea typeface="Apple SD Gothic Neo"/>
-                <a:cs typeface="Apple SD Gothic Neo"/>
-              </a:rPr>
-              <a:t>기록 없음</a:t>
-            </a:r>
-          </a:p>
-        </p:txBody>
-      </p:sp>
-      <p:sp>
-        <p:nvSpPr>
-          <p:cNvPr id="19" name="Rounded Rectangle 18"/>
-          <p:cNvSpPr/>
-          <p:nvPr/>
-        </p:nvSpPr>
-        <p:spPr>
-          <a:xfrm>
-            <a:off x="731520" y="5166360"/>
-            <a:ext cx="10698480" cy="868680"/>
-          </a:xfrm>
-          <a:prstGeom prst="roundRect">
-            <a:avLst>
-              <a:gd name="adj" fmla="val 12000"/>
-            </a:avLst>
-          </a:prstGeom>
-          <a:solidFill>
-            <a:srgbClr val="F1EEE6"/>
-          </a:solidFill>
-          <a:ln>
-            <a:noFill/>
-          </a:ln>
-          <a:effectLst/>
-        </p:spPr>
-        <p:style>
-          <a:lnRef idx="1">
-            <a:schemeClr val="accent1"/>
-          </a:lnRef>
-          <a:fillRef idx="3">
-            <a:schemeClr val="accent1"/>
-          </a:fillRef>
-          <a:effectRef idx="2">
-            <a:schemeClr val="accent1"/>
-          </a:effectRef>
-          <a:fontRef idx="minor">
-            <a:schemeClr val="lt1"/>
-          </a:fontRef>
-        </p:style>
-        <p:txBody>
-          <a:bodyPr rtlCol="0" anchor="ctr" wrap="square"/>
-          <a:lstStyle/>
-          <a:p>
-            <a:pPr algn="ctr"/>
-          </a:p>
-        </p:txBody>
-      </p:sp>
-      <p:sp>
-        <p:nvSpPr>
-          <p:cNvPr id="20" name="TextBox 19"/>
+              <a:rPr sz="1600" b="0">
+                <a:solidFill>
+                  <a:srgbClr val="FFFFFF"/>
+                </a:solidFill>
+                <a:latin typeface="Apple SD Gothic Neo"/>
+                <a:ea typeface="Apple SD Gothic Neo"/>
+                <a:cs typeface="Apple SD Gothic Neo"/>
+              </a:rPr>
+              <a:t>선별된 사건만 조사</a:t>
+            </a:r>
+          </a:p>
+        </p:txBody>
+      </p:sp>
+      <p:sp>
+        <p:nvSpPr>
+          <p:cNvPr id="21" name="TextBox 20"/>
           <p:cNvSpPr txBox="1"/>
           <p:nvPr/>
         </p:nvSpPr>
         <p:spPr>
           <a:xfrm>
-            <a:off x="1097280" y="5166360"/>
-            <a:ext cx="10058400" cy="868680"/>
+            <a:off x="731520" y="5074920"/>
+            <a:ext cx="10698480" cy="1097280"/>
           </a:xfrm>
           <a:prstGeom prst="rect">
             <a:avLst/>
@@ -12254,7 +12325,7 @@
           <a:noFill/>
         </p:spPr>
         <p:txBody>
-          <a:bodyPr wrap="square" lIns="18288" rIns="18288" tIns="18288" bIns="18288" anchor="ctr">
+          <a:bodyPr wrap="square" lIns="18288" rIns="18288" tIns="18288" bIns="18288" anchor="t">
             <a:spAutoFit/>
           </a:bodyPr>
           <a:lstStyle/>
@@ -12265,22 +12336,40 @@
               </a:lnSpc>
             </a:pPr>
             <a:r>
-              <a:rPr sz="2400" b="1">
-                <a:solidFill>
-                  <a:srgbClr val="244E41"/>
-                </a:solidFill>
-                <a:latin typeface="Apple SD Gothic Neo"/>
-                <a:ea typeface="Apple SD Gothic Neo"/>
-                <a:cs typeface="Apple SD Gothic Neo"/>
-              </a:rPr>
-              <a:t>샤워기 물이 뜨거워도, 수압이 약하면 씻기 어렵다</a:t>
-            </a:r>
-          </a:p>
-        </p:txBody>
-      </p:sp>
-      <p:sp>
-        <p:nvSpPr>
-          <p:cNvPr id="21" name="TextBox 20"/>
+              <a:rPr sz="2100" b="1">
+                <a:solidFill>
+                  <a:srgbClr val="172B27"/>
+                </a:solidFill>
+                <a:latin typeface="Apple SD Gothic Neo"/>
+                <a:ea typeface="Apple SD Gothic Neo"/>
+                <a:cs typeface="Apple SD Gothic Neo"/>
+              </a:rPr>
+              <a:t>원시 데이터를 전부 큰 모델에 보내지 않는다</a:t>
+            </a:r>
+          </a:p>
+          <a:p>
+            <a:pPr algn="l">
+              <a:lnSpc>
+                <a:spcPct val="115000"/>
+              </a:lnSpc>
+            </a:pPr>
+            <a:r>
+              <a:rPr sz="1600" b="0">
+                <a:solidFill>
+                  <a:srgbClr val="62736A"/>
+                </a:solidFill>
+                <a:latin typeface="Apple SD Gothic Neo"/>
+                <a:ea typeface="Apple SD Gothic Neo"/>
+                <a:cs typeface="Apple SD Gothic Neo"/>
+              </a:rPr>
+              <a:t>현재 로컬 Nano 요청 6.3~11.5초 → 병목 가능, 부하 시험이 다음 과제</a:t>
+            </a:r>
+          </a:p>
+        </p:txBody>
+      </p:sp>
+      <p:sp>
+        <p:nvSpPr>
+          <p:cNvPr id="22" name="TextBox 21"/>
           <p:cNvSpPr txBox="1"/>
           <p:nvPr/>
         </p:nvSpPr>
@@ -12381,7 +12470,7 @@
                 <a:ea typeface="Apple SD Gothic Neo"/>
                 <a:cs typeface="Apple SD Gothic Neo"/>
               </a:rPr>
-              <a:t>사례 29 · 공개 데이터 PreDist v2</a:t>
+              <a:t>고객 데이터는 비공개 → 공개 데이터로 벤치마크 구성</a:t>
             </a:r>
           </a:p>
         </p:txBody>
@@ -12422,21 +12511,947 @@
                 <a:ea typeface="Apple SD Gothic Neo"/>
                 <a:cs typeface="Apple SD Gothic Neo"/>
               </a:rPr>
-              <a:t>실제 신고: "난방이 안 된다"</a:t>
-            </a:r>
-          </a:p>
-        </p:txBody>
-      </p:sp>
-      <p:sp>
-        <p:nvSpPr>
-          <p:cNvPr id="4" name="TextBox 3"/>
+              <a:t>데이터: 공개 PreDist v2 (지역난방)</a:t>
+            </a:r>
+          </a:p>
+        </p:txBody>
+      </p:sp>
+      <p:sp>
+        <p:nvSpPr>
+          <p:cNvPr id="4" name="Rounded Rectangle 3"/>
+          <p:cNvSpPr/>
+          <p:nvPr/>
+        </p:nvSpPr>
+        <p:spPr>
+          <a:xfrm>
+            <a:off x="731520" y="2148840"/>
+            <a:ext cx="1828800" cy="1143000"/>
+          </a:xfrm>
+          <a:prstGeom prst="roundRect">
+            <a:avLst>
+              <a:gd name="adj" fmla="val 12000"/>
+            </a:avLst>
+          </a:prstGeom>
+          <a:solidFill>
+            <a:srgbClr val="FFFFFF"/>
+          </a:solidFill>
+          <a:ln w="15875">
+            <a:solidFill>
+              <a:srgbClr val="BFC8BF"/>
+            </a:solidFill>
+          </a:ln>
+          <a:effectLst/>
+        </p:spPr>
+        <p:style>
+          <a:lnRef idx="1">
+            <a:schemeClr val="accent1"/>
+          </a:lnRef>
+          <a:fillRef idx="3">
+            <a:schemeClr val="accent1"/>
+          </a:fillRef>
+          <a:effectRef idx="2">
+            <a:schemeClr val="accent1"/>
+          </a:effectRef>
+          <a:fontRef idx="minor">
+            <a:schemeClr val="lt1"/>
+          </a:fontRef>
+        </p:style>
+        <p:txBody>
+          <a:bodyPr rtlCol="0" anchor="ctr" wrap="square"/>
+          <a:lstStyle/>
+          <a:p>
+            <a:pPr algn="ctr">
+              <a:lnSpc>
+                <a:spcPct val="115000"/>
+              </a:lnSpc>
+            </a:pPr>
+            <a:r>
+              <a:rPr sz="1900" b="0">
+                <a:solidFill>
+                  <a:srgbClr val="172B27"/>
+                </a:solidFill>
+                <a:latin typeface="Apple SD Gothic Neo"/>
+                <a:ea typeface="Apple SD Gothic Neo"/>
+                <a:cs typeface="Apple SD Gothic Neo"/>
+              </a:rPr>
+              <a:t>열 생산 시설</a:t>
+            </a:r>
+          </a:p>
+        </p:txBody>
+      </p:sp>
+      <p:cxnSp>
+        <p:nvCxnSpPr>
+          <p:cNvPr id="5" name="Connector 4"/>
+          <p:cNvCxnSpPr/>
+          <p:nvPr/>
+        </p:nvCxnSpPr>
+        <p:spPr>
+          <a:xfrm>
+            <a:off x="2596896" y="2715768"/>
+            <a:ext cx="310895" cy="0"/>
+          </a:xfrm>
+          <a:prstGeom prst="line">
+            <a:avLst/>
+          </a:prstGeom>
+          <a:ln w="31750">
+            <a:solidFill>
+              <a:srgbClr val="D06B3D"/>
+            </a:solidFill>
+            <a:tailEnd type="triangle" w="med" len="med"/>
+          </a:ln>
+        </p:spPr>
+        <p:style>
+          <a:lnRef idx="2">
+            <a:schemeClr val="accent1"/>
+          </a:lnRef>
+          <a:fillRef idx="0">
+            <a:schemeClr val="accent1"/>
+          </a:fillRef>
+          <a:effectRef idx="1">
+            <a:schemeClr val="accent1"/>
+          </a:effectRef>
+          <a:fontRef idx="minor">
+            <a:schemeClr val="tx1"/>
+          </a:fontRef>
+        </p:style>
+      </p:cxnSp>
+      <p:sp>
+        <p:nvSpPr>
+          <p:cNvPr id="6" name="Rounded Rectangle 5"/>
+          <p:cNvSpPr/>
+          <p:nvPr/>
+        </p:nvSpPr>
+        <p:spPr>
+          <a:xfrm>
+            <a:off x="2944368" y="2148840"/>
+            <a:ext cx="1828800" cy="1143000"/>
+          </a:xfrm>
+          <a:prstGeom prst="roundRect">
+            <a:avLst>
+              <a:gd name="adj" fmla="val 12000"/>
+            </a:avLst>
+          </a:prstGeom>
+          <a:solidFill>
+            <a:srgbClr val="FFFFFF"/>
+          </a:solidFill>
+          <a:ln w="15875">
+            <a:solidFill>
+              <a:srgbClr val="BFC8BF"/>
+            </a:solidFill>
+          </a:ln>
+          <a:effectLst/>
+        </p:spPr>
+        <p:style>
+          <a:lnRef idx="1">
+            <a:schemeClr val="accent1"/>
+          </a:lnRef>
+          <a:fillRef idx="3">
+            <a:schemeClr val="accent1"/>
+          </a:fillRef>
+          <a:effectRef idx="2">
+            <a:schemeClr val="accent1"/>
+          </a:effectRef>
+          <a:fontRef idx="minor">
+            <a:schemeClr val="lt1"/>
+          </a:fontRef>
+        </p:style>
+        <p:txBody>
+          <a:bodyPr rtlCol="0" anchor="ctr" wrap="square"/>
+          <a:lstStyle/>
+          <a:p>
+            <a:pPr algn="ctr">
+              <a:lnSpc>
+                <a:spcPct val="115000"/>
+              </a:lnSpc>
+            </a:pPr>
+            <a:r>
+              <a:rPr sz="1900" b="0">
+                <a:solidFill>
+                  <a:srgbClr val="172B27"/>
+                </a:solidFill>
+                <a:latin typeface="Apple SD Gothic Neo"/>
+                <a:ea typeface="Apple SD Gothic Neo"/>
+                <a:cs typeface="Apple SD Gothic Neo"/>
+              </a:rPr>
+              <a:t>도시 배관</a:t>
+            </a:r>
+          </a:p>
+          <a:p>
+            <a:pPr algn="ctr">
+              <a:lnSpc>
+                <a:spcPct val="115000"/>
+              </a:lnSpc>
+            </a:pPr>
+            <a:r>
+              <a:rPr sz="1900" b="0">
+                <a:solidFill>
+                  <a:srgbClr val="172B27"/>
+                </a:solidFill>
+                <a:latin typeface="Apple SD Gothic Neo"/>
+                <a:ea typeface="Apple SD Gothic Neo"/>
+                <a:cs typeface="Apple SD Gothic Neo"/>
+              </a:rPr>
+              <a:t>(1차)</a:t>
+            </a:r>
+          </a:p>
+        </p:txBody>
+      </p:sp>
+      <p:cxnSp>
+        <p:nvCxnSpPr>
+          <p:cNvPr id="7" name="Connector 6"/>
+          <p:cNvCxnSpPr/>
+          <p:nvPr/>
+        </p:nvCxnSpPr>
+        <p:spPr>
+          <a:xfrm>
+            <a:off x="4809744" y="2715768"/>
+            <a:ext cx="310896" cy="0"/>
+          </a:xfrm>
+          <a:prstGeom prst="line">
+            <a:avLst/>
+          </a:prstGeom>
+          <a:ln w="31750">
+            <a:solidFill>
+              <a:srgbClr val="D06B3D"/>
+            </a:solidFill>
+            <a:tailEnd type="triangle" w="med" len="med"/>
+          </a:ln>
+        </p:spPr>
+        <p:style>
+          <a:lnRef idx="2">
+            <a:schemeClr val="accent1"/>
+          </a:lnRef>
+          <a:fillRef idx="0">
+            <a:schemeClr val="accent1"/>
+          </a:fillRef>
+          <a:effectRef idx="1">
+            <a:schemeClr val="accent1"/>
+          </a:effectRef>
+          <a:fontRef idx="minor">
+            <a:schemeClr val="tx1"/>
+          </a:fontRef>
+        </p:style>
+      </p:cxnSp>
+      <p:sp>
+        <p:nvSpPr>
+          <p:cNvPr id="8" name="Rounded Rectangle 7"/>
+          <p:cNvSpPr/>
+          <p:nvPr/>
+        </p:nvSpPr>
+        <p:spPr>
+          <a:xfrm>
+            <a:off x="5157216" y="2148840"/>
+            <a:ext cx="1828800" cy="1143000"/>
+          </a:xfrm>
+          <a:prstGeom prst="roundRect">
+            <a:avLst>
+              <a:gd name="adj" fmla="val 12000"/>
+            </a:avLst>
+          </a:prstGeom>
+          <a:solidFill>
+            <a:srgbClr val="244E41"/>
+          </a:solidFill>
+          <a:ln>
+            <a:noFill/>
+          </a:ln>
+          <a:effectLst/>
+        </p:spPr>
+        <p:style>
+          <a:lnRef idx="1">
+            <a:schemeClr val="accent1"/>
+          </a:lnRef>
+          <a:fillRef idx="3">
+            <a:schemeClr val="accent1"/>
+          </a:fillRef>
+          <a:effectRef idx="2">
+            <a:schemeClr val="accent1"/>
+          </a:effectRef>
+          <a:fontRef idx="minor">
+            <a:schemeClr val="lt1"/>
+          </a:fontRef>
+        </p:style>
+        <p:txBody>
+          <a:bodyPr rtlCol="0" anchor="ctr" wrap="square"/>
+          <a:lstStyle/>
+          <a:p>
+            <a:pPr algn="ctr">
+              <a:lnSpc>
+                <a:spcPct val="115000"/>
+              </a:lnSpc>
+            </a:pPr>
+            <a:r>
+              <a:rPr sz="1900" b="1">
+                <a:solidFill>
+                  <a:srgbClr val="FFFFFF"/>
+                </a:solidFill>
+                <a:latin typeface="Apple SD Gothic Neo"/>
+                <a:ea typeface="Apple SD Gothic Neo"/>
+                <a:cs typeface="Apple SD Gothic Neo"/>
+              </a:rPr>
+              <a:t>서브스테이션</a:t>
+            </a:r>
+          </a:p>
+          <a:p>
+            <a:pPr algn="ctr">
+              <a:lnSpc>
+                <a:spcPct val="115000"/>
+              </a:lnSpc>
+            </a:pPr>
+            <a:r>
+              <a:rPr sz="1900" b="1">
+                <a:solidFill>
+                  <a:srgbClr val="FFFFFF"/>
+                </a:solidFill>
+                <a:latin typeface="Apple SD Gothic Neo"/>
+                <a:ea typeface="Apple SD Gothic Neo"/>
+                <a:cs typeface="Apple SD Gothic Neo"/>
+              </a:rPr>
+              <a:t>(열교환)</a:t>
+            </a:r>
+          </a:p>
+        </p:txBody>
+      </p:sp>
+      <p:cxnSp>
+        <p:nvCxnSpPr>
+          <p:cNvPr id="9" name="Connector 8"/>
+          <p:cNvCxnSpPr/>
+          <p:nvPr/>
+        </p:nvCxnSpPr>
+        <p:spPr>
+          <a:xfrm>
+            <a:off x="7022592" y="2715768"/>
+            <a:ext cx="310896" cy="0"/>
+          </a:xfrm>
+          <a:prstGeom prst="line">
+            <a:avLst/>
+          </a:prstGeom>
+          <a:ln w="31750">
+            <a:solidFill>
+              <a:srgbClr val="D06B3D"/>
+            </a:solidFill>
+            <a:tailEnd type="triangle" w="med" len="med"/>
+          </a:ln>
+        </p:spPr>
+        <p:style>
+          <a:lnRef idx="2">
+            <a:schemeClr val="accent1"/>
+          </a:lnRef>
+          <a:fillRef idx="0">
+            <a:schemeClr val="accent1"/>
+          </a:fillRef>
+          <a:effectRef idx="1">
+            <a:schemeClr val="accent1"/>
+          </a:effectRef>
+          <a:fontRef idx="minor">
+            <a:schemeClr val="tx1"/>
+          </a:fontRef>
+        </p:style>
+      </p:cxnSp>
+      <p:sp>
+        <p:nvSpPr>
+          <p:cNvPr id="10" name="Rounded Rectangle 9"/>
+          <p:cNvSpPr/>
+          <p:nvPr/>
+        </p:nvSpPr>
+        <p:spPr>
+          <a:xfrm>
+            <a:off x="7370064" y="2148840"/>
+            <a:ext cx="1828800" cy="1143000"/>
+          </a:xfrm>
+          <a:prstGeom prst="roundRect">
+            <a:avLst>
+              <a:gd name="adj" fmla="val 12000"/>
+            </a:avLst>
+          </a:prstGeom>
+          <a:solidFill>
+            <a:srgbClr val="FFFFFF"/>
+          </a:solidFill>
+          <a:ln w="15875">
+            <a:solidFill>
+              <a:srgbClr val="BFC8BF"/>
+            </a:solidFill>
+          </a:ln>
+          <a:effectLst/>
+        </p:spPr>
+        <p:style>
+          <a:lnRef idx="1">
+            <a:schemeClr val="accent1"/>
+          </a:lnRef>
+          <a:fillRef idx="3">
+            <a:schemeClr val="accent1"/>
+          </a:fillRef>
+          <a:effectRef idx="2">
+            <a:schemeClr val="accent1"/>
+          </a:effectRef>
+          <a:fontRef idx="minor">
+            <a:schemeClr val="lt1"/>
+          </a:fontRef>
+        </p:style>
+        <p:txBody>
+          <a:bodyPr rtlCol="0" anchor="ctr" wrap="square"/>
+          <a:lstStyle/>
+          <a:p>
+            <a:pPr algn="ctr">
+              <a:lnSpc>
+                <a:spcPct val="115000"/>
+              </a:lnSpc>
+            </a:pPr>
+            <a:r>
+              <a:rPr sz="1900" b="0">
+                <a:solidFill>
+                  <a:srgbClr val="172B27"/>
+                </a:solidFill>
+                <a:latin typeface="Apple SD Gothic Neo"/>
+                <a:ea typeface="Apple SD Gothic Neo"/>
+                <a:cs typeface="Apple SD Gothic Neo"/>
+              </a:rPr>
+              <a:t>건물 배관</a:t>
+            </a:r>
+          </a:p>
+          <a:p>
+            <a:pPr algn="ctr">
+              <a:lnSpc>
+                <a:spcPct val="115000"/>
+              </a:lnSpc>
+            </a:pPr>
+            <a:r>
+              <a:rPr sz="1900" b="0">
+                <a:solidFill>
+                  <a:srgbClr val="172B27"/>
+                </a:solidFill>
+                <a:latin typeface="Apple SD Gothic Neo"/>
+                <a:ea typeface="Apple SD Gothic Neo"/>
+                <a:cs typeface="Apple SD Gothic Neo"/>
+              </a:rPr>
+              <a:t>(2차)</a:t>
+            </a:r>
+          </a:p>
+        </p:txBody>
+      </p:sp>
+      <p:cxnSp>
+        <p:nvCxnSpPr>
+          <p:cNvPr id="11" name="Connector 10"/>
+          <p:cNvCxnSpPr/>
+          <p:nvPr/>
+        </p:nvCxnSpPr>
+        <p:spPr>
+          <a:xfrm>
+            <a:off x="9235440" y="2715768"/>
+            <a:ext cx="310896" cy="0"/>
+          </a:xfrm>
+          <a:prstGeom prst="line">
+            <a:avLst/>
+          </a:prstGeom>
+          <a:ln w="31750">
+            <a:solidFill>
+              <a:srgbClr val="D06B3D"/>
+            </a:solidFill>
+            <a:tailEnd type="triangle" w="med" len="med"/>
+          </a:ln>
+        </p:spPr>
+        <p:style>
+          <a:lnRef idx="2">
+            <a:schemeClr val="accent1"/>
+          </a:lnRef>
+          <a:fillRef idx="0">
+            <a:schemeClr val="accent1"/>
+          </a:fillRef>
+          <a:effectRef idx="1">
+            <a:schemeClr val="accent1"/>
+          </a:effectRef>
+          <a:fontRef idx="minor">
+            <a:schemeClr val="tx1"/>
+          </a:fontRef>
+        </p:style>
+      </p:cxnSp>
+      <p:sp>
+        <p:nvSpPr>
+          <p:cNvPr id="12" name="Rounded Rectangle 11"/>
+          <p:cNvSpPr/>
+          <p:nvPr/>
+        </p:nvSpPr>
+        <p:spPr>
+          <a:xfrm>
+            <a:off x="9582912" y="2148840"/>
+            <a:ext cx="1828800" cy="1143000"/>
+          </a:xfrm>
+          <a:prstGeom prst="roundRect">
+            <a:avLst>
+              <a:gd name="adj" fmla="val 12000"/>
+            </a:avLst>
+          </a:prstGeom>
+          <a:solidFill>
+            <a:srgbClr val="FFFFFF"/>
+          </a:solidFill>
+          <a:ln w="15875">
+            <a:solidFill>
+              <a:srgbClr val="BFC8BF"/>
+            </a:solidFill>
+          </a:ln>
+          <a:effectLst/>
+        </p:spPr>
+        <p:style>
+          <a:lnRef idx="1">
+            <a:schemeClr val="accent1"/>
+          </a:lnRef>
+          <a:fillRef idx="3">
+            <a:schemeClr val="accent1"/>
+          </a:fillRef>
+          <a:effectRef idx="2">
+            <a:schemeClr val="accent1"/>
+          </a:effectRef>
+          <a:fontRef idx="minor">
+            <a:schemeClr val="lt1"/>
+          </a:fontRef>
+        </p:style>
+        <p:txBody>
+          <a:bodyPr rtlCol="0" anchor="ctr" wrap="square"/>
+          <a:lstStyle/>
+          <a:p>
+            <a:pPr algn="ctr">
+              <a:lnSpc>
+                <a:spcPct val="115000"/>
+              </a:lnSpc>
+            </a:pPr>
+            <a:r>
+              <a:rPr sz="1900" b="0">
+                <a:solidFill>
+                  <a:srgbClr val="172B27"/>
+                </a:solidFill>
+                <a:latin typeface="Apple SD Gothic Neo"/>
+                <a:ea typeface="Apple SD Gothic Neo"/>
+                <a:cs typeface="Apple SD Gothic Neo"/>
+              </a:rPr>
+              <a:t>집 안</a:t>
+            </a:r>
+          </a:p>
+          <a:p>
+            <a:pPr algn="ctr">
+              <a:lnSpc>
+                <a:spcPct val="115000"/>
+              </a:lnSpc>
+            </a:pPr>
+            <a:r>
+              <a:rPr sz="1900" b="0">
+                <a:solidFill>
+                  <a:srgbClr val="172B27"/>
+                </a:solidFill>
+                <a:latin typeface="Apple SD Gothic Neo"/>
+                <a:ea typeface="Apple SD Gothic Neo"/>
+                <a:cs typeface="Apple SD Gothic Neo"/>
+              </a:rPr>
+              <a:t>라디에이터</a:t>
+            </a:r>
+          </a:p>
+        </p:txBody>
+      </p:sp>
+      <p:cxnSp>
+        <p:nvCxnSpPr>
+          <p:cNvPr id="13" name="Connector 12"/>
+          <p:cNvCxnSpPr/>
+          <p:nvPr/>
+        </p:nvCxnSpPr>
+        <p:spPr>
+          <a:xfrm>
+            <a:off x="6071616" y="3337560"/>
+            <a:ext cx="0" cy="411479"/>
+          </a:xfrm>
+          <a:prstGeom prst="line">
+            <a:avLst/>
+          </a:prstGeom>
+          <a:ln w="19050">
+            <a:solidFill>
+              <a:srgbClr val="244E41"/>
+            </a:solidFill>
+            <a:tailEnd type="triangle" w="med" len="med"/>
+          </a:ln>
+        </p:spPr>
+        <p:style>
+          <a:lnRef idx="2">
+            <a:schemeClr val="accent1"/>
+          </a:lnRef>
+          <a:fillRef idx="0">
+            <a:schemeClr val="accent1"/>
+          </a:fillRef>
+          <a:effectRef idx="1">
+            <a:schemeClr val="accent1"/>
+          </a:effectRef>
+          <a:fontRef idx="minor">
+            <a:schemeClr val="tx1"/>
+          </a:fontRef>
+        </p:style>
+      </p:cxnSp>
+      <p:sp>
+        <p:nvSpPr>
+          <p:cNvPr id="14" name="Rounded Rectangle 13"/>
+          <p:cNvSpPr/>
+          <p:nvPr/>
+        </p:nvSpPr>
+        <p:spPr>
+          <a:xfrm>
+            <a:off x="5157216" y="3794760"/>
+            <a:ext cx="1828800" cy="868680"/>
+          </a:xfrm>
+          <a:prstGeom prst="roundRect">
+            <a:avLst>
+              <a:gd name="adj" fmla="val 12000"/>
+            </a:avLst>
+          </a:prstGeom>
+          <a:solidFill>
+            <a:srgbClr val="FBF9F4"/>
+          </a:solidFill>
+          <a:ln w="22225">
+            <a:solidFill>
+              <a:srgbClr val="244E41"/>
+            </a:solidFill>
+          </a:ln>
+          <a:effectLst/>
+        </p:spPr>
+        <p:style>
+          <a:lnRef idx="1">
+            <a:schemeClr val="accent1"/>
+          </a:lnRef>
+          <a:fillRef idx="3">
+            <a:schemeClr val="accent1"/>
+          </a:fillRef>
+          <a:effectRef idx="2">
+            <a:schemeClr val="accent1"/>
+          </a:effectRef>
+          <a:fontRef idx="minor">
+            <a:schemeClr val="lt1"/>
+          </a:fontRef>
+        </p:style>
+        <p:txBody>
+          <a:bodyPr rtlCol="0" anchor="ctr" wrap="square"/>
+          <a:lstStyle/>
+          <a:p>
+            <a:pPr algn="ctr">
+              <a:lnSpc>
+                <a:spcPct val="115000"/>
+              </a:lnSpc>
+            </a:pPr>
+            <a:r>
+              <a:rPr sz="1700" b="0">
+                <a:solidFill>
+                  <a:srgbClr val="172B27"/>
+                </a:solidFill>
+                <a:latin typeface="Apple SD Gothic Neo"/>
+                <a:ea typeface="Apple SD Gothic Neo"/>
+                <a:cs typeface="Apple SD Gothic Neo"/>
+              </a:rPr>
+              <a:t>공급온도 센서</a:t>
+            </a:r>
+          </a:p>
+          <a:p>
+            <a:pPr algn="ctr">
+              <a:lnSpc>
+                <a:spcPct val="115000"/>
+              </a:lnSpc>
+            </a:pPr>
+            <a:r>
+              <a:rPr sz="1800" b="1">
+                <a:solidFill>
+                  <a:srgbClr val="244E41"/>
+                </a:solidFill>
+                <a:latin typeface="Apple SD Gothic Neo"/>
+                <a:ea typeface="Apple SD Gothic Neo"/>
+                <a:cs typeface="Apple SD Gothic Neo"/>
+              </a:rPr>
+              <a:t>기록 있음</a:t>
+            </a:r>
+          </a:p>
+        </p:txBody>
+      </p:sp>
+      <p:cxnSp>
+        <p:nvCxnSpPr>
+          <p:cNvPr id="15" name="Connector 14"/>
+          <p:cNvCxnSpPr/>
+          <p:nvPr/>
+        </p:nvCxnSpPr>
+        <p:spPr>
+          <a:xfrm>
+            <a:off x="8284464" y="3337560"/>
+            <a:ext cx="0" cy="411479"/>
+          </a:xfrm>
+          <a:prstGeom prst="line">
+            <a:avLst/>
+          </a:prstGeom>
+          <a:ln w="19050">
+            <a:solidFill>
+              <a:srgbClr val="D06B3D"/>
+            </a:solidFill>
+            <a:tailEnd type="triangle" w="med" len="med"/>
+          </a:ln>
+        </p:spPr>
+        <p:style>
+          <a:lnRef idx="2">
+            <a:schemeClr val="accent1"/>
+          </a:lnRef>
+          <a:fillRef idx="0">
+            <a:schemeClr val="accent1"/>
+          </a:fillRef>
+          <a:effectRef idx="1">
+            <a:schemeClr val="accent1"/>
+          </a:effectRef>
+          <a:fontRef idx="minor">
+            <a:schemeClr val="tx1"/>
+          </a:fontRef>
+        </p:style>
+      </p:cxnSp>
+      <p:sp>
+        <p:nvSpPr>
+          <p:cNvPr id="16" name="Rounded Rectangle 15"/>
+          <p:cNvSpPr/>
+          <p:nvPr/>
+        </p:nvSpPr>
+        <p:spPr>
+          <a:xfrm>
+            <a:off x="7370064" y="3794760"/>
+            <a:ext cx="1828800" cy="868680"/>
+          </a:xfrm>
+          <a:prstGeom prst="roundRect">
+            <a:avLst>
+              <a:gd name="adj" fmla="val 12000"/>
+            </a:avLst>
+          </a:prstGeom>
+          <a:solidFill>
+            <a:srgbClr val="FBF9F4"/>
+          </a:solidFill>
+          <a:ln w="22225">
+            <a:solidFill>
+              <a:srgbClr val="D06B3D"/>
+            </a:solidFill>
+          </a:ln>
+          <a:effectLst/>
+        </p:spPr>
+        <p:style>
+          <a:lnRef idx="1">
+            <a:schemeClr val="accent1"/>
+          </a:lnRef>
+          <a:fillRef idx="3">
+            <a:schemeClr val="accent1"/>
+          </a:fillRef>
+          <a:effectRef idx="2">
+            <a:schemeClr val="accent1"/>
+          </a:effectRef>
+          <a:fontRef idx="minor">
+            <a:schemeClr val="lt1"/>
+          </a:fontRef>
+        </p:style>
+        <p:txBody>
+          <a:bodyPr rtlCol="0" anchor="ctr" wrap="square"/>
+          <a:lstStyle/>
+          <a:p>
+            <a:pPr algn="ctr">
+              <a:lnSpc>
+                <a:spcPct val="115000"/>
+              </a:lnSpc>
+            </a:pPr>
+            <a:r>
+              <a:rPr sz="1700" b="0">
+                <a:solidFill>
+                  <a:srgbClr val="172B27"/>
+                </a:solidFill>
+                <a:latin typeface="Apple SD Gothic Neo"/>
+                <a:ea typeface="Apple SD Gothic Neo"/>
+                <a:cs typeface="Apple SD Gothic Neo"/>
+              </a:rPr>
+              <a:t>건물 배관 유량</a:t>
+            </a:r>
+          </a:p>
+          <a:p>
+            <a:pPr algn="ctr">
+              <a:lnSpc>
+                <a:spcPct val="115000"/>
+              </a:lnSpc>
+            </a:pPr>
+            <a:r>
+              <a:rPr sz="1800" b="1">
+                <a:solidFill>
+                  <a:srgbClr val="D06B3D"/>
+                </a:solidFill>
+                <a:latin typeface="Apple SD Gothic Neo"/>
+                <a:ea typeface="Apple SD Gothic Neo"/>
+                <a:cs typeface="Apple SD Gothic Neo"/>
+              </a:rPr>
+              <a:t>기록 없음</a:t>
+            </a:r>
+          </a:p>
+        </p:txBody>
+      </p:sp>
+      <p:cxnSp>
+        <p:nvCxnSpPr>
+          <p:cNvPr id="17" name="Connector 16"/>
+          <p:cNvCxnSpPr/>
+          <p:nvPr/>
+        </p:nvCxnSpPr>
+        <p:spPr>
+          <a:xfrm>
+            <a:off x="10497312" y="3337560"/>
+            <a:ext cx="0" cy="411479"/>
+          </a:xfrm>
+          <a:prstGeom prst="line">
+            <a:avLst/>
+          </a:prstGeom>
+          <a:ln w="19050">
+            <a:solidFill>
+              <a:srgbClr val="D06B3D"/>
+            </a:solidFill>
+            <a:tailEnd type="triangle" w="med" len="med"/>
+          </a:ln>
+        </p:spPr>
+        <p:style>
+          <a:lnRef idx="2">
+            <a:schemeClr val="accent1"/>
+          </a:lnRef>
+          <a:fillRef idx="0">
+            <a:schemeClr val="accent1"/>
+          </a:fillRef>
+          <a:effectRef idx="1">
+            <a:schemeClr val="accent1"/>
+          </a:effectRef>
+          <a:fontRef idx="minor">
+            <a:schemeClr val="tx1"/>
+          </a:fontRef>
+        </p:style>
+      </p:cxnSp>
+      <p:sp>
+        <p:nvSpPr>
+          <p:cNvPr id="18" name="Rounded Rectangle 17"/>
+          <p:cNvSpPr/>
+          <p:nvPr/>
+        </p:nvSpPr>
+        <p:spPr>
+          <a:xfrm>
+            <a:off x="9582912" y="3794760"/>
+            <a:ext cx="1828800" cy="868680"/>
+          </a:xfrm>
+          <a:prstGeom prst="roundRect">
+            <a:avLst>
+              <a:gd name="adj" fmla="val 12000"/>
+            </a:avLst>
+          </a:prstGeom>
+          <a:solidFill>
+            <a:srgbClr val="FBF9F4"/>
+          </a:solidFill>
+          <a:ln w="22225">
+            <a:solidFill>
+              <a:srgbClr val="D06B3D"/>
+            </a:solidFill>
+          </a:ln>
+          <a:effectLst/>
+        </p:spPr>
+        <p:style>
+          <a:lnRef idx="1">
+            <a:schemeClr val="accent1"/>
+          </a:lnRef>
+          <a:fillRef idx="3">
+            <a:schemeClr val="accent1"/>
+          </a:fillRef>
+          <a:effectRef idx="2">
+            <a:schemeClr val="accent1"/>
+          </a:effectRef>
+          <a:fontRef idx="minor">
+            <a:schemeClr val="lt1"/>
+          </a:fontRef>
+        </p:style>
+        <p:txBody>
+          <a:bodyPr rtlCol="0" anchor="ctr" wrap="square"/>
+          <a:lstStyle/>
+          <a:p>
+            <a:pPr algn="ctr">
+              <a:lnSpc>
+                <a:spcPct val="115000"/>
+              </a:lnSpc>
+            </a:pPr>
+            <a:r>
+              <a:rPr sz="1700" b="0">
+                <a:solidFill>
+                  <a:srgbClr val="172B27"/>
+                </a:solidFill>
+                <a:latin typeface="Apple SD Gothic Neo"/>
+                <a:ea typeface="Apple SD Gothic Neo"/>
+                <a:cs typeface="Apple SD Gothic Neo"/>
+              </a:rPr>
+              <a:t>실내 온도</a:t>
+            </a:r>
+          </a:p>
+          <a:p>
+            <a:pPr algn="ctr">
+              <a:lnSpc>
+                <a:spcPct val="115000"/>
+              </a:lnSpc>
+            </a:pPr>
+            <a:r>
+              <a:rPr sz="1800" b="1">
+                <a:solidFill>
+                  <a:srgbClr val="D06B3D"/>
+                </a:solidFill>
+                <a:latin typeface="Apple SD Gothic Neo"/>
+                <a:ea typeface="Apple SD Gothic Neo"/>
+                <a:cs typeface="Apple SD Gothic Neo"/>
+              </a:rPr>
+              <a:t>기록 없음</a:t>
+            </a:r>
+          </a:p>
+        </p:txBody>
+      </p:sp>
+      <p:sp>
+        <p:nvSpPr>
+          <p:cNvPr id="19" name="Rounded Rectangle 18"/>
+          <p:cNvSpPr/>
+          <p:nvPr/>
+        </p:nvSpPr>
+        <p:spPr>
+          <a:xfrm>
+            <a:off x="731520" y="5166360"/>
+            <a:ext cx="10698480" cy="868680"/>
+          </a:xfrm>
+          <a:prstGeom prst="roundRect">
+            <a:avLst>
+              <a:gd name="adj" fmla="val 12000"/>
+            </a:avLst>
+          </a:prstGeom>
+          <a:solidFill>
+            <a:srgbClr val="F1EEE6"/>
+          </a:solidFill>
+          <a:ln>
+            <a:noFill/>
+          </a:ln>
+          <a:effectLst/>
+        </p:spPr>
+        <p:style>
+          <a:lnRef idx="1">
+            <a:schemeClr val="accent1"/>
+          </a:lnRef>
+          <a:fillRef idx="3">
+            <a:schemeClr val="accent1"/>
+          </a:fillRef>
+          <a:effectRef idx="2">
+            <a:schemeClr val="accent1"/>
+          </a:effectRef>
+          <a:fontRef idx="minor">
+            <a:schemeClr val="lt1"/>
+          </a:fontRef>
+        </p:style>
+        <p:txBody>
+          <a:bodyPr rtlCol="0" anchor="ctr" wrap="square"/>
+          <a:lstStyle/>
+          <a:p>
+            <a:pPr algn="ctr"/>
+          </a:p>
+        </p:txBody>
+      </p:sp>
+      <p:sp>
+        <p:nvSpPr>
+          <p:cNvPr id="20" name="TextBox 19"/>
           <p:cNvSpPr txBox="1"/>
           <p:nvPr/>
         </p:nvSpPr>
         <p:spPr>
           <a:xfrm>
-            <a:off x="731520" y="1783080"/>
-            <a:ext cx="3657600" cy="365760"/>
+            <a:off x="1097280" y="5166360"/>
+            <a:ext cx="10058400" cy="868680"/>
           </a:xfrm>
           <a:prstGeom prst="rect">
             <a:avLst/>
@@ -12444,7 +13459,7 @@
           <a:noFill/>
         </p:spPr>
         <p:txBody>
-          <a:bodyPr wrap="square" lIns="18288" rIns="18288" tIns="18288" bIns="18288" anchor="t">
+          <a:bodyPr wrap="square" lIns="18288" rIns="18288" tIns="18288" bIns="18288" anchor="ctr">
             <a:spAutoFit/>
           </a:bodyPr>
           <a:lstStyle/>
@@ -12455,48 +13470,7 @@
               </a:lnSpc>
             </a:pPr>
             <a:r>
-              <a:rPr sz="1800" b="0">
-                <a:solidFill>
-                  <a:srgbClr val="62736A"/>
-                </a:solidFill>
-                <a:latin typeface="Apple SD Gothic Neo"/>
-                <a:ea typeface="Apple SD Gothic Neo"/>
-                <a:cs typeface="Apple SD Gothic Neo"/>
-              </a:rPr>
-              <a:t>신고 직전 마지막 계측 (14:10)</a:t>
-            </a:r>
-          </a:p>
-        </p:txBody>
-      </p:sp>
-      <p:sp>
-        <p:nvSpPr>
-          <p:cNvPr id="5" name="TextBox 4"/>
-          <p:cNvSpPr txBox="1"/>
-          <p:nvPr/>
-        </p:nvSpPr>
-        <p:spPr>
-          <a:xfrm>
-            <a:off x="731520" y="2194560"/>
-            <a:ext cx="3840480" cy="822960"/>
-          </a:xfrm>
-          <a:prstGeom prst="rect">
-            <a:avLst/>
-          </a:prstGeom>
-          <a:noFill/>
-        </p:spPr>
-        <p:txBody>
-          <a:bodyPr wrap="square" lIns="18288" rIns="18288" tIns="18288" bIns="18288" anchor="t">
-            <a:spAutoFit/>
-          </a:bodyPr>
-          <a:lstStyle/>
-          <a:p>
-            <a:pPr algn="l">
-              <a:lnSpc>
-                <a:spcPct val="115000"/>
-              </a:lnSpc>
-            </a:pPr>
-            <a:r>
-              <a:rPr sz="4400" b="1">
+              <a:rPr sz="2400" b="1">
                 <a:solidFill>
                   <a:srgbClr val="244E41"/>
                 </a:solidFill>
@@ -12504,327 +13478,14 @@
                 <a:ea typeface="Apple SD Gothic Neo"/>
                 <a:cs typeface="Apple SD Gothic Neo"/>
               </a:rPr>
-              <a:t>63.9°C</a:t>
-            </a:r>
-            <a:r>
-              <a:rPr sz="2000" b="0">
-                <a:solidFill>
-                  <a:srgbClr val="62736A"/>
-                </a:solidFill>
-                <a:latin typeface="Apple SD Gothic Neo"/>
-                <a:ea typeface="Apple SD Gothic Neo"/>
-                <a:cs typeface="Apple SD Gothic Neo"/>
-              </a:rPr>
-              <a:t>  공급</a:t>
-            </a:r>
-          </a:p>
-        </p:txBody>
-      </p:sp>
-      <p:sp>
-        <p:nvSpPr>
-          <p:cNvPr id="6" name="TextBox 5"/>
-          <p:cNvSpPr txBox="1"/>
-          <p:nvPr/>
-        </p:nvSpPr>
-        <p:spPr>
-          <a:xfrm>
-            <a:off x="731520" y="2971800"/>
-            <a:ext cx="3840480" cy="822960"/>
-          </a:xfrm>
-          <a:prstGeom prst="rect">
-            <a:avLst/>
-          </a:prstGeom>
-          <a:noFill/>
-        </p:spPr>
-        <p:txBody>
-          <a:bodyPr wrap="square" lIns="18288" rIns="18288" tIns="18288" bIns="18288" anchor="t">
-            <a:spAutoFit/>
-          </a:bodyPr>
-          <a:lstStyle/>
-          <a:p>
-            <a:pPr algn="l">
-              <a:lnSpc>
-                <a:spcPct val="115000"/>
-              </a:lnSpc>
-            </a:pPr>
-            <a:r>
-              <a:rPr sz="4400" b="1">
-                <a:solidFill>
-                  <a:srgbClr val="D06B3D"/>
-                </a:solidFill>
-                <a:latin typeface="Apple SD Gothic Neo"/>
-                <a:ea typeface="Apple SD Gothic Neo"/>
-                <a:cs typeface="Apple SD Gothic Neo"/>
-              </a:rPr>
-              <a:t>63.8°C</a:t>
-            </a:r>
-            <a:r>
-              <a:rPr sz="2000" b="0">
-                <a:solidFill>
-                  <a:srgbClr val="62736A"/>
-                </a:solidFill>
-                <a:latin typeface="Apple SD Gothic Neo"/>
-                <a:ea typeface="Apple SD Gothic Neo"/>
-                <a:cs typeface="Apple SD Gothic Neo"/>
-              </a:rPr>
-              <a:t>  목표</a:t>
-            </a:r>
-          </a:p>
-        </p:txBody>
-      </p:sp>
-      <p:sp>
-        <p:nvSpPr>
-          <p:cNvPr id="7" name="TextBox 6"/>
-          <p:cNvSpPr txBox="1"/>
-          <p:nvPr/>
-        </p:nvSpPr>
-        <p:spPr>
-          <a:xfrm>
-            <a:off x="731520" y="3840480"/>
-            <a:ext cx="3840480" cy="457200"/>
-          </a:xfrm>
-          <a:prstGeom prst="rect">
-            <a:avLst/>
-          </a:prstGeom>
-          <a:noFill/>
-        </p:spPr>
-        <p:txBody>
-          <a:bodyPr wrap="square" lIns="18288" rIns="18288" tIns="18288" bIns="18288" anchor="t">
-            <a:spAutoFit/>
-          </a:bodyPr>
-          <a:lstStyle/>
-          <a:p>
-            <a:pPr algn="l">
-              <a:lnSpc>
-                <a:spcPct val="115000"/>
-              </a:lnSpc>
-            </a:pPr>
-            <a:r>
-              <a:rPr sz="2200" b="1">
-                <a:solidFill>
-                  <a:srgbClr val="172B27"/>
-                </a:solidFill>
-                <a:latin typeface="Apple SD Gothic Neo"/>
-                <a:ea typeface="Apple SD Gothic Neo"/>
-                <a:cs typeface="Apple SD Gothic Neo"/>
-              </a:rPr>
-              <a:t>→ 정상처럼 보인다</a:t>
-            </a:r>
-          </a:p>
-        </p:txBody>
-      </p:sp>
-      <p:sp>
-        <p:nvSpPr>
-          <p:cNvPr id="8" name="TextBox 7"/>
-          <p:cNvSpPr txBox="1"/>
-          <p:nvPr/>
-        </p:nvSpPr>
-        <p:spPr>
-          <a:xfrm>
-            <a:off x="731520" y="4754880"/>
-            <a:ext cx="3931920" cy="1280160"/>
-          </a:xfrm>
-          <a:prstGeom prst="rect">
-            <a:avLst/>
-          </a:prstGeom>
-          <a:noFill/>
-        </p:spPr>
-        <p:txBody>
-          <a:bodyPr wrap="square" lIns="18288" rIns="18288" tIns="18288" bIns="18288" anchor="t">
-            <a:spAutoFit/>
-          </a:bodyPr>
-          <a:lstStyle/>
-          <a:p>
-            <a:pPr algn="l">
-              <a:lnSpc>
-                <a:spcPct val="115000"/>
-              </a:lnSpc>
-            </a:pPr>
-            <a:r>
-              <a:rPr sz="2200" b="0">
-                <a:solidFill>
-                  <a:srgbClr val="172B27"/>
-                </a:solidFill>
-                <a:latin typeface="Apple SD Gothic Neo"/>
-                <a:ea typeface="Apple SD Gothic Neo"/>
-                <a:cs typeface="Apple SD Gothic Neo"/>
-              </a:rPr>
-              <a:t>하지만 그전 24시간에는</a:t>
-            </a:r>
-          </a:p>
-          <a:p>
-            <a:pPr algn="l">
-              <a:lnSpc>
-                <a:spcPct val="115000"/>
-              </a:lnSpc>
-            </a:pPr>
-            <a:r>
-              <a:rPr sz="2200" b="1">
-                <a:solidFill>
-                  <a:srgbClr val="D06B3D"/>
-                </a:solidFill>
-                <a:latin typeface="Apple SD Gothic Neo"/>
-                <a:ea typeface="Apple SD Gothic Neo"/>
-                <a:cs typeface="Apple SD Gothic Neo"/>
-              </a:rPr>
-              <a:t>최대 13.4°C</a:t>
-            </a:r>
-            <a:r>
-              <a:rPr sz="2200" b="0">
-                <a:solidFill>
-                  <a:srgbClr val="172B27"/>
-                </a:solidFill>
-                <a:latin typeface="Apple SD Gothic Neo"/>
-                <a:ea typeface="Apple SD Gothic Neo"/>
-                <a:cs typeface="Apple SD Gothic Neo"/>
-              </a:rPr>
-              <a:t> 벌어졌다</a:t>
-            </a:r>
-          </a:p>
-        </p:txBody>
-      </p:sp>
-      <p:pic>
-        <p:nvPicPr>
-          <p:cNvPr id="9" name="Picture 8" descr="system2-case29-trend.png"/>
-          <p:cNvPicPr>
-            <a:picLocks noChangeAspect="1"/>
-          </p:cNvPicPr>
-          <p:nvPr/>
-        </p:nvPicPr>
-        <p:blipFill>
-          <a:blip r:embed="rId3"/>
-          <a:stretch>
-            <a:fillRect/>
-          </a:stretch>
-        </p:blipFill>
-        <p:spPr>
-          <a:xfrm>
-            <a:off x="4846320" y="1920240"/>
-            <a:ext cx="6766560" cy="2748915"/>
-          </a:xfrm>
-          <a:prstGeom prst="rect">
-            <a:avLst/>
-          </a:prstGeom>
-        </p:spPr>
-      </p:pic>
-      <p:sp>
-        <p:nvSpPr>
-          <p:cNvPr id="10" name="TextBox 9"/>
-          <p:cNvSpPr txBox="1"/>
-          <p:nvPr/>
-        </p:nvSpPr>
-        <p:spPr>
-          <a:xfrm>
-            <a:off x="4846320" y="4846320"/>
-            <a:ext cx="6766560" cy="365760"/>
-          </a:xfrm>
-          <a:prstGeom prst="rect">
-            <a:avLst/>
-          </a:prstGeom>
-          <a:noFill/>
-        </p:spPr>
-        <p:txBody>
-          <a:bodyPr wrap="square" lIns="18288" rIns="18288" tIns="18288" bIns="18288" anchor="t">
-            <a:spAutoFit/>
-          </a:bodyPr>
-          <a:lstStyle/>
-          <a:p>
-            <a:pPr algn="l">
-              <a:lnSpc>
-                <a:spcPct val="115000"/>
-              </a:lnSpc>
-            </a:pPr>
-            <a:r>
-              <a:rPr sz="1600" b="0">
-                <a:solidFill>
-                  <a:srgbClr val="244E41"/>
-                </a:solidFill>
-                <a:latin typeface="Apple SD Gothic Neo"/>
-                <a:ea typeface="Apple SD Gothic Neo"/>
-                <a:cs typeface="Apple SD Gothic Neo"/>
-              </a:rPr>
-              <a:t>■ </a:t>
-            </a:r>
-            <a:r>
-              <a:rPr sz="1600" b="0">
-                <a:solidFill>
-                  <a:srgbClr val="62736A"/>
-                </a:solidFill>
-                <a:latin typeface="Apple SD Gothic Neo"/>
-                <a:ea typeface="Apple SD Gothic Neo"/>
-                <a:cs typeface="Apple SD Gothic Neo"/>
-              </a:rPr>
-              <a:t>실제 공급온도   </a:t>
-            </a:r>
-            <a:r>
-              <a:rPr sz="1600" b="0">
-                <a:solidFill>
-                  <a:srgbClr val="D06B3D"/>
-                </a:solidFill>
-                <a:latin typeface="Apple SD Gothic Neo"/>
-                <a:ea typeface="Apple SD Gothic Neo"/>
-                <a:cs typeface="Apple SD Gothic Neo"/>
-              </a:rPr>
-              <a:t>■ </a:t>
-            </a:r>
-            <a:r>
-              <a:rPr sz="1600" b="0">
-                <a:solidFill>
-                  <a:srgbClr val="62736A"/>
-                </a:solidFill>
-                <a:latin typeface="Apple SD Gothic Neo"/>
-                <a:ea typeface="Apple SD Gothic Neo"/>
-                <a:cs typeface="Apple SD Gothic Neo"/>
-              </a:rPr>
-              <a:t>목표 온도</a:t>
-            </a:r>
-          </a:p>
-        </p:txBody>
-      </p:sp>
-      <p:sp>
-        <p:nvSpPr>
-          <p:cNvPr id="11" name="TextBox 10"/>
-          <p:cNvSpPr txBox="1"/>
-          <p:nvPr/>
-        </p:nvSpPr>
-        <p:spPr>
-          <a:xfrm>
-            <a:off x="4846320" y="5212080"/>
-            <a:ext cx="6766560" cy="365760"/>
-          </a:xfrm>
-          <a:prstGeom prst="rect">
-            <a:avLst/>
-          </a:prstGeom>
-          <a:noFill/>
-        </p:spPr>
-        <p:txBody>
-          <a:bodyPr wrap="square" lIns="18288" rIns="18288" tIns="18288" bIns="18288" anchor="t">
-            <a:spAutoFit/>
-          </a:bodyPr>
-          <a:lstStyle/>
-          <a:p>
-            <a:pPr algn="l">
-              <a:lnSpc>
-                <a:spcPct val="115000"/>
-              </a:lnSpc>
-            </a:pPr>
-            <a:r>
-              <a:rPr sz="1500" b="0">
-                <a:solidFill>
-                  <a:srgbClr val="62736A"/>
-                </a:solidFill>
-                <a:latin typeface="Apple SD Gothic Neo"/>
-                <a:ea typeface="Apple SD Gothic Neo"/>
-                <a:cs typeface="Apple SD Gothic Neo"/>
-              </a:rPr>
-              <a:t>17번 서브스테이션 · 2019-01-09 14:18 신고 · 24시간, 10분 간격 144개 기록</a:t>
-            </a:r>
-          </a:p>
-        </p:txBody>
-      </p:sp>
-      <p:sp>
-        <p:nvSpPr>
-          <p:cNvPr id="12" name="TextBox 11"/>
+              <a:t>샤워기 물이 뜨거워도, 수압이 약하면 씻기 어렵다</a:t>
+            </a:r>
+          </a:p>
+        </p:txBody>
+      </p:sp>
+      <p:sp>
+        <p:nvSpPr>
+          <p:cNvPr id="21" name="TextBox 20"/>
           <p:cNvSpPr txBox="1"/>
           <p:nvPr/>
         </p:nvSpPr>
@@ -12925,7 +13586,7 @@
                 <a:ea typeface="Apple SD Gothic Neo"/>
                 <a:cs typeface="Apple SD Gothic Neo"/>
               </a:rPr>
-              <a:t>사례 29</a:t>
+              <a:t>사례 29 · 공개 데이터 PreDist v2</a:t>
             </a:r>
           </a:p>
         </p:txBody>
@@ -12966,7 +13627,7 @@
                 <a:ea typeface="Apple SD Gothic Neo"/>
                 <a:cs typeface="Apple SD Gothic Neo"/>
               </a:rPr>
-              <a:t>에이전트가 한 일</a:t>
+              <a:t>실제 신고: "난방이 안 된다"</a:t>
             </a:r>
           </a:p>
         </p:txBody>
@@ -12980,7 +13641,7 @@
         <p:spPr>
           <a:xfrm>
             <a:off x="731520" y="1783080"/>
-            <a:ext cx="5120640" cy="365760"/>
+            <a:ext cx="3657600" cy="365760"/>
           </a:xfrm>
           <a:prstGeom prst="rect">
             <a:avLst/>
@@ -12999,418 +13660,29 @@
               </a:lnSpc>
             </a:pPr>
             <a:r>
-              <a:rPr sz="2000" b="1">
-                <a:solidFill>
-                  <a:srgbClr val="76B900"/>
-                </a:solidFill>
-                <a:latin typeface="Apple SD Gothic Neo"/>
-                <a:ea typeface="Apple SD Gothic Neo"/>
-                <a:cs typeface="Apple SD Gothic Neo"/>
-              </a:rPr>
-              <a:t>Nemotron 3 Ultra</a:t>
-            </a:r>
-            <a:r>
-              <a:rPr sz="2000" b="0">
-                <a:solidFill>
-                  <a:srgbClr val="172B27"/>
-                </a:solidFill>
-                <a:latin typeface="Apple SD Gothic Neo"/>
-                <a:ea typeface="Apple SD Gothic Neo"/>
-                <a:cs typeface="Apple SD Gothic Neo"/>
-              </a:rPr>
-              <a:t>가 고른 자료 6종</a:t>
-            </a:r>
-          </a:p>
-        </p:txBody>
-      </p:sp>
-      <p:sp>
-        <p:nvSpPr>
-          <p:cNvPr id="5" name="Rounded Rectangle 4"/>
-          <p:cNvSpPr/>
-          <p:nvPr/>
-        </p:nvSpPr>
-        <p:spPr>
-          <a:xfrm>
-            <a:off x="731520" y="2286000"/>
-            <a:ext cx="2377440" cy="566928"/>
-          </a:xfrm>
-          <a:prstGeom prst="roundRect">
-            <a:avLst>
-              <a:gd name="adj" fmla="val 12000"/>
-            </a:avLst>
-          </a:prstGeom>
-          <a:solidFill>
-            <a:srgbClr val="FFFFFF"/>
-          </a:solidFill>
-          <a:ln w="19050">
-            <a:solidFill>
-              <a:srgbClr val="76B900"/>
-            </a:solidFill>
-          </a:ln>
-          <a:effectLst/>
-        </p:spPr>
-        <p:style>
-          <a:lnRef idx="1">
-            <a:schemeClr val="accent1"/>
-          </a:lnRef>
-          <a:fillRef idx="3">
-            <a:schemeClr val="accent1"/>
-          </a:fillRef>
-          <a:effectRef idx="2">
-            <a:schemeClr val="accent1"/>
-          </a:effectRef>
-          <a:fontRef idx="minor">
-            <a:schemeClr val="lt1"/>
-          </a:fontRef>
-        </p:style>
-        <p:txBody>
-          <a:bodyPr rtlCol="0" anchor="ctr" wrap="square"/>
-          <a:lstStyle/>
-          <a:p>
-            <a:pPr algn="ctr">
-              <a:lnSpc>
-                <a:spcPct val="115000"/>
-              </a:lnSpc>
-            </a:pPr>
-            <a:r>
-              <a:rPr sz="1700" b="0">
-                <a:solidFill>
-                  <a:srgbClr val="172B27"/>
-                </a:solidFill>
-                <a:latin typeface="Apple SD Gothic Neo"/>
-                <a:ea typeface="Apple SD Gothic Neo"/>
-                <a:cs typeface="Apple SD Gothic Neo"/>
-              </a:rPr>
-              <a:t>최근 계측</a:t>
-            </a:r>
-          </a:p>
-        </p:txBody>
-      </p:sp>
-      <p:sp>
-        <p:nvSpPr>
-          <p:cNvPr id="6" name="Rounded Rectangle 5"/>
-          <p:cNvSpPr/>
-          <p:nvPr/>
-        </p:nvSpPr>
-        <p:spPr>
-          <a:xfrm>
-            <a:off x="3246120" y="2286000"/>
-            <a:ext cx="2377440" cy="566928"/>
-          </a:xfrm>
-          <a:prstGeom prst="roundRect">
-            <a:avLst>
-              <a:gd name="adj" fmla="val 12000"/>
-            </a:avLst>
-          </a:prstGeom>
-          <a:solidFill>
-            <a:srgbClr val="FFFFFF"/>
-          </a:solidFill>
-          <a:ln w="19050">
-            <a:solidFill>
-              <a:srgbClr val="76B900"/>
-            </a:solidFill>
-          </a:ln>
-          <a:effectLst/>
-        </p:spPr>
-        <p:style>
-          <a:lnRef idx="1">
-            <a:schemeClr val="accent1"/>
-          </a:lnRef>
-          <a:fillRef idx="3">
-            <a:schemeClr val="accent1"/>
-          </a:fillRef>
-          <a:effectRef idx="2">
-            <a:schemeClr val="accent1"/>
-          </a:effectRef>
-          <a:fontRef idx="minor">
-            <a:schemeClr val="lt1"/>
-          </a:fontRef>
-        </p:style>
-        <p:txBody>
-          <a:bodyPr rtlCol="0" anchor="ctr" wrap="square"/>
-          <a:lstStyle/>
-          <a:p>
-            <a:pPr algn="ctr">
-              <a:lnSpc>
-                <a:spcPct val="115000"/>
-              </a:lnSpc>
-            </a:pPr>
-            <a:r>
-              <a:rPr sz="1700" b="0">
-                <a:solidFill>
-                  <a:srgbClr val="172B27"/>
-                </a:solidFill>
-                <a:latin typeface="Apple SD Gothic Neo"/>
-                <a:ea typeface="Apple SD Gothic Neo"/>
-                <a:cs typeface="Apple SD Gothic Neo"/>
-              </a:rPr>
-              <a:t>센서 설명</a:t>
-            </a:r>
-          </a:p>
-        </p:txBody>
-      </p:sp>
-      <p:sp>
-        <p:nvSpPr>
-          <p:cNvPr id="7" name="Rounded Rectangle 6"/>
-          <p:cNvSpPr/>
-          <p:nvPr/>
-        </p:nvSpPr>
-        <p:spPr>
-          <a:xfrm>
-            <a:off x="731520" y="3017520"/>
-            <a:ext cx="2377440" cy="566928"/>
-          </a:xfrm>
-          <a:prstGeom prst="roundRect">
-            <a:avLst>
-              <a:gd name="adj" fmla="val 12000"/>
-            </a:avLst>
-          </a:prstGeom>
-          <a:solidFill>
-            <a:srgbClr val="FFFFFF"/>
-          </a:solidFill>
-          <a:ln w="19050">
-            <a:solidFill>
-              <a:srgbClr val="76B900"/>
-            </a:solidFill>
-          </a:ln>
-          <a:effectLst/>
-        </p:spPr>
-        <p:style>
-          <a:lnRef idx="1">
-            <a:schemeClr val="accent1"/>
-          </a:lnRef>
-          <a:fillRef idx="3">
-            <a:schemeClr val="accent1"/>
-          </a:fillRef>
-          <a:effectRef idx="2">
-            <a:schemeClr val="accent1"/>
-          </a:effectRef>
-          <a:fontRef idx="minor">
-            <a:schemeClr val="lt1"/>
-          </a:fontRef>
-        </p:style>
-        <p:txBody>
-          <a:bodyPr rtlCol="0" anchor="ctr" wrap="square"/>
-          <a:lstStyle/>
-          <a:p>
-            <a:pPr algn="ctr">
-              <a:lnSpc>
-                <a:spcPct val="115000"/>
-              </a:lnSpc>
-            </a:pPr>
-            <a:r>
-              <a:rPr sz="1700" b="0">
-                <a:solidFill>
-                  <a:srgbClr val="172B27"/>
-                </a:solidFill>
-                <a:latin typeface="Apple SD Gothic Neo"/>
-                <a:ea typeface="Apple SD Gothic Neo"/>
-                <a:cs typeface="Apple SD Gothic Neo"/>
-              </a:rPr>
-              <a:t>과거 신고</a:t>
-            </a:r>
-          </a:p>
-        </p:txBody>
-      </p:sp>
-      <p:sp>
-        <p:nvSpPr>
-          <p:cNvPr id="8" name="Rounded Rectangle 7"/>
-          <p:cNvSpPr/>
-          <p:nvPr/>
-        </p:nvSpPr>
-        <p:spPr>
-          <a:xfrm>
-            <a:off x="3246120" y="3017520"/>
-            <a:ext cx="2377440" cy="566928"/>
-          </a:xfrm>
-          <a:prstGeom prst="roundRect">
-            <a:avLst>
-              <a:gd name="adj" fmla="val 12000"/>
-            </a:avLst>
-          </a:prstGeom>
-          <a:solidFill>
-            <a:srgbClr val="FFFFFF"/>
-          </a:solidFill>
-          <a:ln w="19050">
-            <a:solidFill>
-              <a:srgbClr val="76B900"/>
-            </a:solidFill>
-          </a:ln>
-          <a:effectLst/>
-        </p:spPr>
-        <p:style>
-          <a:lnRef idx="1">
-            <a:schemeClr val="accent1"/>
-          </a:lnRef>
-          <a:fillRef idx="3">
-            <a:schemeClr val="accent1"/>
-          </a:fillRef>
-          <a:effectRef idx="2">
-            <a:schemeClr val="accent1"/>
-          </a:effectRef>
-          <a:fontRef idx="minor">
-            <a:schemeClr val="lt1"/>
-          </a:fontRef>
-        </p:style>
-        <p:txBody>
-          <a:bodyPr rtlCol="0" anchor="ctr" wrap="square"/>
-          <a:lstStyle/>
-          <a:p>
-            <a:pPr algn="ctr">
-              <a:lnSpc>
-                <a:spcPct val="115000"/>
-              </a:lnSpc>
-            </a:pPr>
-            <a:r>
-              <a:rPr sz="1700" b="0">
-                <a:solidFill>
-                  <a:srgbClr val="172B27"/>
-                </a:solidFill>
-                <a:latin typeface="Apple SD Gothic Neo"/>
-                <a:ea typeface="Apple SD Gothic Neo"/>
-                <a:cs typeface="Apple SD Gothic Neo"/>
-              </a:rPr>
-              <a:t>정비 기록</a:t>
-            </a:r>
-          </a:p>
-        </p:txBody>
-      </p:sp>
-      <p:sp>
-        <p:nvSpPr>
-          <p:cNvPr id="9" name="Rounded Rectangle 8"/>
-          <p:cNvSpPr/>
-          <p:nvPr/>
-        </p:nvSpPr>
-        <p:spPr>
-          <a:xfrm>
-            <a:off x="731520" y="3749039"/>
-            <a:ext cx="2377440" cy="566928"/>
-          </a:xfrm>
-          <a:prstGeom prst="roundRect">
-            <a:avLst>
-              <a:gd name="adj" fmla="val 12000"/>
-            </a:avLst>
-          </a:prstGeom>
-          <a:solidFill>
-            <a:srgbClr val="FFFFFF"/>
-          </a:solidFill>
-          <a:ln w="19050">
-            <a:solidFill>
-              <a:srgbClr val="76B900"/>
-            </a:solidFill>
-          </a:ln>
-          <a:effectLst/>
-        </p:spPr>
-        <p:style>
-          <a:lnRef idx="1">
-            <a:schemeClr val="accent1"/>
-          </a:lnRef>
-          <a:fillRef idx="3">
-            <a:schemeClr val="accent1"/>
-          </a:fillRef>
-          <a:effectRef idx="2">
-            <a:schemeClr val="accent1"/>
-          </a:effectRef>
-          <a:fontRef idx="minor">
-            <a:schemeClr val="lt1"/>
-          </a:fontRef>
-        </p:style>
-        <p:txBody>
-          <a:bodyPr rtlCol="0" anchor="ctr" wrap="square"/>
-          <a:lstStyle/>
-          <a:p>
-            <a:pPr algn="ctr">
-              <a:lnSpc>
-                <a:spcPct val="115000"/>
-              </a:lnSpc>
-            </a:pPr>
-            <a:r>
-              <a:rPr sz="1700" b="0">
-                <a:solidFill>
-                  <a:srgbClr val="172B27"/>
-                </a:solidFill>
-                <a:latin typeface="Apple SD Gothic Neo"/>
-                <a:ea typeface="Apple SD Gothic Neo"/>
-                <a:cs typeface="Apple SD Gothic Neo"/>
-              </a:rPr>
-              <a:t>목표 이탈 시간대</a:t>
-            </a:r>
-          </a:p>
-        </p:txBody>
-      </p:sp>
-      <p:sp>
-        <p:nvSpPr>
-          <p:cNvPr id="10" name="Rounded Rectangle 9"/>
-          <p:cNvSpPr/>
-          <p:nvPr/>
-        </p:nvSpPr>
-        <p:spPr>
-          <a:xfrm>
-            <a:off x="3246120" y="3749039"/>
-            <a:ext cx="2377440" cy="566928"/>
-          </a:xfrm>
-          <a:prstGeom prst="roundRect">
-            <a:avLst>
-              <a:gd name="adj" fmla="val 12000"/>
-            </a:avLst>
-          </a:prstGeom>
-          <a:solidFill>
-            <a:srgbClr val="FFFFFF"/>
-          </a:solidFill>
-          <a:ln w="19050">
-            <a:solidFill>
-              <a:srgbClr val="76B900"/>
-            </a:solidFill>
-          </a:ln>
-          <a:effectLst/>
-        </p:spPr>
-        <p:style>
-          <a:lnRef idx="1">
-            <a:schemeClr val="accent1"/>
-          </a:lnRef>
-          <a:fillRef idx="3">
-            <a:schemeClr val="accent1"/>
-          </a:fillRef>
-          <a:effectRef idx="2">
-            <a:schemeClr val="accent1"/>
-          </a:effectRef>
-          <a:fontRef idx="minor">
-            <a:schemeClr val="lt1"/>
-          </a:fontRef>
-        </p:style>
-        <p:txBody>
-          <a:bodyPr rtlCol="0" anchor="ctr" wrap="square"/>
-          <a:lstStyle/>
-          <a:p>
-            <a:pPr algn="ctr">
-              <a:lnSpc>
-                <a:spcPct val="115000"/>
-              </a:lnSpc>
-            </a:pPr>
-            <a:r>
-              <a:rPr sz="1700" b="0">
-                <a:solidFill>
-                  <a:srgbClr val="172B27"/>
-                </a:solidFill>
-                <a:latin typeface="Apple SD Gothic Neo"/>
-                <a:ea typeface="Apple SD Gothic Neo"/>
-                <a:cs typeface="Apple SD Gothic Neo"/>
-              </a:rPr>
-              <a:t>13:00~14:18 재조회</a:t>
-            </a:r>
-          </a:p>
-        </p:txBody>
-      </p:sp>
-      <p:sp>
-        <p:nvSpPr>
-          <p:cNvPr id="11" name="TextBox 10"/>
+              <a:rPr sz="1800" b="0">
+                <a:solidFill>
+                  <a:srgbClr val="62736A"/>
+                </a:solidFill>
+                <a:latin typeface="Apple SD Gothic Neo"/>
+                <a:ea typeface="Apple SD Gothic Neo"/>
+                <a:cs typeface="Apple SD Gothic Neo"/>
+              </a:rPr>
+              <a:t>신고 직전 마지막 계측 (14:10)</a:t>
+            </a:r>
+          </a:p>
+        </p:txBody>
+      </p:sp>
+      <p:sp>
+        <p:nvSpPr>
+          <p:cNvPr id="5" name="TextBox 4"/>
           <p:cNvSpPr txBox="1"/>
           <p:nvPr/>
         </p:nvSpPr>
         <p:spPr>
           <a:xfrm>
-            <a:off x="731520" y="4572000"/>
-            <a:ext cx="4937760" cy="822960"/>
+            <a:off x="731520" y="2194560"/>
+            <a:ext cx="3840480" cy="822960"/>
           </a:xfrm>
           <a:prstGeom prst="rect">
             <a:avLst/>
@@ -13429,25 +13701,18 @@
               </a:lnSpc>
             </a:pPr>
             <a:r>
-              <a:rPr sz="4000" b="1">
-                <a:solidFill>
-                  <a:srgbClr val="172B27"/>
-                </a:solidFill>
-                <a:latin typeface="Apple SD Gothic Neo"/>
-                <a:ea typeface="Apple SD Gothic Neo"/>
-                <a:cs typeface="Apple SD Gothic Neo"/>
-              </a:rPr>
-              <a:t>약 20초</a:t>
-            </a:r>
-          </a:p>
-          <a:p>
-            <a:pPr algn="l">
-              <a:lnSpc>
-                <a:spcPct val="115000"/>
-              </a:lnSpc>
-            </a:pPr>
-            <a:r>
-              <a:rPr sz="1500" b="0">
+              <a:rPr sz="4400" b="1">
+                <a:solidFill>
+                  <a:srgbClr val="244E41"/>
+                </a:solidFill>
+                <a:latin typeface="Apple SD Gothic Neo"/>
+                <a:ea typeface="Apple SD Gothic Neo"/>
+                <a:cs typeface="Apple SD Gothic Neo"/>
+              </a:rPr>
+              <a:t>63.9°C</a:t>
+            </a:r>
+            <a:r>
+              <a:rPr sz="2000" b="0">
                 <a:solidFill>
                   <a:srgbClr val="62736A"/>
                 </a:solidFill>
@@ -13455,57 +13720,21 @@
                 <a:ea typeface="Apple SD Gothic Neo"/>
                 <a:cs typeface="Apple SD Gothic Neo"/>
               </a:rPr>
-              <a:t>모델·도구 실행 시간 (현장 처리 시간 아님)</a:t>
-            </a:r>
-          </a:p>
-        </p:txBody>
-      </p:sp>
-      <p:cxnSp>
-        <p:nvCxnSpPr>
-          <p:cNvPr id="12" name="Connector 11"/>
-          <p:cNvCxnSpPr/>
-          <p:nvPr/>
-        </p:nvCxnSpPr>
-        <p:spPr>
-          <a:xfrm>
-            <a:off x="5806440" y="3291840"/>
-            <a:ext cx="548640" cy="0"/>
-          </a:xfrm>
-          <a:prstGeom prst="line">
-            <a:avLst/>
-          </a:prstGeom>
-          <a:ln w="38100">
-            <a:solidFill>
-              <a:srgbClr val="D06B3D"/>
-            </a:solidFill>
-            <a:tailEnd type="triangle" w="med" len="med"/>
-          </a:ln>
-        </p:spPr>
-        <p:style>
-          <a:lnRef idx="2">
-            <a:schemeClr val="accent1"/>
-          </a:lnRef>
-          <a:fillRef idx="0">
-            <a:schemeClr val="accent1"/>
-          </a:fillRef>
-          <a:effectRef idx="1">
-            <a:schemeClr val="accent1"/>
-          </a:effectRef>
-          <a:fontRef idx="minor">
-            <a:schemeClr val="tx1"/>
-          </a:fontRef>
-        </p:style>
-      </p:cxnSp>
-      <p:sp>
-        <p:nvSpPr>
-          <p:cNvPr id="13" name="TextBox 12"/>
+              <a:t>  공급</a:t>
+            </a:r>
+          </a:p>
+        </p:txBody>
+      </p:sp>
+      <p:sp>
+        <p:nvSpPr>
+          <p:cNvPr id="6" name="TextBox 5"/>
           <p:cNvSpPr txBox="1"/>
           <p:nvPr/>
         </p:nvSpPr>
         <p:spPr>
           <a:xfrm>
-            <a:off x="6492240" y="1783080"/>
-            <a:ext cx="5120640" cy="365760"/>
+            <a:off x="731520" y="2971800"/>
+            <a:ext cx="3840480" cy="822960"/>
           </a:xfrm>
           <a:prstGeom prst="rect">
             <a:avLst/>
@@ -13524,275 +13753,40 @@
               </a:lnSpc>
             </a:pPr>
             <a:r>
+              <a:rPr sz="4400" b="1">
+                <a:solidFill>
+                  <a:srgbClr val="D06B3D"/>
+                </a:solidFill>
+                <a:latin typeface="Apple SD Gothic Neo"/>
+                <a:ea typeface="Apple SD Gothic Neo"/>
+                <a:cs typeface="Apple SD Gothic Neo"/>
+              </a:rPr>
+              <a:t>63.8°C</a:t>
+            </a:r>
+            <a:r>
               <a:rPr sz="2000" b="0">
                 <a:solidFill>
-                  <a:srgbClr val="172B27"/>
-                </a:solidFill>
-                <a:latin typeface="Apple SD Gothic Neo"/>
-                <a:ea typeface="Apple SD Gothic Neo"/>
-                <a:cs typeface="Apple SD Gothic Neo"/>
-              </a:rPr>
-              <a:t>점검 3가지 · 원본 기록에 연결</a:t>
-            </a:r>
-          </a:p>
-        </p:txBody>
-      </p:sp>
-      <p:sp>
-        <p:nvSpPr>
-          <p:cNvPr id="14" name="Rounded Rectangle 13"/>
-          <p:cNvSpPr/>
-          <p:nvPr/>
-        </p:nvSpPr>
-        <p:spPr>
-          <a:xfrm>
-            <a:off x="6492240" y="2286000"/>
-            <a:ext cx="4937760" cy="566928"/>
-          </a:xfrm>
-          <a:prstGeom prst="roundRect">
-            <a:avLst>
-              <a:gd name="adj" fmla="val 12000"/>
-            </a:avLst>
-          </a:prstGeom>
-          <a:solidFill>
-            <a:srgbClr val="244E41"/>
-          </a:solidFill>
-          <a:ln>
-            <a:noFill/>
-          </a:ln>
-          <a:effectLst/>
-        </p:spPr>
-        <p:style>
-          <a:lnRef idx="1">
-            <a:schemeClr val="accent1"/>
-          </a:lnRef>
-          <a:fillRef idx="3">
-            <a:schemeClr val="accent1"/>
-          </a:fillRef>
-          <a:effectRef idx="2">
-            <a:schemeClr val="accent1"/>
-          </a:effectRef>
-          <a:fontRef idx="minor">
-            <a:schemeClr val="lt1"/>
-          </a:fontRef>
-        </p:style>
-        <p:txBody>
-          <a:bodyPr rtlCol="0" anchor="ctr" wrap="square"/>
-          <a:lstStyle/>
-          <a:p>
-            <a:pPr algn="l">
-              <a:lnSpc>
-                <a:spcPct val="115000"/>
-              </a:lnSpc>
-            </a:pPr>
-            <a:r>
-              <a:rPr sz="1900" b="1">
-                <a:solidFill>
-                  <a:srgbClr val="FFFFFF"/>
-                </a:solidFill>
-                <a:latin typeface="Apple SD Gothic Neo"/>
-                <a:ea typeface="Apple SD Gothic Neo"/>
-                <a:cs typeface="Apple SD Gothic Neo"/>
-              </a:rPr>
-              <a:t>① 실내·라디에이터 온도 확인</a:t>
-            </a:r>
-          </a:p>
-        </p:txBody>
-      </p:sp>
-      <p:sp>
-        <p:nvSpPr>
-          <p:cNvPr id="15" name="Rounded Rectangle 14"/>
-          <p:cNvSpPr/>
-          <p:nvPr/>
-        </p:nvSpPr>
-        <p:spPr>
-          <a:xfrm>
-            <a:off x="6492240" y="3017520"/>
-            <a:ext cx="4937760" cy="566928"/>
-          </a:xfrm>
-          <a:prstGeom prst="roundRect">
-            <a:avLst>
-              <a:gd name="adj" fmla="val 12000"/>
-            </a:avLst>
-          </a:prstGeom>
-          <a:solidFill>
-            <a:srgbClr val="244E41"/>
-          </a:solidFill>
-          <a:ln>
-            <a:noFill/>
-          </a:ln>
-          <a:effectLst/>
-        </p:spPr>
-        <p:style>
-          <a:lnRef idx="1">
-            <a:schemeClr val="accent1"/>
-          </a:lnRef>
-          <a:fillRef idx="3">
-            <a:schemeClr val="accent1"/>
-          </a:fillRef>
-          <a:effectRef idx="2">
-            <a:schemeClr val="accent1"/>
-          </a:effectRef>
-          <a:fontRef idx="minor">
-            <a:schemeClr val="lt1"/>
-          </a:fontRef>
-        </p:style>
-        <p:txBody>
-          <a:bodyPr rtlCol="0" anchor="ctr" wrap="square"/>
-          <a:lstStyle/>
-          <a:p>
-            <a:pPr algn="l">
-              <a:lnSpc>
-                <a:spcPct val="115000"/>
-              </a:lnSpc>
-            </a:pPr>
-            <a:r>
-              <a:rPr sz="1900" b="1">
-                <a:solidFill>
-                  <a:srgbClr val="FFFFFF"/>
-                </a:solidFill>
-                <a:latin typeface="Apple SD Gothic Neo"/>
-                <a:ea typeface="Apple SD Gothic Neo"/>
-                <a:cs typeface="Apple SD Gothic Neo"/>
-              </a:rPr>
-              <a:t>② 건물 배관 유량 측정</a:t>
-            </a:r>
-          </a:p>
-        </p:txBody>
-      </p:sp>
-      <p:sp>
-        <p:nvSpPr>
-          <p:cNvPr id="16" name="Rounded Rectangle 15"/>
-          <p:cNvSpPr/>
-          <p:nvPr/>
-        </p:nvSpPr>
-        <p:spPr>
-          <a:xfrm>
-            <a:off x="6492240" y="3749039"/>
-            <a:ext cx="4937760" cy="566928"/>
-          </a:xfrm>
-          <a:prstGeom prst="roundRect">
-            <a:avLst>
-              <a:gd name="adj" fmla="val 12000"/>
-            </a:avLst>
-          </a:prstGeom>
-          <a:solidFill>
-            <a:srgbClr val="244E41"/>
-          </a:solidFill>
-          <a:ln>
-            <a:noFill/>
-          </a:ln>
-          <a:effectLst/>
-        </p:spPr>
-        <p:style>
-          <a:lnRef idx="1">
-            <a:schemeClr val="accent1"/>
-          </a:lnRef>
-          <a:fillRef idx="3">
-            <a:schemeClr val="accent1"/>
-          </a:fillRef>
-          <a:effectRef idx="2">
-            <a:schemeClr val="accent1"/>
-          </a:effectRef>
-          <a:fontRef idx="minor">
-            <a:schemeClr val="lt1"/>
-          </a:fontRef>
-        </p:style>
-        <p:txBody>
-          <a:bodyPr rtlCol="0" anchor="ctr" wrap="square"/>
-          <a:lstStyle/>
-          <a:p>
-            <a:pPr algn="l">
-              <a:lnSpc>
-                <a:spcPct val="115000"/>
-              </a:lnSpc>
-            </a:pPr>
-            <a:r>
-              <a:rPr sz="1900" b="1">
-                <a:solidFill>
-                  <a:srgbClr val="FFFFFF"/>
-                </a:solidFill>
-                <a:latin typeface="Apple SD Gothic Neo"/>
-                <a:ea typeface="Apple SD Gothic Neo"/>
-                <a:cs typeface="Apple SD Gothic Neo"/>
-              </a:rPr>
-              <a:t>③ 제어기 설정·경보 기록 검토</a:t>
-            </a:r>
-          </a:p>
-        </p:txBody>
-      </p:sp>
-      <p:sp>
-        <p:nvSpPr>
-          <p:cNvPr id="17" name="Rounded Rectangle 16"/>
-          <p:cNvSpPr/>
-          <p:nvPr/>
-        </p:nvSpPr>
-        <p:spPr>
-          <a:xfrm>
-            <a:off x="6492240" y="4526280"/>
-            <a:ext cx="4937760" cy="566928"/>
-          </a:xfrm>
-          <a:prstGeom prst="roundRect">
-            <a:avLst>
-              <a:gd name="adj" fmla="val 12000"/>
-            </a:avLst>
-          </a:prstGeom>
-          <a:solidFill>
-            <a:srgbClr val="FBF9F4"/>
-          </a:solidFill>
-          <a:ln w="19050">
-            <a:solidFill>
-              <a:srgbClr val="D06B3D"/>
-            </a:solidFill>
-          </a:ln>
-          <a:effectLst/>
-        </p:spPr>
-        <p:style>
-          <a:lnRef idx="1">
-            <a:schemeClr val="accent1"/>
-          </a:lnRef>
-          <a:fillRef idx="3">
-            <a:schemeClr val="accent1"/>
-          </a:fillRef>
-          <a:effectRef idx="2">
-            <a:schemeClr val="accent1"/>
-          </a:effectRef>
-          <a:fontRef idx="minor">
-            <a:schemeClr val="lt1"/>
-          </a:fontRef>
-        </p:style>
-        <p:txBody>
-          <a:bodyPr rtlCol="0" anchor="ctr" wrap="square"/>
-          <a:lstStyle/>
-          <a:p>
-            <a:pPr algn="l">
-              <a:lnSpc>
-                <a:spcPct val="115000"/>
-              </a:lnSpc>
-            </a:pPr>
-            <a:r>
-              <a:rPr sz="1800" b="0">
-                <a:solidFill>
-                  <a:srgbClr val="D06B3D"/>
-                </a:solidFill>
-                <a:latin typeface="Apple SD Gothic Neo"/>
-                <a:ea typeface="Apple SD Gothic Neo"/>
-                <a:cs typeface="Apple SD Gothic Neo"/>
-              </a:rPr>
-              <a:t>+ 데이터로 알 수 없는 것도 함께 전달</a:t>
-            </a:r>
-          </a:p>
-        </p:txBody>
-      </p:sp>
-      <p:sp>
-        <p:nvSpPr>
-          <p:cNvPr id="18" name="TextBox 17"/>
+                  <a:srgbClr val="62736A"/>
+                </a:solidFill>
+                <a:latin typeface="Apple SD Gothic Neo"/>
+                <a:ea typeface="Apple SD Gothic Neo"/>
+                <a:cs typeface="Apple SD Gothic Neo"/>
+              </a:rPr>
+              <a:t>  목표</a:t>
+            </a:r>
+          </a:p>
+        </p:txBody>
+      </p:sp>
+      <p:sp>
+        <p:nvSpPr>
+          <p:cNvPr id="7" name="TextBox 6"/>
           <p:cNvSpPr txBox="1"/>
           <p:nvPr/>
         </p:nvSpPr>
         <p:spPr>
           <a:xfrm>
-            <a:off x="6492240" y="5349240"/>
-            <a:ext cx="4937760" cy="457200"/>
+            <a:off x="731520" y="3840480"/>
+            <a:ext cx="3840480" cy="457200"/>
           </a:xfrm>
           <a:prstGeom prst="rect">
             <a:avLst/>
@@ -13819,14 +13813,223 @@
                 <a:ea typeface="Apple SD Gothic Neo"/>
                 <a:cs typeface="Apple SD Gothic Neo"/>
               </a:rPr>
-              <a:t>판단은 엔지니어가 한다</a:t>
-            </a:r>
-          </a:p>
-        </p:txBody>
-      </p:sp>
-      <p:sp>
-        <p:nvSpPr>
-          <p:cNvPr id="19" name="TextBox 18"/>
+              <a:t>→ 정상처럼 보인다</a:t>
+            </a:r>
+          </a:p>
+        </p:txBody>
+      </p:sp>
+      <p:sp>
+        <p:nvSpPr>
+          <p:cNvPr id="8" name="TextBox 7"/>
+          <p:cNvSpPr txBox="1"/>
+          <p:nvPr/>
+        </p:nvSpPr>
+        <p:spPr>
+          <a:xfrm>
+            <a:off x="731520" y="4754880"/>
+            <a:ext cx="3931920" cy="1280160"/>
+          </a:xfrm>
+          <a:prstGeom prst="rect">
+            <a:avLst/>
+          </a:prstGeom>
+          <a:noFill/>
+        </p:spPr>
+        <p:txBody>
+          <a:bodyPr wrap="square" lIns="18288" rIns="18288" tIns="18288" bIns="18288" anchor="t">
+            <a:spAutoFit/>
+          </a:bodyPr>
+          <a:lstStyle/>
+          <a:p>
+            <a:pPr algn="l">
+              <a:lnSpc>
+                <a:spcPct val="115000"/>
+              </a:lnSpc>
+            </a:pPr>
+            <a:r>
+              <a:rPr sz="2200" b="0">
+                <a:solidFill>
+                  <a:srgbClr val="172B27"/>
+                </a:solidFill>
+                <a:latin typeface="Apple SD Gothic Neo"/>
+                <a:ea typeface="Apple SD Gothic Neo"/>
+                <a:cs typeface="Apple SD Gothic Neo"/>
+              </a:rPr>
+              <a:t>하지만 그전 24시간에는</a:t>
+            </a:r>
+          </a:p>
+          <a:p>
+            <a:pPr algn="l">
+              <a:lnSpc>
+                <a:spcPct val="115000"/>
+              </a:lnSpc>
+            </a:pPr>
+            <a:r>
+              <a:rPr sz="2200" b="1">
+                <a:solidFill>
+                  <a:srgbClr val="D06B3D"/>
+                </a:solidFill>
+                <a:latin typeface="Apple SD Gothic Neo"/>
+                <a:ea typeface="Apple SD Gothic Neo"/>
+                <a:cs typeface="Apple SD Gothic Neo"/>
+              </a:rPr>
+              <a:t>최대 13.4°C</a:t>
+            </a:r>
+            <a:r>
+              <a:rPr sz="2200" b="0">
+                <a:solidFill>
+                  <a:srgbClr val="172B27"/>
+                </a:solidFill>
+                <a:latin typeface="Apple SD Gothic Neo"/>
+                <a:ea typeface="Apple SD Gothic Neo"/>
+                <a:cs typeface="Apple SD Gothic Neo"/>
+              </a:rPr>
+              <a:t> 벌어졌다</a:t>
+            </a:r>
+          </a:p>
+        </p:txBody>
+      </p:sp>
+      <p:pic>
+        <p:nvPicPr>
+          <p:cNvPr id="9" name="Picture 8" descr="system2-case29-trend.png"/>
+          <p:cNvPicPr>
+            <a:picLocks noChangeAspect="1"/>
+          </p:cNvPicPr>
+          <p:nvPr/>
+        </p:nvPicPr>
+        <p:blipFill>
+          <a:blip r:embed="rId3"/>
+          <a:stretch>
+            <a:fillRect/>
+          </a:stretch>
+        </p:blipFill>
+        <p:spPr>
+          <a:xfrm>
+            <a:off x="4846320" y="1920240"/>
+            <a:ext cx="6766560" cy="2748915"/>
+          </a:xfrm>
+          <a:prstGeom prst="rect">
+            <a:avLst/>
+          </a:prstGeom>
+        </p:spPr>
+      </p:pic>
+      <p:sp>
+        <p:nvSpPr>
+          <p:cNvPr id="10" name="TextBox 9"/>
+          <p:cNvSpPr txBox="1"/>
+          <p:nvPr/>
+        </p:nvSpPr>
+        <p:spPr>
+          <a:xfrm>
+            <a:off x="4846320" y="4846320"/>
+            <a:ext cx="6766560" cy="365760"/>
+          </a:xfrm>
+          <a:prstGeom prst="rect">
+            <a:avLst/>
+          </a:prstGeom>
+          <a:noFill/>
+        </p:spPr>
+        <p:txBody>
+          <a:bodyPr wrap="square" lIns="18288" rIns="18288" tIns="18288" bIns="18288" anchor="t">
+            <a:spAutoFit/>
+          </a:bodyPr>
+          <a:lstStyle/>
+          <a:p>
+            <a:pPr algn="l">
+              <a:lnSpc>
+                <a:spcPct val="115000"/>
+              </a:lnSpc>
+            </a:pPr>
+            <a:r>
+              <a:rPr sz="1600" b="0">
+                <a:solidFill>
+                  <a:srgbClr val="244E41"/>
+                </a:solidFill>
+                <a:latin typeface="Apple SD Gothic Neo"/>
+                <a:ea typeface="Apple SD Gothic Neo"/>
+                <a:cs typeface="Apple SD Gothic Neo"/>
+              </a:rPr>
+              <a:t>■ </a:t>
+            </a:r>
+            <a:r>
+              <a:rPr sz="1600" b="0">
+                <a:solidFill>
+                  <a:srgbClr val="62736A"/>
+                </a:solidFill>
+                <a:latin typeface="Apple SD Gothic Neo"/>
+                <a:ea typeface="Apple SD Gothic Neo"/>
+                <a:cs typeface="Apple SD Gothic Neo"/>
+              </a:rPr>
+              <a:t>실제 공급온도   </a:t>
+            </a:r>
+            <a:r>
+              <a:rPr sz="1600" b="0">
+                <a:solidFill>
+                  <a:srgbClr val="D06B3D"/>
+                </a:solidFill>
+                <a:latin typeface="Apple SD Gothic Neo"/>
+                <a:ea typeface="Apple SD Gothic Neo"/>
+                <a:cs typeface="Apple SD Gothic Neo"/>
+              </a:rPr>
+              <a:t>■ </a:t>
+            </a:r>
+            <a:r>
+              <a:rPr sz="1600" b="0">
+                <a:solidFill>
+                  <a:srgbClr val="62736A"/>
+                </a:solidFill>
+                <a:latin typeface="Apple SD Gothic Neo"/>
+                <a:ea typeface="Apple SD Gothic Neo"/>
+                <a:cs typeface="Apple SD Gothic Neo"/>
+              </a:rPr>
+              <a:t>목표 온도</a:t>
+            </a:r>
+          </a:p>
+        </p:txBody>
+      </p:sp>
+      <p:sp>
+        <p:nvSpPr>
+          <p:cNvPr id="11" name="TextBox 10"/>
+          <p:cNvSpPr txBox="1"/>
+          <p:nvPr/>
+        </p:nvSpPr>
+        <p:spPr>
+          <a:xfrm>
+            <a:off x="4846320" y="5212080"/>
+            <a:ext cx="6766560" cy="365760"/>
+          </a:xfrm>
+          <a:prstGeom prst="rect">
+            <a:avLst/>
+          </a:prstGeom>
+          <a:noFill/>
+        </p:spPr>
+        <p:txBody>
+          <a:bodyPr wrap="square" lIns="18288" rIns="18288" tIns="18288" bIns="18288" anchor="t">
+            <a:spAutoFit/>
+          </a:bodyPr>
+          <a:lstStyle/>
+          <a:p>
+            <a:pPr algn="l">
+              <a:lnSpc>
+                <a:spcPct val="115000"/>
+              </a:lnSpc>
+            </a:pPr>
+            <a:r>
+              <a:rPr sz="1500" b="0">
+                <a:solidFill>
+                  <a:srgbClr val="62736A"/>
+                </a:solidFill>
+                <a:latin typeface="Apple SD Gothic Neo"/>
+                <a:ea typeface="Apple SD Gothic Neo"/>
+                <a:cs typeface="Apple SD Gothic Neo"/>
+              </a:rPr>
+              <a:t>17번 서브스테이션 · 2019-01-09 14:18 신고 · 24시간, 10분 간격 144개 기록</a:t>
+            </a:r>
+          </a:p>
+        </p:txBody>
+      </p:sp>
+      <p:sp>
+        <p:nvSpPr>
+          <p:cNvPr id="12" name="TextBox 11"/>
           <p:cNvSpPr txBox="1"/>
           <p:nvPr/>
         </p:nvSpPr>

--- a/submission/slides/Plant_Reliability_Agent_submission.pptx
+++ b/submission/slides/Plant_Reliability_Agent_submission.pptx
@@ -4587,7 +4587,7 @@
         </p:nvSpPr>
         <p:spPr>
           <a:xfrm>
-            <a:off x="914400" y="5120640"/>
+            <a:off x="914400" y="4572000"/>
             <a:ext cx="10058400" cy="457200"/>
           </a:xfrm>
           <a:prstGeom prst="rect">
@@ -4639,7 +4639,7 @@
         </p:nvSpPr>
         <p:spPr>
           <a:xfrm>
-            <a:off x="914400" y="6035040"/>
+            <a:off x="914400" y="6172200"/>
             <a:ext cx="10058400" cy="365760"/>
           </a:xfrm>
           <a:prstGeom prst="rect">
@@ -4667,7 +4667,88 @@
                 <a:ea typeface="Apple SD Gothic Neo"/>
                 <a:cs typeface="Apple SD Gothic Neo"/>
               </a:rPr>
-              <a:t>NVIDIA Korea Agentic AI Hackathon</a:t>
+              <a:t>Team Sona · NVIDIA Korea Agentic AI Hackathon</a:t>
+            </a:r>
+          </a:p>
+        </p:txBody>
+      </p:sp>
+      <p:sp>
+        <p:nvSpPr>
+          <p:cNvPr id="9" name="TextBox 8"/>
+          <p:cNvSpPr txBox="1"/>
+          <p:nvPr/>
+        </p:nvSpPr>
+        <p:spPr>
+          <a:xfrm>
+            <a:off x="914400" y="5212080"/>
+            <a:ext cx="10515600" cy="731520"/>
+          </a:xfrm>
+          <a:prstGeom prst="rect">
+            <a:avLst/>
+          </a:prstGeom>
+          <a:noFill/>
+        </p:spPr>
+        <p:txBody>
+          <a:bodyPr wrap="square" lIns="18288" rIns="18288" tIns="18288" bIns="18288" anchor="t">
+            <a:spAutoFit/>
+          </a:bodyPr>
+          <a:lstStyle/>
+          <a:p>
+            <a:pPr algn="l">
+              <a:lnSpc>
+                <a:spcPct val="115000"/>
+              </a:lnSpc>
+            </a:pPr>
+            <a:r>
+              <a:rPr sz="1500" b="1">
+                <a:solidFill>
+                  <a:srgbClr val="244E41"/>
+                </a:solidFill>
+                <a:latin typeface="Apple SD Gothic Neo"/>
+                <a:ea typeface="Apple SD Gothic Neo"/>
+                <a:cs typeface="Apple SD Gothic Neo"/>
+              </a:rPr>
+              <a:t>GitHub  </a:t>
+            </a:r>
+            <a:r>
+              <a:rPr sz="1500" b="0">
+                <a:solidFill>
+                  <a:srgbClr val="172B27"/>
+                </a:solidFill>
+                <a:latin typeface="Apple SD Gothic Neo"/>
+                <a:ea typeface="Apple SD Gothic Neo"/>
+                <a:cs typeface="Apple SD Gothic Neo"/>
+              </a:rPr>
+              <a:t>github.com/juyoungml/nvidia-hackathon</a:t>
+            </a:r>
+          </a:p>
+          <a:p>
+            <a:pPr algn="l">
+              <a:lnSpc>
+                <a:spcPct val="115000"/>
+              </a:lnSpc>
+            </a:pPr>
+            <a:r>
+              <a:rPr sz="1500" b="1">
+                <a:solidFill>
+                  <a:srgbClr val="244E41"/>
+                </a:solidFill>
+                <a:latin typeface="Apple SD Gothic Neo"/>
+                <a:ea typeface="Apple SD Gothic Neo"/>
+                <a:cs typeface="Apple SD Gothic Neo"/>
+              </a:rPr>
+              <a:t>Live demo  </a:t>
+            </a:r>
+            <a:r>
+              <a:rPr sz="1500" b="0">
+                <a:solidFill>
+                  <a:srgbClr val="172B27"/>
+                </a:solidFill>
+                <a:latin typeface="Apple SD Gothic Neo"/>
+                <a:ea typeface="Apple SD Gothic Neo"/>
+                <a:cs typeface="Apple SD Gothic Neo"/>
+              </a:rPr>
+              <a:t>juyoung.site/nvidia-hackathon</a:t>
             </a:r>
           </a:p>
         </p:txBody>
@@ -8140,7 +8221,7 @@
               </a:lnSpc>
             </a:pPr>
             <a:r>
-              <a:rPr sz="1600" b="0">
+              <a:rPr sz="1400" b="0">
                 <a:solidFill>
                   <a:srgbClr val="62736A"/>
                 </a:solidFill>
@@ -8148,7 +8229,7 @@
                 <a:ea typeface="Apple SD Gothic Neo"/>
                 <a:cs typeface="Apple SD Gothic Neo"/>
               </a:rPr>
-              <a:t>데모는 저장된 실제 실행 기록을 재생합니다</a:t>
+              <a:t>GitHub github.com/juyoungml/nvidia-hackathon  ·  Live demo juyoung.site/nvidia-hackathon  ·  데모는 저장된 실제 실행 기록을 재생합니다</a:t>
             </a:r>
           </a:p>
         </p:txBody>

--- a/submission/slides/Plant_Reliability_Agent_submission.pptx
+++ b/submission/slides/Plant_Reliability_Agent_submission.pptx
@@ -724,7 +724,7 @@
           <a:lstStyle/>
           <a:p>
             <a:r>
-              <a:t>공개 PreDist 사건 32건을 같은 자료와 같은 출력 형식으로 돌렸습니다. Claude Sonnet 5는 클라우드 최고 수준의 기준점이지만, 보안 때문에 발전소 안에서는 쓸 수 없습니다. 질문은 누가 이기느냐가 아니라, 현장에 설치할 수 있는 모델이 이 상한선에 얼마나 가까운가입니다. Ultra가 끝까지 작성한 점검안 15개는 모두 근거 검사를 통과했습니다. 조회하지 않은 기록을 지어낸 경우는 한 번도 없었습니다. 둘 다 결과를 낸 사례의 내용 점수도 41 대 42로 비슷했습니다. Ultra가 놓친 17건 중 13건은 호스팅 API 오류로 답을 받지 못한 경우이고, 4건은 시간 구간을 한도보다 길게 요청한 한 가지 도구 실수였습니다. 즉 격차는 판단력이 아니라 실행 안정성에서 나옵니다. 현장 배포로 외부 API 요인을 없애고 도구 쪽에서 요청 범위를 자동으로 맞춰 주는 것이 오프라인 보완 계획입니다. 이 검사는 진단 정확도 평가는 아닙니다.</a:t>
+              <a:t>공개 PreDist 사건 32건을 같은 자료와 같은 출력 형식으로 돌렸습니다. Claude Sonnet 5는 클라우드 최고 수준의 기준점이지만, 보안 때문에 발전소 안에서는 쓸 수 없습니다. 질문은 누가 이기느냐가 아니라, 현장에 설치할 수 있는 모델이 이 상한선에 얼마나 가까운가입니다. 1차 실행에서는 NVIDIA API 오류 13건 때문에 15건만 결과가 나왔지만, 속도를 낮춰 같은 요청을 다시 보내자 모두 결과가 나왔고 Ultra는 32건 중 26건을 통과했습니다. 끝까지 작성한 점검안 26개는 모두 근거 검사를 통과했고, 조회하지 않은 기록을 지어낸 경우는 한 번도 없었습니다. 남은 실패 6건은 모두 시간 구간을 한도보다 길게 요청한 한 가지 도구 실수였습니다. 도구 쪽에서 요청 범위를 자동으로 맞춰 주는 것이 오프라인 보완 계획입니다. 이 검사는 진단 정확도 평가는 아닙니다.</a:t>
             </a:r>
           </a:p>
         </p:txBody>
@@ -7284,7 +7284,7 @@
                 <a:ea typeface="Apple SD Gothic Neo"/>
                 <a:cs typeface="Apple SD Gothic Neo"/>
               </a:rPr>
-              <a:t>Ultra가 쓴 점검안 15개</a:t>
+              <a:t>API 오류 재실행 후 Ultra 26/32</a:t>
             </a:r>
           </a:p>
           <a:p>
@@ -7302,7 +7302,7 @@
                 <a:ea typeface="Apple SD Gothic Neo"/>
                 <a:cs typeface="Apple SD Gothic Neo"/>
               </a:rPr>
-              <a:t>근거 조작 0건 · 모두 검사 통과</a:t>
+              <a:t>작성한 점검안 26개 모두 통과 · 근거 조작 0건</a:t>
             </a:r>
           </a:p>
           <a:p>
@@ -7338,7 +7338,7 @@
                 <a:ea typeface="Apple SD Gothic Neo"/>
                 <a:cs typeface="Apple SD Gothic Neo"/>
               </a:rPr>
-              <a:t>놓친 17건의 이유</a:t>
+              <a:t>남은 실패 6건</a:t>
             </a:r>
           </a:p>
           <a:p>
@@ -7356,7 +7356,7 @@
                 <a:ea typeface="Apple SD Gothic Neo"/>
                 <a:cs typeface="Apple SD Gothic Neo"/>
               </a:rPr>
-              <a:t>API 오류 13 · 도구 실수 4 (한 가지)</a:t>
+              <a:t>모두 같은 도구 실수 (24행 초과 요청)</a:t>
             </a:r>
           </a:p>
           <a:p>
@@ -7479,7 +7479,7 @@
                 <a:ea typeface="Apple SD Gothic Neo"/>
                 <a:cs typeface="Apple SD Gothic Neo"/>
               </a:rPr>
-              <a:t>격차는 판단력이 아니라 </a:t>
+              <a:t>남은 격차는 </a:t>
             </a:r>
             <a:r>
               <a:rPr sz="2000" b="1">
@@ -7490,7 +7490,7 @@
                 <a:ea typeface="Apple SD Gothic Neo"/>
                 <a:cs typeface="Apple SD Gothic Neo"/>
               </a:rPr>
-              <a:t>실행 안정성</a:t>
+              <a:t>한 가지 도구 실수</a:t>
             </a:r>
             <a:r>
               <a:rPr sz="1600" b="0">
@@ -7501,7 +7501,7 @@
                 <a:ea typeface="Apple SD Gothic Neo"/>
                 <a:cs typeface="Apple SD Gothic Neo"/>
               </a:rPr>
-              <a:t>  →  현장 배포 + 도구 보완으로 오프라인에서 해결 예정</a:t>
+              <a:t>  →  도구가 요청 범위를 맞추도록 오프라인에서 보완 예정</a:t>
             </a:r>
           </a:p>
         </p:txBody>

--- a/submission/slides/Plant_Reliability_Agent_submission.pptx
+++ b/submission/slides/Plant_Reliability_Agent_submission.pptx
@@ -724,7 +724,7 @@
           <a:lstStyle/>
           <a:p>
             <a:r>
-              <a:t>공개 PreDist 사건 32건을 같은 자료와 같은 출력 형식으로 돌렸습니다. Claude Sonnet 5는 클라우드 최고 수준의 기준점이지만, 보안 때문에 발전소 안에서는 쓸 수 없습니다. 질문은 누가 이기느냐가 아니라, 현장에 설치할 수 있는 모델이 이 상한선에 얼마나 가까운가입니다. 1차 실행에서는 NVIDIA API 오류 13건 때문에 15건만 결과가 나왔지만, 속도를 낮춰 같은 요청을 다시 보내자 모두 결과가 나왔고 Ultra는 32건 중 26건을 통과했습니다. 끝까지 작성한 점검안 26개는 모두 근거 검사를 통과했고, 조회하지 않은 기록을 지어낸 경우는 한 번도 없었습니다. 남은 실패 6건은 모두 시간 구간을 한도보다 길게 요청한 한 가지 도구 실수였습니다. 도구 쪽에서 요청 범위를 자동으로 맞춰 주는 것이 오프라인 보완 계획입니다. 이 검사는 진단 정확도 평가는 아닙니다.</a:t>
+              <a:t>공개 PreDist 사건 32건을 같은 자료와 같은 출력 형식으로 돌렸습니다. Claude Sonnet 5는 클라우드 최고 수준의 기준점이지만, 보안 때문에 발전소 안에서는 쓸 수 없습니다. 질문은 누가 이기느냐가 아니라, 현장에 설치할 수 있는 모델이 이 상한선에 얼마나 가까운가입니다. 1차 실행에서는 NVIDIA API 오류 13건 때문에 15건만 결과가 나왔지만, 속도를 낮춰 같은 요청을 다시 보내자 모두 결과가 나왔고 Ultra는 32건 중 26건을 통과했습니다. 끝까지 작성한 점검안 26개는 모두 근거 검사를 통과했고, 조회하지 않은 기록을 지어낸 경우는 한 번도 없었습니다. 남은 실패 6건은 모두 시간 구간을 한도보다 길게 요청한 한 가지 도구 실수였습니다. 도구가 긴 요청을 최근 24행으로 자동으로 맞추도록 고치고 32건 전체를 다시 돌리자 32건 모두 통과했습니다. 다만 이 보정은 같은 32건을 보고 설계했기 때문에 새 사건에서 다시 확인해야 합니다. 이 검사는 진단 정확도 평가는 아닙니다.</a:t>
             </a:r>
           </a:p>
         </p:txBody>
@@ -7165,7 +7165,7 @@
                 <a:ea typeface="Apple SD Gothic Neo"/>
                 <a:cs typeface="Apple SD Gothic Neo"/>
               </a:rPr>
-              <a:t>평가 결과: 판단의 질은 상한선에 가깝다</a:t>
+              <a:t>평가 결과: 클라우드 상한선에 닿았다</a:t>
             </a:r>
           </a:p>
         </p:txBody>
@@ -7187,7 +7187,7 @@
         <p:spPr>
           <a:xfrm>
             <a:off x="548640" y="1783080"/>
-            <a:ext cx="6675120" cy="3319558"/>
+            <a:ext cx="6032537" cy="3566160"/>
           </a:xfrm>
           <a:prstGeom prst="rect">
             <a:avLst/>
@@ -7284,7 +7284,7 @@
                 <a:ea typeface="Apple SD Gothic Neo"/>
                 <a:cs typeface="Apple SD Gothic Neo"/>
               </a:rPr>
-              <a:t>API 오류 재실행 후 Ultra 26/32</a:t>
+              <a:t>도구 보정 후 Ultra 32/32</a:t>
             </a:r>
           </a:p>
           <a:p>
@@ -7302,7 +7302,7 @@
                 <a:ea typeface="Apple SD Gothic Neo"/>
                 <a:cs typeface="Apple SD Gothic Neo"/>
               </a:rPr>
-              <a:t>작성한 점검안 26개 모두 통과 · 근거 조작 0건</a:t>
+              <a:t>15 → 26 → 32 · 근거 조작 0건</a:t>
             </a:r>
           </a:p>
           <a:p>
@@ -7338,7 +7338,7 @@
                 <a:ea typeface="Apple SD Gothic Neo"/>
                 <a:cs typeface="Apple SD Gothic Neo"/>
               </a:rPr>
-              <a:t>남은 실패 6건</a:t>
+              <a:t>해석 주의</a:t>
             </a:r>
           </a:p>
           <a:p>
@@ -7356,7 +7356,7 @@
                 <a:ea typeface="Apple SD Gothic Neo"/>
                 <a:cs typeface="Apple SD Gothic Neo"/>
               </a:rPr>
-              <a:t>모두 같은 도구 실수 (24행 초과 요청)</a:t>
+              <a:t>보정은 같은 32건을 보고 설계 · 새 사건 재확인 필요</a:t>
             </a:r>
           </a:p>
           <a:p>
@@ -7479,7 +7479,7 @@
                 <a:ea typeface="Apple SD Gothic Neo"/>
                 <a:cs typeface="Apple SD Gothic Neo"/>
               </a:rPr>
-              <a:t>남은 격차는 </a:t>
+              <a:t>격차의 원인은 </a:t>
             </a:r>
             <a:r>
               <a:rPr sz="2000" b="1">
@@ -7490,7 +7490,7 @@
                 <a:ea typeface="Apple SD Gothic Neo"/>
                 <a:cs typeface="Apple SD Gothic Neo"/>
               </a:rPr>
-              <a:t>한 가지 도구 실수</a:t>
+              <a:t>API 오류와 한 가지 도구 실수</a:t>
             </a:r>
             <a:r>
               <a:rPr sz="1600" b="0">
@@ -7501,7 +7501,7 @@
                 <a:ea typeface="Apple SD Gothic Neo"/>
                 <a:cs typeface="Apple SD Gothic Neo"/>
               </a:rPr>
-              <a:t>  →  도구가 요청 범위를 맞추도록 오프라인에서 보완 예정</a:t>
+              <a:t>  →  둘 다 고친 뒤 32/32</a:t>
             </a:r>
           </a:p>
         </p:txBody>
